--- a/docs/工作/04-营销推广/代运营-Quality1st/8-10月笔记投放/8-10月小红书笔记投放方案.pptx
+++ b/docs/工作/04-营销推广/代运营-Quality1st/8-10月笔记投放/8-10月小红书笔记投放方案.pptx
@@ -17,9 +17,10 @@
     <p:sldId id="265" r:id="rId11"/>
     <p:sldId id="266" r:id="rId12"/>
     <p:sldId id="267" r:id="rId13"/>
+    <p:sldId id="268" r:id="rId14"/>
   </p:sldIdLst>
   <p:notesMasterIdLst>
-    <p:notesMasterId r:id="rId14"/>
+    <p:notesMasterId r:id="rId15"/>
   </p:notesMasterIdLst>
   <p:sldSz cx="12191695" cy="6858000"/>
   <p:notesSz cx="6858000" cy="12191695"/>
@@ -801,6 +802,94 @@
             <a:fld id="{F7021451-1387-4CA6-816F-3879F97B5CBC}" type="slidenum">
               <a:rPr lang="en-US"/>
               <a:t>12</a:t>
+            </a:fld>
+            <a:endParaRPr lang="en-US"/>
+          </a:p>
+        </p:txBody>
+      </p:sp>
+    </p:spTree>
+    <p:extLst>
+      <p:ext uri="{BB962C8B-B14F-4D97-AF65-F5344CB8AC3E}">
+        <p14:creationId xmlns:p14="http://schemas.microsoft.com/office/powerpoint/2010/main" val="1024086991"/>
+      </p:ext>
+    </p:extLst>
+  </p:cSld>
+  <p:clrMapOvr>
+    <a:masterClrMapping/>
+  </p:clrMapOvr>
+</p:notes>
+</file>
+
+<file path=ppt/notesSlides/notesSlide13.xml><?xml version="1.0" encoding="utf-8"?>
+<p:notes xmlns:a="http://schemas.openxmlformats.org/drawingml/2006/main" xmlns:r="http://schemas.openxmlformats.org/officeDocument/2006/relationships" xmlns:p="http://schemas.openxmlformats.org/presentationml/2006/main">
+  <p:cSld>
+    <p:spTree>
+      <p:nvGrpSpPr>
+        <p:cNvPr id="1" name=""/>
+        <p:cNvGrpSpPr/>
+        <p:nvPr/>
+      </p:nvGrpSpPr>
+      <p:grpSpPr>
+        <a:xfrm>
+          <a:off x="0" y="0"/>
+          <a:ext cx="0" cy="0"/>
+          <a:chOff x="0" y="0"/>
+          <a:chExt cx="0" cy="0"/>
+        </a:xfrm>
+      </p:grpSpPr>
+      <p:sp>
+        <p:nvSpPr>
+          <p:cNvPr id="2" name="Slide Image Placeholder 1"/>
+          <p:cNvSpPr>
+            <a:spLocks noGrp="1" noRot="1" noChangeAspect="1"/>
+          </p:cNvSpPr>
+          <p:nvPr>
+            <p:ph type="sldImg"/>
+          </p:nvPr>
+        </p:nvSpPr>
+        <p:spPr/>
+      </p:sp>
+      <p:sp>
+        <p:nvSpPr>
+          <p:cNvPr id="3" name="Notes Placeholder 2"/>
+          <p:cNvSpPr>
+            <a:spLocks noGrp="1"/>
+          </p:cNvSpPr>
+          <p:nvPr>
+            <p:ph type="body" idx="1"/>
+          </p:nvPr>
+        </p:nvSpPr>
+        <p:spPr/>
+        <p:txBody>
+          <a:bodyPr/>
+          <a:lstStyle/>
+          <a:p>
+            <a:r>
+              <a:rPr lang="en-US" dirty="0"/>
+              <a:t/>
+            </a:r>
+            <a:endParaRPr lang="en-US" dirty="0"/>
+          </a:p>
+        </p:txBody>
+      </p:sp>
+      <p:sp>
+        <p:nvSpPr>
+          <p:cNvPr id="4" name="Slide Number Placeholder 3"/>
+          <p:cNvSpPr>
+            <a:spLocks noGrp="1"/>
+          </p:cNvSpPr>
+          <p:nvPr>
+            <p:ph type="sldNum" sz="quarter" idx="10"/>
+          </p:nvPr>
+        </p:nvSpPr>
+        <p:spPr/>
+        <p:txBody>
+          <a:bodyPr/>
+          <a:lstStyle/>
+          <a:p>
+            <a:fld id="{F7021451-1387-4CA6-816F-3879F97B5CBC}" type="slidenum">
+              <a:rPr lang="en-US"/>
+              <a:t>13</a:t>
             </a:fld>
             <a:endParaRPr lang="en-US"/>
           </a:p>
@@ -2056,6 +2145,2688 @@
                 <a:ea typeface="Microsoft YaHei" pitchFamily="34" charset="-122"/>
                 <a:cs typeface="Microsoft YaHei" pitchFamily="34" charset="-120"/>
               </a:rPr>
+              <a:t>⑤ SPU 设定 + 定价</a:t>
+            </a:r>
+            <a:endParaRPr lang="en-US" sz="2400" dirty="0"/>
+          </a:p>
+        </p:txBody>
+      </p:sp>
+      <p:graphicFrame>
+        <p:nvGraphicFramePr>
+          <p:cNvPr id="11" name="Table 0"/>
+          <p:cNvGraphicFramePr>
+            <a:graphicFrameLocks noGrp="1"/>
+          </p:cNvGraphicFramePr>
+          <p:nvPr>
+            <p:extLst>
+              <p:ext uri="{D42A27DB-BD31-4B8C-83A1-F6EECF244321}">
+                <p14:modId xmlns:p14="http://schemas.microsoft.com/office/powerpoint/2010/main" val="1579011935"/>
+              </p:ext>
+            </p:extLst>
+          </p:nvPr>
+        </p:nvGraphicFramePr>
+        <p:xfrm>
+          <a:off x="457200" y="1463040"/>
+          <a:ext cx="11247120" cy="914400"/>
+        </p:xfrm>
+        <a:graphic>
+          <a:graphicData uri="http://schemas.openxmlformats.org/drawingml/2006/table">
+            <a:tbl>
+              <a:tblPr/>
+              <a:tblGrid>
+                <a:gridCol w="1737360"/>
+                <a:gridCol w="3200400"/>
+                <a:gridCol w="1097280"/>
+                <a:gridCol w="1737360"/>
+                <a:gridCol w="914400"/>
+                <a:gridCol w="2560320"/>
+              </a:tblGrid>
+              <a:tr h="658368">
+                <a:tc>
+                  <a:txBody>
+                    <a:bodyPr/>
+                    <a:lstStyle/>
+                    <a:p>
+                      <a:pPr algn="ctr" indent="0" marL="0">
+                        <a:buNone/>
+                      </a:pPr>
+                      <a:r>
+                        <a:rPr lang="en-US" sz="1500" b="1" dirty="0">
+                          <a:solidFill>
+                            <a:srgbClr val="FFFFFF"/>
+                          </a:solidFill>
+                          <a:latin typeface="Microsoft YaHei" pitchFamily="34" charset="0"/>
+                          <a:ea typeface="Microsoft YaHei" pitchFamily="34" charset="-122"/>
+                          <a:cs typeface="Microsoft YaHei" pitchFamily="34" charset="-120"/>
+                        </a:rPr>
+                        <a:t>颜色(版)</a:t>
+                      </a:r>
+                      <a:endParaRPr lang="en-US" sz="1500" dirty="0">
+                        <a:latin typeface="Microsoft YaHei" charset="0"/>
+                        <a:ea typeface="Microsoft YaHei" charset="0"/>
+                        <a:cs typeface="Microsoft YaHei" charset="0"/>
+                      </a:endParaRPr>
+                    </a:p>
+                  </a:txBody>
+                  <a:tcPr marL="91440" marR="91440" marT="45720" marB="45720" anchor="ctr">
+                    <a:lnL w="9525" cap="flat" cmpd="sng" algn="ctr">
+                      <a:solidFill>
+                        <a:srgbClr val="E2E2E2"/>
+                      </a:solidFill>
+                      <a:prstDash val="solid"/>
+                      <a:round/>
+                      <a:headEnd type="none" w="med" len="med"/>
+                      <a:tailEnd type="none" w="med" len="med"/>
+                    </a:lnL>
+                    <a:lnR w="9525" cap="flat" cmpd="sng" algn="ctr">
+                      <a:solidFill>
+                        <a:srgbClr val="E2E2E2"/>
+                      </a:solidFill>
+                      <a:prstDash val="solid"/>
+                      <a:round/>
+                      <a:headEnd type="none" w="med" len="med"/>
+                      <a:tailEnd type="none" w="med" len="med"/>
+                    </a:lnR>
+                    <a:lnT w="9525" cap="flat" cmpd="sng" algn="ctr">
+                      <a:solidFill>
+                        <a:srgbClr val="E2E2E2"/>
+                      </a:solidFill>
+                      <a:prstDash val="solid"/>
+                      <a:round/>
+                      <a:headEnd type="none" w="med" len="med"/>
+                      <a:tailEnd type="none" w="med" len="med"/>
+                    </a:lnT>
+                    <a:lnB w="9525" cap="flat" cmpd="sng" algn="ctr">
+                      <a:solidFill>
+                        <a:srgbClr val="E2E2E2"/>
+                      </a:solidFill>
+                      <a:prstDash val="solid"/>
+                      <a:round/>
+                      <a:headEnd type="none" w="med" len="med"/>
+                      <a:tailEnd type="none" w="med" len="med"/>
+                    </a:lnB>
+                    <a:solidFill>
+                      <a:srgbClr val="7A0E22"/>
+                    </a:solidFill>
+                  </a:tcPr>
+                </a:tc>
+                <a:tc>
+                  <a:txBody>
+                    <a:bodyPr/>
+                    <a:lstStyle/>
+                    <a:p>
+                      <a:pPr algn="ctr" indent="0" marL="0">
+                        <a:buNone/>
+                      </a:pPr>
+                      <a:r>
+                        <a:rPr lang="en-US" sz="1500" b="1" dirty="0">
+                          <a:solidFill>
+                            <a:srgbClr val="FFFFFF"/>
+                          </a:solidFill>
+                          <a:latin typeface="Microsoft YaHei" pitchFamily="34" charset="0"/>
+                          <a:ea typeface="Microsoft YaHei" pitchFamily="34" charset="-122"/>
+                          <a:cs typeface="Microsoft YaHei" pitchFamily="34" charset="-120"/>
+                        </a:rPr>
+                        <a:t>官方名</a:t>
+                      </a:r>
+                      <a:endParaRPr lang="en-US" sz="1500" dirty="0">
+                        <a:latin typeface="Microsoft YaHei" charset="0"/>
+                        <a:ea typeface="Microsoft YaHei" charset="0"/>
+                        <a:cs typeface="Microsoft YaHei" charset="0"/>
+                      </a:endParaRPr>
+                    </a:p>
+                  </a:txBody>
+                  <a:tcPr marL="91440" marR="91440" marT="45720" marB="45720" anchor="ctr">
+                    <a:lnL w="9525" cap="flat" cmpd="sng" algn="ctr">
+                      <a:solidFill>
+                        <a:srgbClr val="E2E2E2"/>
+                      </a:solidFill>
+                      <a:prstDash val="solid"/>
+                      <a:round/>
+                      <a:headEnd type="none" w="med" len="med"/>
+                      <a:tailEnd type="none" w="med" len="med"/>
+                    </a:lnL>
+                    <a:lnR w="9525" cap="flat" cmpd="sng" algn="ctr">
+                      <a:solidFill>
+                        <a:srgbClr val="E2E2E2"/>
+                      </a:solidFill>
+                      <a:prstDash val="solid"/>
+                      <a:round/>
+                      <a:headEnd type="none" w="med" len="med"/>
+                      <a:tailEnd type="none" w="med" len="med"/>
+                    </a:lnR>
+                    <a:lnT w="9525" cap="flat" cmpd="sng" algn="ctr">
+                      <a:solidFill>
+                        <a:srgbClr val="E2E2E2"/>
+                      </a:solidFill>
+                      <a:prstDash val="solid"/>
+                      <a:round/>
+                      <a:headEnd type="none" w="med" len="med"/>
+                      <a:tailEnd type="none" w="med" len="med"/>
+                    </a:lnT>
+                    <a:lnB w="9525" cap="flat" cmpd="sng" algn="ctr">
+                      <a:solidFill>
+                        <a:srgbClr val="E2E2E2"/>
+                      </a:solidFill>
+                      <a:prstDash val="solid"/>
+                      <a:round/>
+                      <a:headEnd type="none" w="med" len="med"/>
+                      <a:tailEnd type="none" w="med" len="med"/>
+                    </a:lnB>
+                    <a:solidFill>
+                      <a:srgbClr val="7A0E22"/>
+                    </a:solidFill>
+                  </a:tcPr>
+                </a:tc>
+                <a:tc>
+                  <a:txBody>
+                    <a:bodyPr/>
+                    <a:lstStyle/>
+                    <a:p>
+                      <a:pPr algn="ctr" indent="0" marL="0">
+                        <a:buNone/>
+                      </a:pPr>
+                      <a:r>
+                        <a:rPr lang="en-US" sz="1500" b="1" dirty="0">
+                          <a:solidFill>
+                            <a:srgbClr val="FFFFFF"/>
+                          </a:solidFill>
+                          <a:latin typeface="Microsoft YaHei" pitchFamily="34" charset="0"/>
+                          <a:ea typeface="Microsoft YaHei" pitchFamily="34" charset="-122"/>
+                          <a:cs typeface="Microsoft YaHei" pitchFamily="34" charset="-120"/>
+                        </a:rPr>
+                        <a:t>日常价</a:t>
+                      </a:r>
+                      <a:endParaRPr lang="en-US" sz="1500" dirty="0">
+                        <a:latin typeface="Microsoft YaHei" charset="0"/>
+                        <a:ea typeface="Microsoft YaHei" charset="0"/>
+                        <a:cs typeface="Microsoft YaHei" charset="0"/>
+                      </a:endParaRPr>
+                    </a:p>
+                  </a:txBody>
+                  <a:tcPr marL="91440" marR="91440" marT="45720" marB="45720" anchor="ctr">
+                    <a:lnL w="9525" cap="flat" cmpd="sng" algn="ctr">
+                      <a:solidFill>
+                        <a:srgbClr val="E2E2E2"/>
+                      </a:solidFill>
+                      <a:prstDash val="solid"/>
+                      <a:round/>
+                      <a:headEnd type="none" w="med" len="med"/>
+                      <a:tailEnd type="none" w="med" len="med"/>
+                    </a:lnL>
+                    <a:lnR w="9525" cap="flat" cmpd="sng" algn="ctr">
+                      <a:solidFill>
+                        <a:srgbClr val="E2E2E2"/>
+                      </a:solidFill>
+                      <a:prstDash val="solid"/>
+                      <a:round/>
+                      <a:headEnd type="none" w="med" len="med"/>
+                      <a:tailEnd type="none" w="med" len="med"/>
+                    </a:lnR>
+                    <a:lnT w="9525" cap="flat" cmpd="sng" algn="ctr">
+                      <a:solidFill>
+                        <a:srgbClr val="E2E2E2"/>
+                      </a:solidFill>
+                      <a:prstDash val="solid"/>
+                      <a:round/>
+                      <a:headEnd type="none" w="med" len="med"/>
+                      <a:tailEnd type="none" w="med" len="med"/>
+                    </a:lnT>
+                    <a:lnB w="9525" cap="flat" cmpd="sng" algn="ctr">
+                      <a:solidFill>
+                        <a:srgbClr val="E2E2E2"/>
+                      </a:solidFill>
+                      <a:prstDash val="solid"/>
+                      <a:round/>
+                      <a:headEnd type="none" w="med" len="med"/>
+                      <a:tailEnd type="none" w="med" len="med"/>
+                    </a:lnB>
+                    <a:solidFill>
+                      <a:srgbClr val="7A0E22"/>
+                    </a:solidFill>
+                  </a:tcPr>
+                </a:tc>
+                <a:tc>
+                  <a:txBody>
+                    <a:bodyPr/>
+                    <a:lstStyle/>
+                    <a:p>
+                      <a:pPr algn="ctr" indent="0" marL="0">
+                        <a:buNone/>
+                      </a:pPr>
+                      <a:r>
+                        <a:rPr lang="en-US" sz="1500" b="1" dirty="0">
+                          <a:solidFill>
+                            <a:srgbClr val="FFFFFF"/>
+                          </a:solidFill>
+                          <a:latin typeface="Microsoft YaHei" pitchFamily="34" charset="0"/>
+                          <a:ea typeface="Microsoft YaHei" pitchFamily="34" charset="-122"/>
+                          <a:cs typeface="Microsoft YaHei" pitchFamily="34" charset="-120"/>
+                        </a:rPr>
+                        <a:t>直播价(2/6袋)</a:t>
+                      </a:r>
+                      <a:endParaRPr lang="en-US" sz="1500" dirty="0">
+                        <a:latin typeface="Microsoft YaHei" charset="0"/>
+                        <a:ea typeface="Microsoft YaHei" charset="0"/>
+                        <a:cs typeface="Microsoft YaHei" charset="0"/>
+                      </a:endParaRPr>
+                    </a:p>
+                  </a:txBody>
+                  <a:tcPr marL="91440" marR="91440" marT="45720" marB="45720" anchor="ctr">
+                    <a:lnL w="9525" cap="flat" cmpd="sng" algn="ctr">
+                      <a:solidFill>
+                        <a:srgbClr val="E2E2E2"/>
+                      </a:solidFill>
+                      <a:prstDash val="solid"/>
+                      <a:round/>
+                      <a:headEnd type="none" w="med" len="med"/>
+                      <a:tailEnd type="none" w="med" len="med"/>
+                    </a:lnL>
+                    <a:lnR w="9525" cap="flat" cmpd="sng" algn="ctr">
+                      <a:solidFill>
+                        <a:srgbClr val="E2E2E2"/>
+                      </a:solidFill>
+                      <a:prstDash val="solid"/>
+                      <a:round/>
+                      <a:headEnd type="none" w="med" len="med"/>
+                      <a:tailEnd type="none" w="med" len="med"/>
+                    </a:lnR>
+                    <a:lnT w="9525" cap="flat" cmpd="sng" algn="ctr">
+                      <a:solidFill>
+                        <a:srgbClr val="E2E2E2"/>
+                      </a:solidFill>
+                      <a:prstDash val="solid"/>
+                      <a:round/>
+                      <a:headEnd type="none" w="med" len="med"/>
+                      <a:tailEnd type="none" w="med" len="med"/>
+                    </a:lnT>
+                    <a:lnB w="9525" cap="flat" cmpd="sng" algn="ctr">
+                      <a:solidFill>
+                        <a:srgbClr val="E2E2E2"/>
+                      </a:solidFill>
+                      <a:prstDash val="solid"/>
+                      <a:round/>
+                      <a:headEnd type="none" w="med" len="med"/>
+                      <a:tailEnd type="none" w="med" len="med"/>
+                    </a:lnB>
+                    <a:solidFill>
+                      <a:srgbClr val="7A0E22"/>
+                    </a:solidFill>
+                  </a:tcPr>
+                </a:tc>
+                <a:tc>
+                  <a:txBody>
+                    <a:bodyPr/>
+                    <a:lstStyle/>
+                    <a:p>
+                      <a:pPr algn="ctr" indent="0" marL="0">
+                        <a:buNone/>
+                      </a:pPr>
+                      <a:r>
+                        <a:rPr lang="en-US" sz="1500" b="1" dirty="0">
+                          <a:solidFill>
+                            <a:srgbClr val="FFFFFF"/>
+                          </a:solidFill>
+                          <a:latin typeface="Microsoft YaHei" pitchFamily="34" charset="0"/>
+                          <a:ea typeface="Microsoft YaHei" pitchFamily="34" charset="-122"/>
+                          <a:cs typeface="Microsoft YaHei" pitchFamily="34" charset="-120"/>
+                        </a:rPr>
+                        <a:t>库存</a:t>
+                      </a:r>
+                      <a:endParaRPr lang="en-US" sz="1500" dirty="0">
+                        <a:latin typeface="Microsoft YaHei" charset="0"/>
+                        <a:ea typeface="Microsoft YaHei" charset="0"/>
+                        <a:cs typeface="Microsoft YaHei" charset="0"/>
+                      </a:endParaRPr>
+                    </a:p>
+                  </a:txBody>
+                  <a:tcPr marL="91440" marR="91440" marT="45720" marB="45720" anchor="ctr">
+                    <a:lnL w="9525" cap="flat" cmpd="sng" algn="ctr">
+                      <a:solidFill>
+                        <a:srgbClr val="E2E2E2"/>
+                      </a:solidFill>
+                      <a:prstDash val="solid"/>
+                      <a:round/>
+                      <a:headEnd type="none" w="med" len="med"/>
+                      <a:tailEnd type="none" w="med" len="med"/>
+                    </a:lnL>
+                    <a:lnR w="9525" cap="flat" cmpd="sng" algn="ctr">
+                      <a:solidFill>
+                        <a:srgbClr val="E2E2E2"/>
+                      </a:solidFill>
+                      <a:prstDash val="solid"/>
+                      <a:round/>
+                      <a:headEnd type="none" w="med" len="med"/>
+                      <a:tailEnd type="none" w="med" len="med"/>
+                    </a:lnR>
+                    <a:lnT w="9525" cap="flat" cmpd="sng" algn="ctr">
+                      <a:solidFill>
+                        <a:srgbClr val="E2E2E2"/>
+                      </a:solidFill>
+                      <a:prstDash val="solid"/>
+                      <a:round/>
+                      <a:headEnd type="none" w="med" len="med"/>
+                      <a:tailEnd type="none" w="med" len="med"/>
+                    </a:lnT>
+                    <a:lnB w="9525" cap="flat" cmpd="sng" algn="ctr">
+                      <a:solidFill>
+                        <a:srgbClr val="E2E2E2"/>
+                      </a:solidFill>
+                      <a:prstDash val="solid"/>
+                      <a:round/>
+                      <a:headEnd type="none" w="med" len="med"/>
+                      <a:tailEnd type="none" w="med" len="med"/>
+                    </a:lnB>
+                    <a:solidFill>
+                      <a:srgbClr val="7A0E22"/>
+                    </a:solidFill>
+                  </a:tcPr>
+                </a:tc>
+                <a:tc>
+                  <a:txBody>
+                    <a:bodyPr/>
+                    <a:lstStyle/>
+                    <a:p>
+                      <a:pPr algn="ctr" indent="0" marL="0">
+                        <a:buNone/>
+                      </a:pPr>
+                      <a:r>
+                        <a:rPr lang="en-US" sz="1500" b="1" dirty="0">
+                          <a:solidFill>
+                            <a:srgbClr val="FFFFFF"/>
+                          </a:solidFill>
+                          <a:latin typeface="Microsoft YaHei" pitchFamily="34" charset="0"/>
+                          <a:ea typeface="Microsoft YaHei" pitchFamily="34" charset="-122"/>
+                          <a:cs typeface="Microsoft YaHei" pitchFamily="34" charset="-120"/>
+                        </a:rPr>
+                        <a:t>差异定位</a:t>
+                      </a:r>
+                      <a:endParaRPr lang="en-US" sz="1500" dirty="0">
+                        <a:latin typeface="Microsoft YaHei" charset="0"/>
+                        <a:ea typeface="Microsoft YaHei" charset="0"/>
+                        <a:cs typeface="Microsoft YaHei" charset="0"/>
+                      </a:endParaRPr>
+                    </a:p>
+                  </a:txBody>
+                  <a:tcPr marL="91440" marR="91440" marT="45720" marB="45720" anchor="ctr">
+                    <a:lnL w="9525" cap="flat" cmpd="sng" algn="ctr">
+                      <a:solidFill>
+                        <a:srgbClr val="E2E2E2"/>
+                      </a:solidFill>
+                      <a:prstDash val="solid"/>
+                      <a:round/>
+                      <a:headEnd type="none" w="med" len="med"/>
+                      <a:tailEnd type="none" w="med" len="med"/>
+                    </a:lnL>
+                    <a:lnR w="9525" cap="flat" cmpd="sng" algn="ctr">
+                      <a:solidFill>
+                        <a:srgbClr val="E2E2E2"/>
+                      </a:solidFill>
+                      <a:prstDash val="solid"/>
+                      <a:round/>
+                      <a:headEnd type="none" w="med" len="med"/>
+                      <a:tailEnd type="none" w="med" len="med"/>
+                    </a:lnR>
+                    <a:lnT w="9525" cap="flat" cmpd="sng" algn="ctr">
+                      <a:solidFill>
+                        <a:srgbClr val="E2E2E2"/>
+                      </a:solidFill>
+                      <a:prstDash val="solid"/>
+                      <a:round/>
+                      <a:headEnd type="none" w="med" len="med"/>
+                      <a:tailEnd type="none" w="med" len="med"/>
+                    </a:lnT>
+                    <a:lnB w="9525" cap="flat" cmpd="sng" algn="ctr">
+                      <a:solidFill>
+                        <a:srgbClr val="E2E2E2"/>
+                      </a:solidFill>
+                      <a:prstDash val="solid"/>
+                      <a:round/>
+                      <a:headEnd type="none" w="med" len="med"/>
+                      <a:tailEnd type="none" w="med" len="med"/>
+                    </a:lnB>
+                    <a:solidFill>
+                      <a:srgbClr val="7A0E22"/>
+                    </a:solidFill>
+                  </a:tcPr>
+                </a:tc>
+              </a:tr>
+              <a:tr h="658368">
+                <a:tc>
+                  <a:txBody>
+                    <a:bodyPr/>
+                    <a:lstStyle/>
+                    <a:p>
+                      <a:pPr algn="ctr" indent="0" marL="0">
+                        <a:buNone/>
+                      </a:pPr>
+                      <a:r>
+                        <a:rPr lang="en-US" sz="1400" dirty="0">
+                          <a:solidFill>
+                            <a:srgbClr val="23272E"/>
+                          </a:solidFill>
+                          <a:latin typeface="Microsoft YaHei" pitchFamily="34" charset="0"/>
+                          <a:ea typeface="Microsoft YaHei" pitchFamily="34" charset="-122"/>
+                          <a:cs typeface="Microsoft YaHei" pitchFamily="34" charset="-120"/>
+                        </a:rPr>
+                        <a:t>金色·标准</a:t>
+                      </a:r>
+                      <a:endParaRPr lang="en-US" sz="1400" dirty="0">
+                        <a:latin typeface="Microsoft YaHei" charset="0"/>
+                        <a:ea typeface="Microsoft YaHei" charset="0"/>
+                        <a:cs typeface="Microsoft YaHei" charset="0"/>
+                      </a:endParaRPr>
+                    </a:p>
+                  </a:txBody>
+                  <a:tcPr marL="63500" marR="63500" marT="38100" marB="38100" anchor="ctr">
+                    <a:lnL w="9525" cap="flat" cmpd="sng" algn="ctr">
+                      <a:solidFill>
+                        <a:srgbClr val="E2E2E2"/>
+                      </a:solidFill>
+                      <a:prstDash val="solid"/>
+                      <a:round/>
+                      <a:headEnd type="none" w="med" len="med"/>
+                      <a:tailEnd type="none" w="med" len="med"/>
+                    </a:lnL>
+                    <a:lnR w="9525" cap="flat" cmpd="sng" algn="ctr">
+                      <a:solidFill>
+                        <a:srgbClr val="E2E2E2"/>
+                      </a:solidFill>
+                      <a:prstDash val="solid"/>
+                      <a:round/>
+                      <a:headEnd type="none" w="med" len="med"/>
+                      <a:tailEnd type="none" w="med" len="med"/>
+                    </a:lnR>
+                    <a:lnT w="9525" cap="flat" cmpd="sng" algn="ctr">
+                      <a:solidFill>
+                        <a:srgbClr val="E2E2E2"/>
+                      </a:solidFill>
+                      <a:prstDash val="solid"/>
+                      <a:round/>
+                      <a:headEnd type="none" w="med" len="med"/>
+                      <a:tailEnd type="none" w="med" len="med"/>
+                    </a:lnT>
+                    <a:lnB w="9525" cap="flat" cmpd="sng" algn="ctr">
+                      <a:solidFill>
+                        <a:srgbClr val="E2E2E2"/>
+                      </a:solidFill>
+                      <a:prstDash val="solid"/>
+                      <a:round/>
+                      <a:headEnd type="none" w="med" len="med"/>
+                      <a:tailEnd type="none" w="med" len="med"/>
+                    </a:lnB>
+                    <a:solidFill>
+                      <a:srgbClr val="FFFFFF"/>
+                    </a:solidFill>
+                  </a:tcPr>
+                </a:tc>
+                <a:tc>
+                  <a:txBody>
+                    <a:bodyPr/>
+                    <a:lstStyle/>
+                    <a:p>
+                      <a:pPr algn="l" indent="0" marL="0">
+                        <a:buNone/>
+                      </a:pPr>
+                      <a:r>
+                        <a:rPr lang="en-US" sz="1400" dirty="0">
+                          <a:solidFill>
+                            <a:srgbClr val="23272E"/>
+                          </a:solidFill>
+                          <a:latin typeface="Microsoft YaHei" pitchFamily="34" charset="0"/>
+                          <a:ea typeface="Microsoft YaHei" pitchFamily="34" charset="-122"/>
+                          <a:cs typeface="Microsoft YaHei" pitchFamily="34" charset="-120"/>
+                        </a:rPr>
+                        <a:t>高浓度VC精华面膜</a:t>
+                      </a:r>
+                      <a:endParaRPr lang="en-US" sz="1400" dirty="0">
+                        <a:latin typeface="Microsoft YaHei" charset="0"/>
+                        <a:ea typeface="Microsoft YaHei" charset="0"/>
+                        <a:cs typeface="Microsoft YaHei" charset="0"/>
+                      </a:endParaRPr>
+                    </a:p>
+                  </a:txBody>
+                  <a:tcPr marL="63500" marR="63500" marT="38100" marB="38100" anchor="ctr">
+                    <a:lnL w="9525" cap="flat" cmpd="sng" algn="ctr">
+                      <a:solidFill>
+                        <a:srgbClr val="E2E2E2"/>
+                      </a:solidFill>
+                      <a:prstDash val="solid"/>
+                      <a:round/>
+                      <a:headEnd type="none" w="med" len="med"/>
+                      <a:tailEnd type="none" w="med" len="med"/>
+                    </a:lnL>
+                    <a:lnR w="9525" cap="flat" cmpd="sng" algn="ctr">
+                      <a:solidFill>
+                        <a:srgbClr val="E2E2E2"/>
+                      </a:solidFill>
+                      <a:prstDash val="solid"/>
+                      <a:round/>
+                      <a:headEnd type="none" w="med" len="med"/>
+                      <a:tailEnd type="none" w="med" len="med"/>
+                    </a:lnR>
+                    <a:lnT w="9525" cap="flat" cmpd="sng" algn="ctr">
+                      <a:solidFill>
+                        <a:srgbClr val="E2E2E2"/>
+                      </a:solidFill>
+                      <a:prstDash val="solid"/>
+                      <a:round/>
+                      <a:headEnd type="none" w="med" len="med"/>
+                      <a:tailEnd type="none" w="med" len="med"/>
+                    </a:lnT>
+                    <a:lnB w="9525" cap="flat" cmpd="sng" algn="ctr">
+                      <a:solidFill>
+                        <a:srgbClr val="E2E2E2"/>
+                      </a:solidFill>
+                      <a:prstDash val="solid"/>
+                      <a:round/>
+                      <a:headEnd type="none" w="med" len="med"/>
+                      <a:tailEnd type="none" w="med" len="med"/>
+                    </a:lnB>
+                    <a:solidFill>
+                      <a:srgbClr val="FFFFFF"/>
+                    </a:solidFill>
+                  </a:tcPr>
+                </a:tc>
+                <a:tc>
+                  <a:txBody>
+                    <a:bodyPr/>
+                    <a:lstStyle/>
+                    <a:p>
+                      <a:pPr algn="l" indent="0" marL="0">
+                        <a:buNone/>
+                      </a:pPr>
+                      <a:r>
+                        <a:rPr lang="en-US" sz="1400" dirty="0">
+                          <a:solidFill>
+                            <a:srgbClr val="23272E"/>
+                          </a:solidFill>
+                          <a:latin typeface="Microsoft YaHei" pitchFamily="34" charset="0"/>
+                          <a:ea typeface="Microsoft YaHei" pitchFamily="34" charset="-122"/>
+                          <a:cs typeface="Microsoft YaHei" pitchFamily="34" charset="-120"/>
+                        </a:rPr>
+                        <a:t>69</a:t>
+                      </a:r>
+                      <a:endParaRPr lang="en-US" sz="1400" dirty="0">
+                        <a:latin typeface="Microsoft YaHei" charset="0"/>
+                        <a:ea typeface="Microsoft YaHei" charset="0"/>
+                        <a:cs typeface="Microsoft YaHei" charset="0"/>
+                      </a:endParaRPr>
+                    </a:p>
+                  </a:txBody>
+                  <a:tcPr marL="63500" marR="63500" marT="38100" marB="38100" anchor="ctr">
+                    <a:lnL w="9525" cap="flat" cmpd="sng" algn="ctr">
+                      <a:solidFill>
+                        <a:srgbClr val="E2E2E2"/>
+                      </a:solidFill>
+                      <a:prstDash val="solid"/>
+                      <a:round/>
+                      <a:headEnd type="none" w="med" len="med"/>
+                      <a:tailEnd type="none" w="med" len="med"/>
+                    </a:lnL>
+                    <a:lnR w="9525" cap="flat" cmpd="sng" algn="ctr">
+                      <a:solidFill>
+                        <a:srgbClr val="E2E2E2"/>
+                      </a:solidFill>
+                      <a:prstDash val="solid"/>
+                      <a:round/>
+                      <a:headEnd type="none" w="med" len="med"/>
+                      <a:tailEnd type="none" w="med" len="med"/>
+                    </a:lnR>
+                    <a:lnT w="9525" cap="flat" cmpd="sng" algn="ctr">
+                      <a:solidFill>
+                        <a:srgbClr val="E2E2E2"/>
+                      </a:solidFill>
+                      <a:prstDash val="solid"/>
+                      <a:round/>
+                      <a:headEnd type="none" w="med" len="med"/>
+                      <a:tailEnd type="none" w="med" len="med"/>
+                    </a:lnT>
+                    <a:lnB w="9525" cap="flat" cmpd="sng" algn="ctr">
+                      <a:solidFill>
+                        <a:srgbClr val="E2E2E2"/>
+                      </a:solidFill>
+                      <a:prstDash val="solid"/>
+                      <a:round/>
+                      <a:headEnd type="none" w="med" len="med"/>
+                      <a:tailEnd type="none" w="med" len="med"/>
+                    </a:lnB>
+                    <a:solidFill>
+                      <a:srgbClr val="FFFFFF"/>
+                    </a:solidFill>
+                  </a:tcPr>
+                </a:tc>
+                <a:tc>
+                  <a:txBody>
+                    <a:bodyPr/>
+                    <a:lstStyle/>
+                    <a:p>
+                      <a:pPr algn="l" indent="0" marL="0">
+                        <a:buNone/>
+                      </a:pPr>
+                      <a:r>
+                        <a:rPr lang="en-US" sz="1400" dirty="0">
+                          <a:solidFill>
+                            <a:srgbClr val="23272E"/>
+                          </a:solidFill>
+                          <a:latin typeface="Microsoft YaHei" pitchFamily="34" charset="0"/>
+                          <a:ea typeface="Microsoft YaHei" pitchFamily="34" charset="-122"/>
+                          <a:cs typeface="Microsoft YaHei" pitchFamily="34" charset="-120"/>
+                        </a:rPr>
+                        <a:t>45 / 40</a:t>
+                      </a:r>
+                      <a:endParaRPr lang="en-US" sz="1400" dirty="0">
+                        <a:latin typeface="Microsoft YaHei" charset="0"/>
+                        <a:ea typeface="Microsoft YaHei" charset="0"/>
+                        <a:cs typeface="Microsoft YaHei" charset="0"/>
+                      </a:endParaRPr>
+                    </a:p>
+                  </a:txBody>
+                  <a:tcPr marL="63500" marR="63500" marT="38100" marB="38100" anchor="ctr">
+                    <a:lnL w="9525" cap="flat" cmpd="sng" algn="ctr">
+                      <a:solidFill>
+                        <a:srgbClr val="E2E2E2"/>
+                      </a:solidFill>
+                      <a:prstDash val="solid"/>
+                      <a:round/>
+                      <a:headEnd type="none" w="med" len="med"/>
+                      <a:tailEnd type="none" w="med" len="med"/>
+                    </a:lnL>
+                    <a:lnR w="9525" cap="flat" cmpd="sng" algn="ctr">
+                      <a:solidFill>
+                        <a:srgbClr val="E2E2E2"/>
+                      </a:solidFill>
+                      <a:prstDash val="solid"/>
+                      <a:round/>
+                      <a:headEnd type="none" w="med" len="med"/>
+                      <a:tailEnd type="none" w="med" len="med"/>
+                    </a:lnR>
+                    <a:lnT w="9525" cap="flat" cmpd="sng" algn="ctr">
+                      <a:solidFill>
+                        <a:srgbClr val="E2E2E2"/>
+                      </a:solidFill>
+                      <a:prstDash val="solid"/>
+                      <a:round/>
+                      <a:headEnd type="none" w="med" len="med"/>
+                      <a:tailEnd type="none" w="med" len="med"/>
+                    </a:lnT>
+                    <a:lnB w="9525" cap="flat" cmpd="sng" algn="ctr">
+                      <a:solidFill>
+                        <a:srgbClr val="E2E2E2"/>
+                      </a:solidFill>
+                      <a:prstDash val="solid"/>
+                      <a:round/>
+                      <a:headEnd type="none" w="med" len="med"/>
+                      <a:tailEnd type="none" w="med" len="med"/>
+                    </a:lnB>
+                    <a:solidFill>
+                      <a:srgbClr val="FFFFFF"/>
+                    </a:solidFill>
+                  </a:tcPr>
+                </a:tc>
+                <a:tc>
+                  <a:txBody>
+                    <a:bodyPr/>
+                    <a:lstStyle/>
+                    <a:p>
+                      <a:pPr algn="l" indent="0" marL="0">
+                        <a:buNone/>
+                      </a:pPr>
+                      <a:r>
+                        <a:rPr lang="en-US" sz="1400" dirty="0">
+                          <a:solidFill>
+                            <a:srgbClr val="23272E"/>
+                          </a:solidFill>
+                          <a:latin typeface="Microsoft YaHei" pitchFamily="34" charset="0"/>
+                          <a:ea typeface="Microsoft YaHei" pitchFamily="34" charset="-122"/>
+                          <a:cs typeface="Microsoft YaHei" pitchFamily="34" charset="-120"/>
+                        </a:rPr>
+                        <a:t>300</a:t>
+                      </a:r>
+                      <a:endParaRPr lang="en-US" sz="1400" dirty="0">
+                        <a:latin typeface="Microsoft YaHei" charset="0"/>
+                        <a:ea typeface="Microsoft YaHei" charset="0"/>
+                        <a:cs typeface="Microsoft YaHei" charset="0"/>
+                      </a:endParaRPr>
+                    </a:p>
+                  </a:txBody>
+                  <a:tcPr marL="63500" marR="63500" marT="38100" marB="38100" anchor="ctr">
+                    <a:lnL w="9525" cap="flat" cmpd="sng" algn="ctr">
+                      <a:solidFill>
+                        <a:srgbClr val="E2E2E2"/>
+                      </a:solidFill>
+                      <a:prstDash val="solid"/>
+                      <a:round/>
+                      <a:headEnd type="none" w="med" len="med"/>
+                      <a:tailEnd type="none" w="med" len="med"/>
+                    </a:lnL>
+                    <a:lnR w="9525" cap="flat" cmpd="sng" algn="ctr">
+                      <a:solidFill>
+                        <a:srgbClr val="E2E2E2"/>
+                      </a:solidFill>
+                      <a:prstDash val="solid"/>
+                      <a:round/>
+                      <a:headEnd type="none" w="med" len="med"/>
+                      <a:tailEnd type="none" w="med" len="med"/>
+                    </a:lnR>
+                    <a:lnT w="9525" cap="flat" cmpd="sng" algn="ctr">
+                      <a:solidFill>
+                        <a:srgbClr val="E2E2E2"/>
+                      </a:solidFill>
+                      <a:prstDash val="solid"/>
+                      <a:round/>
+                      <a:headEnd type="none" w="med" len="med"/>
+                      <a:tailEnd type="none" w="med" len="med"/>
+                    </a:lnT>
+                    <a:lnB w="9525" cap="flat" cmpd="sng" algn="ctr">
+                      <a:solidFill>
+                        <a:srgbClr val="E2E2E2"/>
+                      </a:solidFill>
+                      <a:prstDash val="solid"/>
+                      <a:round/>
+                      <a:headEnd type="none" w="med" len="med"/>
+                      <a:tailEnd type="none" w="med" len="med"/>
+                    </a:lnB>
+                    <a:solidFill>
+                      <a:srgbClr val="FFFFFF"/>
+                    </a:solidFill>
+                  </a:tcPr>
+                </a:tc>
+                <a:tc>
+                  <a:txBody>
+                    <a:bodyPr/>
+                    <a:lstStyle/>
+                    <a:p>
+                      <a:pPr algn="l" indent="0" marL="0">
+                        <a:buNone/>
+                      </a:pPr>
+                      <a:r>
+                        <a:rPr lang="en-US" sz="1400" dirty="0">
+                          <a:solidFill>
+                            <a:srgbClr val="23272E"/>
+                          </a:solidFill>
+                          <a:latin typeface="Microsoft YaHei" pitchFamily="34" charset="0"/>
+                          <a:ea typeface="Microsoft YaHei" pitchFamily="34" charset="-122"/>
+                          <a:cs typeface="Microsoft YaHei" pitchFamily="34" charset="-120"/>
+                        </a:rPr>
+                        <a:t>提亮补水·走量爆款</a:t>
+                      </a:r>
+                      <a:endParaRPr lang="en-US" sz="1400" dirty="0">
+                        <a:latin typeface="Microsoft YaHei" charset="0"/>
+                        <a:ea typeface="Microsoft YaHei" charset="0"/>
+                        <a:cs typeface="Microsoft YaHei" charset="0"/>
+                      </a:endParaRPr>
+                    </a:p>
+                  </a:txBody>
+                  <a:tcPr marL="63500" marR="63500" marT="38100" marB="38100" anchor="ctr">
+                    <a:lnL w="9525" cap="flat" cmpd="sng" algn="ctr">
+                      <a:solidFill>
+                        <a:srgbClr val="E2E2E2"/>
+                      </a:solidFill>
+                      <a:prstDash val="solid"/>
+                      <a:round/>
+                      <a:headEnd type="none" w="med" len="med"/>
+                      <a:tailEnd type="none" w="med" len="med"/>
+                    </a:lnL>
+                    <a:lnR w="9525" cap="flat" cmpd="sng" algn="ctr">
+                      <a:solidFill>
+                        <a:srgbClr val="E2E2E2"/>
+                      </a:solidFill>
+                      <a:prstDash val="solid"/>
+                      <a:round/>
+                      <a:headEnd type="none" w="med" len="med"/>
+                      <a:tailEnd type="none" w="med" len="med"/>
+                    </a:lnR>
+                    <a:lnT w="9525" cap="flat" cmpd="sng" algn="ctr">
+                      <a:solidFill>
+                        <a:srgbClr val="E2E2E2"/>
+                      </a:solidFill>
+                      <a:prstDash val="solid"/>
+                      <a:round/>
+                      <a:headEnd type="none" w="med" len="med"/>
+                      <a:tailEnd type="none" w="med" len="med"/>
+                    </a:lnT>
+                    <a:lnB w="9525" cap="flat" cmpd="sng" algn="ctr">
+                      <a:solidFill>
+                        <a:srgbClr val="E2E2E2"/>
+                      </a:solidFill>
+                      <a:prstDash val="solid"/>
+                      <a:round/>
+                      <a:headEnd type="none" w="med" len="med"/>
+                      <a:tailEnd type="none" w="med" len="med"/>
+                    </a:lnB>
+                    <a:solidFill>
+                      <a:srgbClr val="FFFFFF"/>
+                    </a:solidFill>
+                  </a:tcPr>
+                </a:tc>
+              </a:tr>
+              <a:tr h="658368">
+                <a:tc>
+                  <a:txBody>
+                    <a:bodyPr/>
+                    <a:lstStyle/>
+                    <a:p>
+                      <a:pPr algn="ctr" indent="0" marL="0">
+                        <a:buNone/>
+                      </a:pPr>
+                      <a:r>
+                        <a:rPr lang="en-US" sz="1400" dirty="0">
+                          <a:solidFill>
+                            <a:srgbClr val="23272E"/>
+                          </a:solidFill>
+                          <a:latin typeface="Microsoft YaHei" pitchFamily="34" charset="0"/>
+                          <a:ea typeface="Microsoft YaHei" pitchFamily="34" charset="-122"/>
+                          <a:cs typeface="Microsoft YaHei" pitchFamily="34" charset="-120"/>
+                        </a:rPr>
+                        <a:t>黑钻·加强</a:t>
+                      </a:r>
+                      <a:endParaRPr lang="en-US" sz="1400" dirty="0">
+                        <a:latin typeface="Microsoft YaHei" charset="0"/>
+                        <a:ea typeface="Microsoft YaHei" charset="0"/>
+                        <a:cs typeface="Microsoft YaHei" charset="0"/>
+                      </a:endParaRPr>
+                    </a:p>
+                  </a:txBody>
+                  <a:tcPr marL="63500" marR="63500" marT="38100" marB="38100" anchor="ctr">
+                    <a:lnL w="9525" cap="flat" cmpd="sng" algn="ctr">
+                      <a:solidFill>
+                        <a:srgbClr val="E2E2E2"/>
+                      </a:solidFill>
+                      <a:prstDash val="solid"/>
+                      <a:round/>
+                      <a:headEnd type="none" w="med" len="med"/>
+                      <a:tailEnd type="none" w="med" len="med"/>
+                    </a:lnL>
+                    <a:lnR w="9525" cap="flat" cmpd="sng" algn="ctr">
+                      <a:solidFill>
+                        <a:srgbClr val="E2E2E2"/>
+                      </a:solidFill>
+                      <a:prstDash val="solid"/>
+                      <a:round/>
+                      <a:headEnd type="none" w="med" len="med"/>
+                      <a:tailEnd type="none" w="med" len="med"/>
+                    </a:lnR>
+                    <a:lnT w="9525" cap="flat" cmpd="sng" algn="ctr">
+                      <a:solidFill>
+                        <a:srgbClr val="E2E2E2"/>
+                      </a:solidFill>
+                      <a:prstDash val="solid"/>
+                      <a:round/>
+                      <a:headEnd type="none" w="med" len="med"/>
+                      <a:tailEnd type="none" w="med" len="med"/>
+                    </a:lnT>
+                    <a:lnB w="9525" cap="flat" cmpd="sng" algn="ctr">
+                      <a:solidFill>
+                        <a:srgbClr val="E2E2E2"/>
+                      </a:solidFill>
+                      <a:prstDash val="solid"/>
+                      <a:round/>
+                      <a:headEnd type="none" w="med" len="med"/>
+                      <a:tailEnd type="none" w="med" len="med"/>
+                    </a:lnB>
+                    <a:solidFill>
+                      <a:srgbClr val="F7F3F4"/>
+                    </a:solidFill>
+                  </a:tcPr>
+                </a:tc>
+                <a:tc>
+                  <a:txBody>
+                    <a:bodyPr/>
+                    <a:lstStyle/>
+                    <a:p>
+                      <a:pPr algn="l" indent="0" marL="0">
+                        <a:buNone/>
+                      </a:pPr>
+                      <a:r>
+                        <a:rPr lang="en-US" sz="1400" dirty="0">
+                          <a:solidFill>
+                            <a:srgbClr val="23272E"/>
+                          </a:solidFill>
+                          <a:latin typeface="Microsoft YaHei" pitchFamily="34" charset="0"/>
+                          <a:ea typeface="Microsoft YaHei" pitchFamily="34" charset="-122"/>
+                          <a:cs typeface="Microsoft YaHei" pitchFamily="34" charset="-120"/>
+                        </a:rPr>
+                        <a:t>黑钻VC100细毛孔面膜</a:t>
+                      </a:r>
+                      <a:endParaRPr lang="en-US" sz="1400" dirty="0">
+                        <a:latin typeface="Microsoft YaHei" charset="0"/>
+                        <a:ea typeface="Microsoft YaHei" charset="0"/>
+                        <a:cs typeface="Microsoft YaHei" charset="0"/>
+                      </a:endParaRPr>
+                    </a:p>
+                  </a:txBody>
+                  <a:tcPr marL="63500" marR="63500" marT="38100" marB="38100" anchor="ctr">
+                    <a:lnL w="9525" cap="flat" cmpd="sng" algn="ctr">
+                      <a:solidFill>
+                        <a:srgbClr val="E2E2E2"/>
+                      </a:solidFill>
+                      <a:prstDash val="solid"/>
+                      <a:round/>
+                      <a:headEnd type="none" w="med" len="med"/>
+                      <a:tailEnd type="none" w="med" len="med"/>
+                    </a:lnL>
+                    <a:lnR w="9525" cap="flat" cmpd="sng" algn="ctr">
+                      <a:solidFill>
+                        <a:srgbClr val="E2E2E2"/>
+                      </a:solidFill>
+                      <a:prstDash val="solid"/>
+                      <a:round/>
+                      <a:headEnd type="none" w="med" len="med"/>
+                      <a:tailEnd type="none" w="med" len="med"/>
+                    </a:lnR>
+                    <a:lnT w="9525" cap="flat" cmpd="sng" algn="ctr">
+                      <a:solidFill>
+                        <a:srgbClr val="E2E2E2"/>
+                      </a:solidFill>
+                      <a:prstDash val="solid"/>
+                      <a:round/>
+                      <a:headEnd type="none" w="med" len="med"/>
+                      <a:tailEnd type="none" w="med" len="med"/>
+                    </a:lnT>
+                    <a:lnB w="9525" cap="flat" cmpd="sng" algn="ctr">
+                      <a:solidFill>
+                        <a:srgbClr val="E2E2E2"/>
+                      </a:solidFill>
+                      <a:prstDash val="solid"/>
+                      <a:round/>
+                      <a:headEnd type="none" w="med" len="med"/>
+                      <a:tailEnd type="none" w="med" len="med"/>
+                    </a:lnB>
+                    <a:solidFill>
+                      <a:srgbClr val="F7F3F4"/>
+                    </a:solidFill>
+                  </a:tcPr>
+                </a:tc>
+                <a:tc>
+                  <a:txBody>
+                    <a:bodyPr/>
+                    <a:lstStyle/>
+                    <a:p>
+                      <a:pPr algn="l" indent="0" marL="0">
+                        <a:buNone/>
+                      </a:pPr>
+                      <a:r>
+                        <a:rPr lang="en-US" sz="1400" dirty="0">
+                          <a:solidFill>
+                            <a:srgbClr val="23272E"/>
+                          </a:solidFill>
+                          <a:latin typeface="Microsoft YaHei" pitchFamily="34" charset="0"/>
+                          <a:ea typeface="Microsoft YaHei" pitchFamily="34" charset="-122"/>
+                          <a:cs typeface="Microsoft YaHei" pitchFamily="34" charset="-120"/>
+                        </a:rPr>
+                        <a:t>89</a:t>
+                      </a:r>
+                      <a:endParaRPr lang="en-US" sz="1400" dirty="0">
+                        <a:latin typeface="Microsoft YaHei" charset="0"/>
+                        <a:ea typeface="Microsoft YaHei" charset="0"/>
+                        <a:cs typeface="Microsoft YaHei" charset="0"/>
+                      </a:endParaRPr>
+                    </a:p>
+                  </a:txBody>
+                  <a:tcPr marL="63500" marR="63500" marT="38100" marB="38100" anchor="ctr">
+                    <a:lnL w="9525" cap="flat" cmpd="sng" algn="ctr">
+                      <a:solidFill>
+                        <a:srgbClr val="E2E2E2"/>
+                      </a:solidFill>
+                      <a:prstDash val="solid"/>
+                      <a:round/>
+                      <a:headEnd type="none" w="med" len="med"/>
+                      <a:tailEnd type="none" w="med" len="med"/>
+                    </a:lnL>
+                    <a:lnR w="9525" cap="flat" cmpd="sng" algn="ctr">
+                      <a:solidFill>
+                        <a:srgbClr val="E2E2E2"/>
+                      </a:solidFill>
+                      <a:prstDash val="solid"/>
+                      <a:round/>
+                      <a:headEnd type="none" w="med" len="med"/>
+                      <a:tailEnd type="none" w="med" len="med"/>
+                    </a:lnR>
+                    <a:lnT w="9525" cap="flat" cmpd="sng" algn="ctr">
+                      <a:solidFill>
+                        <a:srgbClr val="E2E2E2"/>
+                      </a:solidFill>
+                      <a:prstDash val="solid"/>
+                      <a:round/>
+                      <a:headEnd type="none" w="med" len="med"/>
+                      <a:tailEnd type="none" w="med" len="med"/>
+                    </a:lnT>
+                    <a:lnB w="9525" cap="flat" cmpd="sng" algn="ctr">
+                      <a:solidFill>
+                        <a:srgbClr val="E2E2E2"/>
+                      </a:solidFill>
+                      <a:prstDash val="solid"/>
+                      <a:round/>
+                      <a:headEnd type="none" w="med" len="med"/>
+                      <a:tailEnd type="none" w="med" len="med"/>
+                    </a:lnB>
+                    <a:solidFill>
+                      <a:srgbClr val="F7F3F4"/>
+                    </a:solidFill>
+                  </a:tcPr>
+                </a:tc>
+                <a:tc>
+                  <a:txBody>
+                    <a:bodyPr/>
+                    <a:lstStyle/>
+                    <a:p>
+                      <a:pPr algn="l" indent="0" marL="0">
+                        <a:buNone/>
+                      </a:pPr>
+                      <a:r>
+                        <a:rPr lang="en-US" sz="1400" dirty="0">
+                          <a:solidFill>
+                            <a:srgbClr val="23272E"/>
+                          </a:solidFill>
+                          <a:latin typeface="Microsoft YaHei" pitchFamily="34" charset="0"/>
+                          <a:ea typeface="Microsoft YaHei" pitchFamily="34" charset="-122"/>
+                          <a:cs typeface="Microsoft YaHei" pitchFamily="34" charset="-120"/>
+                        </a:rPr>
+                        <a:t>60 / 55</a:t>
+                      </a:r>
+                      <a:endParaRPr lang="en-US" sz="1400" dirty="0">
+                        <a:latin typeface="Microsoft YaHei" charset="0"/>
+                        <a:ea typeface="Microsoft YaHei" charset="0"/>
+                        <a:cs typeface="Microsoft YaHei" charset="0"/>
+                      </a:endParaRPr>
+                    </a:p>
+                  </a:txBody>
+                  <a:tcPr marL="63500" marR="63500" marT="38100" marB="38100" anchor="ctr">
+                    <a:lnL w="9525" cap="flat" cmpd="sng" algn="ctr">
+                      <a:solidFill>
+                        <a:srgbClr val="E2E2E2"/>
+                      </a:solidFill>
+                      <a:prstDash val="solid"/>
+                      <a:round/>
+                      <a:headEnd type="none" w="med" len="med"/>
+                      <a:tailEnd type="none" w="med" len="med"/>
+                    </a:lnL>
+                    <a:lnR w="9525" cap="flat" cmpd="sng" algn="ctr">
+                      <a:solidFill>
+                        <a:srgbClr val="E2E2E2"/>
+                      </a:solidFill>
+                      <a:prstDash val="solid"/>
+                      <a:round/>
+                      <a:headEnd type="none" w="med" len="med"/>
+                      <a:tailEnd type="none" w="med" len="med"/>
+                    </a:lnR>
+                    <a:lnT w="9525" cap="flat" cmpd="sng" algn="ctr">
+                      <a:solidFill>
+                        <a:srgbClr val="E2E2E2"/>
+                      </a:solidFill>
+                      <a:prstDash val="solid"/>
+                      <a:round/>
+                      <a:headEnd type="none" w="med" len="med"/>
+                      <a:tailEnd type="none" w="med" len="med"/>
+                    </a:lnT>
+                    <a:lnB w="9525" cap="flat" cmpd="sng" algn="ctr">
+                      <a:solidFill>
+                        <a:srgbClr val="E2E2E2"/>
+                      </a:solidFill>
+                      <a:prstDash val="solid"/>
+                      <a:round/>
+                      <a:headEnd type="none" w="med" len="med"/>
+                      <a:tailEnd type="none" w="med" len="med"/>
+                    </a:lnB>
+                    <a:solidFill>
+                      <a:srgbClr val="F7F3F4"/>
+                    </a:solidFill>
+                  </a:tcPr>
+                </a:tc>
+                <a:tc>
+                  <a:txBody>
+                    <a:bodyPr/>
+                    <a:lstStyle/>
+                    <a:p>
+                      <a:pPr algn="l" indent="0" marL="0">
+                        <a:buNone/>
+                      </a:pPr>
+                      <a:r>
+                        <a:rPr lang="en-US" sz="1400" dirty="0">
+                          <a:solidFill>
+                            <a:srgbClr val="23272E"/>
+                          </a:solidFill>
+                          <a:latin typeface="Microsoft YaHei" pitchFamily="34" charset="0"/>
+                          <a:ea typeface="Microsoft YaHei" pitchFamily="34" charset="-122"/>
+                          <a:cs typeface="Microsoft YaHei" pitchFamily="34" charset="-120"/>
+                        </a:rPr>
+                        <a:t>100</a:t>
+                      </a:r>
+                      <a:endParaRPr lang="en-US" sz="1400" dirty="0">
+                        <a:latin typeface="Microsoft YaHei" charset="0"/>
+                        <a:ea typeface="Microsoft YaHei" charset="0"/>
+                        <a:cs typeface="Microsoft YaHei" charset="0"/>
+                      </a:endParaRPr>
+                    </a:p>
+                  </a:txBody>
+                  <a:tcPr marL="63500" marR="63500" marT="38100" marB="38100" anchor="ctr">
+                    <a:lnL w="9525" cap="flat" cmpd="sng" algn="ctr">
+                      <a:solidFill>
+                        <a:srgbClr val="E2E2E2"/>
+                      </a:solidFill>
+                      <a:prstDash val="solid"/>
+                      <a:round/>
+                      <a:headEnd type="none" w="med" len="med"/>
+                      <a:tailEnd type="none" w="med" len="med"/>
+                    </a:lnL>
+                    <a:lnR w="9525" cap="flat" cmpd="sng" algn="ctr">
+                      <a:solidFill>
+                        <a:srgbClr val="E2E2E2"/>
+                      </a:solidFill>
+                      <a:prstDash val="solid"/>
+                      <a:round/>
+                      <a:headEnd type="none" w="med" len="med"/>
+                      <a:tailEnd type="none" w="med" len="med"/>
+                    </a:lnR>
+                    <a:lnT w="9525" cap="flat" cmpd="sng" algn="ctr">
+                      <a:solidFill>
+                        <a:srgbClr val="E2E2E2"/>
+                      </a:solidFill>
+                      <a:prstDash val="solid"/>
+                      <a:round/>
+                      <a:headEnd type="none" w="med" len="med"/>
+                      <a:tailEnd type="none" w="med" len="med"/>
+                    </a:lnT>
+                    <a:lnB w="9525" cap="flat" cmpd="sng" algn="ctr">
+                      <a:solidFill>
+                        <a:srgbClr val="E2E2E2"/>
+                      </a:solidFill>
+                      <a:prstDash val="solid"/>
+                      <a:round/>
+                      <a:headEnd type="none" w="med" len="med"/>
+                      <a:tailEnd type="none" w="med" len="med"/>
+                    </a:lnB>
+                    <a:solidFill>
+                      <a:srgbClr val="F7F3F4"/>
+                    </a:solidFill>
+                  </a:tcPr>
+                </a:tc>
+                <a:tc>
+                  <a:txBody>
+                    <a:bodyPr/>
+                    <a:lstStyle/>
+                    <a:p>
+                      <a:pPr algn="l" indent="0" marL="0">
+                        <a:buNone/>
+                      </a:pPr>
+                      <a:r>
+                        <a:rPr lang="en-US" sz="1400" dirty="0">
+                          <a:solidFill>
+                            <a:srgbClr val="23272E"/>
+                          </a:solidFill>
+                          <a:latin typeface="Microsoft YaHei" pitchFamily="34" charset="0"/>
+                          <a:ea typeface="Microsoft YaHei" pitchFamily="34" charset="-122"/>
+                          <a:cs typeface="Microsoft YaHei" pitchFamily="34" charset="-120"/>
+                        </a:rPr>
+                        <a:t>黑头净孔·差异化旗舰</a:t>
+                      </a:r>
+                      <a:endParaRPr lang="en-US" sz="1400" dirty="0">
+                        <a:latin typeface="Microsoft YaHei" charset="0"/>
+                        <a:ea typeface="Microsoft YaHei" charset="0"/>
+                        <a:cs typeface="Microsoft YaHei" charset="0"/>
+                      </a:endParaRPr>
+                    </a:p>
+                  </a:txBody>
+                  <a:tcPr marL="63500" marR="63500" marT="38100" marB="38100" anchor="ctr">
+                    <a:lnL w="9525" cap="flat" cmpd="sng" algn="ctr">
+                      <a:solidFill>
+                        <a:srgbClr val="E2E2E2"/>
+                      </a:solidFill>
+                      <a:prstDash val="solid"/>
+                      <a:round/>
+                      <a:headEnd type="none" w="med" len="med"/>
+                      <a:tailEnd type="none" w="med" len="med"/>
+                    </a:lnL>
+                    <a:lnR w="9525" cap="flat" cmpd="sng" algn="ctr">
+                      <a:solidFill>
+                        <a:srgbClr val="E2E2E2"/>
+                      </a:solidFill>
+                      <a:prstDash val="solid"/>
+                      <a:round/>
+                      <a:headEnd type="none" w="med" len="med"/>
+                      <a:tailEnd type="none" w="med" len="med"/>
+                    </a:lnR>
+                    <a:lnT w="9525" cap="flat" cmpd="sng" algn="ctr">
+                      <a:solidFill>
+                        <a:srgbClr val="E2E2E2"/>
+                      </a:solidFill>
+                      <a:prstDash val="solid"/>
+                      <a:round/>
+                      <a:headEnd type="none" w="med" len="med"/>
+                      <a:tailEnd type="none" w="med" len="med"/>
+                    </a:lnT>
+                    <a:lnB w="9525" cap="flat" cmpd="sng" algn="ctr">
+                      <a:solidFill>
+                        <a:srgbClr val="E2E2E2"/>
+                      </a:solidFill>
+                      <a:prstDash val="solid"/>
+                      <a:round/>
+                      <a:headEnd type="none" w="med" len="med"/>
+                      <a:tailEnd type="none" w="med" len="med"/>
+                    </a:lnB>
+                    <a:solidFill>
+                      <a:srgbClr val="F7F3F4"/>
+                    </a:solidFill>
+                  </a:tcPr>
+                </a:tc>
+              </a:tr>
+              <a:tr h="658368">
+                <a:tc>
+                  <a:txBody>
+                    <a:bodyPr/>
+                    <a:lstStyle/>
+                    <a:p>
+                      <a:pPr algn="ctr" indent="0" marL="0">
+                        <a:buNone/>
+                      </a:pPr>
+                      <a:r>
+                        <a:rPr lang="en-US" sz="1400" dirty="0">
+                          <a:solidFill>
+                            <a:srgbClr val="23272E"/>
+                          </a:solidFill>
+                          <a:latin typeface="Microsoft YaHei" pitchFamily="34" charset="0"/>
+                          <a:ea typeface="Microsoft YaHei" pitchFamily="34" charset="-122"/>
+                          <a:cs typeface="Microsoft YaHei" pitchFamily="34" charset="-120"/>
+                        </a:rPr>
+                        <a:t>黑银·加强</a:t>
+                      </a:r>
+                      <a:endParaRPr lang="en-US" sz="1400" dirty="0">
+                        <a:latin typeface="Microsoft YaHei" charset="0"/>
+                        <a:ea typeface="Microsoft YaHei" charset="0"/>
+                        <a:cs typeface="Microsoft YaHei" charset="0"/>
+                      </a:endParaRPr>
+                    </a:p>
+                  </a:txBody>
+                  <a:tcPr marL="63500" marR="63500" marT="38100" marB="38100" anchor="ctr">
+                    <a:lnL w="9525" cap="flat" cmpd="sng" algn="ctr">
+                      <a:solidFill>
+                        <a:srgbClr val="E2E2E2"/>
+                      </a:solidFill>
+                      <a:prstDash val="solid"/>
+                      <a:round/>
+                      <a:headEnd type="none" w="med" len="med"/>
+                      <a:tailEnd type="none" w="med" len="med"/>
+                    </a:lnL>
+                    <a:lnR w="9525" cap="flat" cmpd="sng" algn="ctr">
+                      <a:solidFill>
+                        <a:srgbClr val="E2E2E2"/>
+                      </a:solidFill>
+                      <a:prstDash val="solid"/>
+                      <a:round/>
+                      <a:headEnd type="none" w="med" len="med"/>
+                      <a:tailEnd type="none" w="med" len="med"/>
+                    </a:lnR>
+                    <a:lnT w="9525" cap="flat" cmpd="sng" algn="ctr">
+                      <a:solidFill>
+                        <a:srgbClr val="E2E2E2"/>
+                      </a:solidFill>
+                      <a:prstDash val="solid"/>
+                      <a:round/>
+                      <a:headEnd type="none" w="med" len="med"/>
+                      <a:tailEnd type="none" w="med" len="med"/>
+                    </a:lnT>
+                    <a:lnB w="9525" cap="flat" cmpd="sng" algn="ctr">
+                      <a:solidFill>
+                        <a:srgbClr val="E2E2E2"/>
+                      </a:solidFill>
+                      <a:prstDash val="solid"/>
+                      <a:round/>
+                      <a:headEnd type="none" w="med" len="med"/>
+                      <a:tailEnd type="none" w="med" len="med"/>
+                    </a:lnB>
+                    <a:solidFill>
+                      <a:srgbClr val="FFFFFF"/>
+                    </a:solidFill>
+                  </a:tcPr>
+                </a:tc>
+                <a:tc>
+                  <a:txBody>
+                    <a:bodyPr/>
+                    <a:lstStyle/>
+                    <a:p>
+                      <a:pPr algn="l" indent="0" marL="0">
+                        <a:buNone/>
+                      </a:pPr>
+                      <a:r>
+                        <a:rPr lang="en-US" sz="1400" dirty="0">
+                          <a:solidFill>
+                            <a:srgbClr val="23272E"/>
+                          </a:solidFill>
+                          <a:latin typeface="Microsoft YaHei" pitchFamily="34" charset="0"/>
+                          <a:ea typeface="Microsoft YaHei" pitchFamily="34" charset="-122"/>
+                          <a:cs typeface="Microsoft YaHei" pitchFamily="34" charset="-120"/>
+                        </a:rPr>
+                        <a:t>淡纹收毛孔水光肌面膜</a:t>
+                      </a:r>
+                      <a:endParaRPr lang="en-US" sz="1400" dirty="0">
+                        <a:latin typeface="Microsoft YaHei" charset="0"/>
+                        <a:ea typeface="Microsoft YaHei" charset="0"/>
+                        <a:cs typeface="Microsoft YaHei" charset="0"/>
+                      </a:endParaRPr>
+                    </a:p>
+                  </a:txBody>
+                  <a:tcPr marL="63500" marR="63500" marT="38100" marB="38100" anchor="ctr">
+                    <a:lnL w="9525" cap="flat" cmpd="sng" algn="ctr">
+                      <a:solidFill>
+                        <a:srgbClr val="E2E2E2"/>
+                      </a:solidFill>
+                      <a:prstDash val="solid"/>
+                      <a:round/>
+                      <a:headEnd type="none" w="med" len="med"/>
+                      <a:tailEnd type="none" w="med" len="med"/>
+                    </a:lnL>
+                    <a:lnR w="9525" cap="flat" cmpd="sng" algn="ctr">
+                      <a:solidFill>
+                        <a:srgbClr val="E2E2E2"/>
+                      </a:solidFill>
+                      <a:prstDash val="solid"/>
+                      <a:round/>
+                      <a:headEnd type="none" w="med" len="med"/>
+                      <a:tailEnd type="none" w="med" len="med"/>
+                    </a:lnR>
+                    <a:lnT w="9525" cap="flat" cmpd="sng" algn="ctr">
+                      <a:solidFill>
+                        <a:srgbClr val="E2E2E2"/>
+                      </a:solidFill>
+                      <a:prstDash val="solid"/>
+                      <a:round/>
+                      <a:headEnd type="none" w="med" len="med"/>
+                      <a:tailEnd type="none" w="med" len="med"/>
+                    </a:lnT>
+                    <a:lnB w="9525" cap="flat" cmpd="sng" algn="ctr">
+                      <a:solidFill>
+                        <a:srgbClr val="E2E2E2"/>
+                      </a:solidFill>
+                      <a:prstDash val="solid"/>
+                      <a:round/>
+                      <a:headEnd type="none" w="med" len="med"/>
+                      <a:tailEnd type="none" w="med" len="med"/>
+                    </a:lnB>
+                    <a:solidFill>
+                      <a:srgbClr val="FFFFFF"/>
+                    </a:solidFill>
+                  </a:tcPr>
+                </a:tc>
+                <a:tc>
+                  <a:txBody>
+                    <a:bodyPr/>
+                    <a:lstStyle/>
+                    <a:p>
+                      <a:pPr algn="l" indent="0" marL="0">
+                        <a:buNone/>
+                      </a:pPr>
+                      <a:r>
+                        <a:rPr lang="en-US" sz="1400" dirty="0">
+                          <a:solidFill>
+                            <a:srgbClr val="23272E"/>
+                          </a:solidFill>
+                          <a:latin typeface="Microsoft YaHei" pitchFamily="34" charset="0"/>
+                          <a:ea typeface="Microsoft YaHei" pitchFamily="34" charset="-122"/>
+                          <a:cs typeface="Microsoft YaHei" pitchFamily="34" charset="-120"/>
+                        </a:rPr>
+                        <a:t>89</a:t>
+                      </a:r>
+                      <a:endParaRPr lang="en-US" sz="1400" dirty="0">
+                        <a:latin typeface="Microsoft YaHei" charset="0"/>
+                        <a:ea typeface="Microsoft YaHei" charset="0"/>
+                        <a:cs typeface="Microsoft YaHei" charset="0"/>
+                      </a:endParaRPr>
+                    </a:p>
+                  </a:txBody>
+                  <a:tcPr marL="63500" marR="63500" marT="38100" marB="38100" anchor="ctr">
+                    <a:lnL w="9525" cap="flat" cmpd="sng" algn="ctr">
+                      <a:solidFill>
+                        <a:srgbClr val="E2E2E2"/>
+                      </a:solidFill>
+                      <a:prstDash val="solid"/>
+                      <a:round/>
+                      <a:headEnd type="none" w="med" len="med"/>
+                      <a:tailEnd type="none" w="med" len="med"/>
+                    </a:lnL>
+                    <a:lnR w="9525" cap="flat" cmpd="sng" algn="ctr">
+                      <a:solidFill>
+                        <a:srgbClr val="E2E2E2"/>
+                      </a:solidFill>
+                      <a:prstDash val="solid"/>
+                      <a:round/>
+                      <a:headEnd type="none" w="med" len="med"/>
+                      <a:tailEnd type="none" w="med" len="med"/>
+                    </a:lnR>
+                    <a:lnT w="9525" cap="flat" cmpd="sng" algn="ctr">
+                      <a:solidFill>
+                        <a:srgbClr val="E2E2E2"/>
+                      </a:solidFill>
+                      <a:prstDash val="solid"/>
+                      <a:round/>
+                      <a:headEnd type="none" w="med" len="med"/>
+                      <a:tailEnd type="none" w="med" len="med"/>
+                    </a:lnT>
+                    <a:lnB w="9525" cap="flat" cmpd="sng" algn="ctr">
+                      <a:solidFill>
+                        <a:srgbClr val="E2E2E2"/>
+                      </a:solidFill>
+                      <a:prstDash val="solid"/>
+                      <a:round/>
+                      <a:headEnd type="none" w="med" len="med"/>
+                      <a:tailEnd type="none" w="med" len="med"/>
+                    </a:lnB>
+                    <a:solidFill>
+                      <a:srgbClr val="FFFFFF"/>
+                    </a:solidFill>
+                  </a:tcPr>
+                </a:tc>
+                <a:tc>
+                  <a:txBody>
+                    <a:bodyPr/>
+                    <a:lstStyle/>
+                    <a:p>
+                      <a:pPr algn="l" indent="0" marL="0">
+                        <a:buNone/>
+                      </a:pPr>
+                      <a:r>
+                        <a:rPr lang="en-US" sz="1400" dirty="0">
+                          <a:solidFill>
+                            <a:srgbClr val="23272E"/>
+                          </a:solidFill>
+                          <a:latin typeface="Microsoft YaHei" pitchFamily="34" charset="0"/>
+                          <a:ea typeface="Microsoft YaHei" pitchFamily="34" charset="-122"/>
+                          <a:cs typeface="Microsoft YaHei" pitchFamily="34" charset="-120"/>
+                        </a:rPr>
+                        <a:t>60 / 55</a:t>
+                      </a:r>
+                      <a:endParaRPr lang="en-US" sz="1400" dirty="0">
+                        <a:latin typeface="Microsoft YaHei" charset="0"/>
+                        <a:ea typeface="Microsoft YaHei" charset="0"/>
+                        <a:cs typeface="Microsoft YaHei" charset="0"/>
+                      </a:endParaRPr>
+                    </a:p>
+                  </a:txBody>
+                  <a:tcPr marL="63500" marR="63500" marT="38100" marB="38100" anchor="ctr">
+                    <a:lnL w="9525" cap="flat" cmpd="sng" algn="ctr">
+                      <a:solidFill>
+                        <a:srgbClr val="E2E2E2"/>
+                      </a:solidFill>
+                      <a:prstDash val="solid"/>
+                      <a:round/>
+                      <a:headEnd type="none" w="med" len="med"/>
+                      <a:tailEnd type="none" w="med" len="med"/>
+                    </a:lnL>
+                    <a:lnR w="9525" cap="flat" cmpd="sng" algn="ctr">
+                      <a:solidFill>
+                        <a:srgbClr val="E2E2E2"/>
+                      </a:solidFill>
+                      <a:prstDash val="solid"/>
+                      <a:round/>
+                      <a:headEnd type="none" w="med" len="med"/>
+                      <a:tailEnd type="none" w="med" len="med"/>
+                    </a:lnR>
+                    <a:lnT w="9525" cap="flat" cmpd="sng" algn="ctr">
+                      <a:solidFill>
+                        <a:srgbClr val="E2E2E2"/>
+                      </a:solidFill>
+                      <a:prstDash val="solid"/>
+                      <a:round/>
+                      <a:headEnd type="none" w="med" len="med"/>
+                      <a:tailEnd type="none" w="med" len="med"/>
+                    </a:lnT>
+                    <a:lnB w="9525" cap="flat" cmpd="sng" algn="ctr">
+                      <a:solidFill>
+                        <a:srgbClr val="E2E2E2"/>
+                      </a:solidFill>
+                      <a:prstDash val="solid"/>
+                      <a:round/>
+                      <a:headEnd type="none" w="med" len="med"/>
+                      <a:tailEnd type="none" w="med" len="med"/>
+                    </a:lnB>
+                    <a:solidFill>
+                      <a:srgbClr val="FFFFFF"/>
+                    </a:solidFill>
+                  </a:tcPr>
+                </a:tc>
+                <a:tc>
+                  <a:txBody>
+                    <a:bodyPr/>
+                    <a:lstStyle/>
+                    <a:p>
+                      <a:pPr algn="l" indent="0" marL="0">
+                        <a:buNone/>
+                      </a:pPr>
+                      <a:r>
+                        <a:rPr lang="en-US" sz="1400" dirty="0">
+                          <a:solidFill>
+                            <a:srgbClr val="23272E"/>
+                          </a:solidFill>
+                          <a:latin typeface="Microsoft YaHei" pitchFamily="34" charset="0"/>
+                          <a:ea typeface="Microsoft YaHei" pitchFamily="34" charset="-122"/>
+                          <a:cs typeface="Microsoft YaHei" pitchFamily="34" charset="-120"/>
+                        </a:rPr>
+                        <a:t>200</a:t>
+                      </a:r>
+                      <a:endParaRPr lang="en-US" sz="1400" dirty="0">
+                        <a:latin typeface="Microsoft YaHei" charset="0"/>
+                        <a:ea typeface="Microsoft YaHei" charset="0"/>
+                        <a:cs typeface="Microsoft YaHei" charset="0"/>
+                      </a:endParaRPr>
+                    </a:p>
+                  </a:txBody>
+                  <a:tcPr marL="63500" marR="63500" marT="38100" marB="38100" anchor="ctr">
+                    <a:lnL w="9525" cap="flat" cmpd="sng" algn="ctr">
+                      <a:solidFill>
+                        <a:srgbClr val="E2E2E2"/>
+                      </a:solidFill>
+                      <a:prstDash val="solid"/>
+                      <a:round/>
+                      <a:headEnd type="none" w="med" len="med"/>
+                      <a:tailEnd type="none" w="med" len="med"/>
+                    </a:lnL>
+                    <a:lnR w="9525" cap="flat" cmpd="sng" algn="ctr">
+                      <a:solidFill>
+                        <a:srgbClr val="E2E2E2"/>
+                      </a:solidFill>
+                      <a:prstDash val="solid"/>
+                      <a:round/>
+                      <a:headEnd type="none" w="med" len="med"/>
+                      <a:tailEnd type="none" w="med" len="med"/>
+                    </a:lnR>
+                    <a:lnT w="9525" cap="flat" cmpd="sng" algn="ctr">
+                      <a:solidFill>
+                        <a:srgbClr val="E2E2E2"/>
+                      </a:solidFill>
+                      <a:prstDash val="solid"/>
+                      <a:round/>
+                      <a:headEnd type="none" w="med" len="med"/>
+                      <a:tailEnd type="none" w="med" len="med"/>
+                    </a:lnT>
+                    <a:lnB w="9525" cap="flat" cmpd="sng" algn="ctr">
+                      <a:solidFill>
+                        <a:srgbClr val="E2E2E2"/>
+                      </a:solidFill>
+                      <a:prstDash val="solid"/>
+                      <a:round/>
+                      <a:headEnd type="none" w="med" len="med"/>
+                      <a:tailEnd type="none" w="med" len="med"/>
+                    </a:lnB>
+                    <a:solidFill>
+                      <a:srgbClr val="FFFFFF"/>
+                    </a:solidFill>
+                  </a:tcPr>
+                </a:tc>
+                <a:tc>
+                  <a:txBody>
+                    <a:bodyPr/>
+                    <a:lstStyle/>
+                    <a:p>
+                      <a:pPr algn="l" indent="0" marL="0">
+                        <a:buNone/>
+                      </a:pPr>
+                      <a:r>
+                        <a:rPr lang="en-US" sz="1400" dirty="0">
+                          <a:solidFill>
+                            <a:srgbClr val="23272E"/>
+                          </a:solidFill>
+                          <a:latin typeface="Microsoft YaHei" pitchFamily="34" charset="0"/>
+                          <a:ea typeface="Microsoft YaHei" pitchFamily="34" charset="-122"/>
+                          <a:cs typeface="Microsoft YaHei" pitchFamily="34" charset="-120"/>
+                        </a:rPr>
+                        <a:t>水光·细毛孔</a:t>
+                      </a:r>
+                      <a:endParaRPr lang="en-US" sz="1400" dirty="0">
+                        <a:latin typeface="Microsoft YaHei" charset="0"/>
+                        <a:ea typeface="Microsoft YaHei" charset="0"/>
+                        <a:cs typeface="Microsoft YaHei" charset="0"/>
+                      </a:endParaRPr>
+                    </a:p>
+                  </a:txBody>
+                  <a:tcPr marL="63500" marR="63500" marT="38100" marB="38100" anchor="ctr">
+                    <a:lnL w="9525" cap="flat" cmpd="sng" algn="ctr">
+                      <a:solidFill>
+                        <a:srgbClr val="E2E2E2"/>
+                      </a:solidFill>
+                      <a:prstDash val="solid"/>
+                      <a:round/>
+                      <a:headEnd type="none" w="med" len="med"/>
+                      <a:tailEnd type="none" w="med" len="med"/>
+                    </a:lnL>
+                    <a:lnR w="9525" cap="flat" cmpd="sng" algn="ctr">
+                      <a:solidFill>
+                        <a:srgbClr val="E2E2E2"/>
+                      </a:solidFill>
+                      <a:prstDash val="solid"/>
+                      <a:round/>
+                      <a:headEnd type="none" w="med" len="med"/>
+                      <a:tailEnd type="none" w="med" len="med"/>
+                    </a:lnR>
+                    <a:lnT w="9525" cap="flat" cmpd="sng" algn="ctr">
+                      <a:solidFill>
+                        <a:srgbClr val="E2E2E2"/>
+                      </a:solidFill>
+                      <a:prstDash val="solid"/>
+                      <a:round/>
+                      <a:headEnd type="none" w="med" len="med"/>
+                      <a:tailEnd type="none" w="med" len="med"/>
+                    </a:lnT>
+                    <a:lnB w="9525" cap="flat" cmpd="sng" algn="ctr">
+                      <a:solidFill>
+                        <a:srgbClr val="E2E2E2"/>
+                      </a:solidFill>
+                      <a:prstDash val="solid"/>
+                      <a:round/>
+                      <a:headEnd type="none" w="med" len="med"/>
+                      <a:tailEnd type="none" w="med" len="med"/>
+                    </a:lnB>
+                    <a:solidFill>
+                      <a:srgbClr val="FFFFFF"/>
+                    </a:solidFill>
+                  </a:tcPr>
+                </a:tc>
+              </a:tr>
+              <a:tr h="658368">
+                <a:tc>
+                  <a:txBody>
+                    <a:bodyPr/>
+                    <a:lstStyle/>
+                    <a:p>
+                      <a:pPr algn="ctr" indent="0" marL="0">
+                        <a:buNone/>
+                      </a:pPr>
+                      <a:r>
+                        <a:rPr lang="en-US" sz="1400" dirty="0">
+                          <a:solidFill>
+                            <a:srgbClr val="23272E"/>
+                          </a:solidFill>
+                          <a:latin typeface="Microsoft YaHei" pitchFamily="34" charset="0"/>
+                          <a:ea typeface="Microsoft YaHei" pitchFamily="34" charset="-122"/>
+                          <a:cs typeface="Microsoft YaHei" pitchFamily="34" charset="-120"/>
+                        </a:rPr>
+                        <a:t>深蓝·标准</a:t>
+                      </a:r>
+                      <a:endParaRPr lang="en-US" sz="1400" dirty="0">
+                        <a:latin typeface="Microsoft YaHei" charset="0"/>
+                        <a:ea typeface="Microsoft YaHei" charset="0"/>
+                        <a:cs typeface="Microsoft YaHei" charset="0"/>
+                      </a:endParaRPr>
+                    </a:p>
+                  </a:txBody>
+                  <a:tcPr marL="63500" marR="63500" marT="38100" marB="38100" anchor="ctr">
+                    <a:lnL w="9525" cap="flat" cmpd="sng" algn="ctr">
+                      <a:solidFill>
+                        <a:srgbClr val="E2E2E2"/>
+                      </a:solidFill>
+                      <a:prstDash val="solid"/>
+                      <a:round/>
+                      <a:headEnd type="none" w="med" len="med"/>
+                      <a:tailEnd type="none" w="med" len="med"/>
+                    </a:lnL>
+                    <a:lnR w="9525" cap="flat" cmpd="sng" algn="ctr">
+                      <a:solidFill>
+                        <a:srgbClr val="E2E2E2"/>
+                      </a:solidFill>
+                      <a:prstDash val="solid"/>
+                      <a:round/>
+                      <a:headEnd type="none" w="med" len="med"/>
+                      <a:tailEnd type="none" w="med" len="med"/>
+                    </a:lnR>
+                    <a:lnT w="9525" cap="flat" cmpd="sng" algn="ctr">
+                      <a:solidFill>
+                        <a:srgbClr val="E2E2E2"/>
+                      </a:solidFill>
+                      <a:prstDash val="solid"/>
+                      <a:round/>
+                      <a:headEnd type="none" w="med" len="med"/>
+                      <a:tailEnd type="none" w="med" len="med"/>
+                    </a:lnT>
+                    <a:lnB w="9525" cap="flat" cmpd="sng" algn="ctr">
+                      <a:solidFill>
+                        <a:srgbClr val="E2E2E2"/>
+                      </a:solidFill>
+                      <a:prstDash val="solid"/>
+                      <a:round/>
+                      <a:headEnd type="none" w="med" len="med"/>
+                      <a:tailEnd type="none" w="med" len="med"/>
+                    </a:lnB>
+                    <a:solidFill>
+                      <a:srgbClr val="F7F3F4"/>
+                    </a:solidFill>
+                  </a:tcPr>
+                </a:tc>
+                <a:tc>
+                  <a:txBody>
+                    <a:bodyPr/>
+                    <a:lstStyle/>
+                    <a:p>
+                      <a:pPr algn="l" indent="0" marL="0">
+                        <a:buNone/>
+                      </a:pPr>
+                      <a:r>
+                        <a:rPr lang="en-US" sz="1400" dirty="0">
+                          <a:solidFill>
+                            <a:srgbClr val="23272E"/>
+                          </a:solidFill>
+                          <a:latin typeface="Microsoft YaHei" pitchFamily="34" charset="0"/>
+                          <a:ea typeface="Microsoft YaHei" pitchFamily="34" charset="-122"/>
+                          <a:cs typeface="Microsoft YaHei" pitchFamily="34" charset="-120"/>
+                        </a:rPr>
+                        <a:t>神经酰胺修护保湿面膜</a:t>
+                      </a:r>
+                      <a:endParaRPr lang="en-US" sz="1400" dirty="0">
+                        <a:latin typeface="Microsoft YaHei" charset="0"/>
+                        <a:ea typeface="Microsoft YaHei" charset="0"/>
+                        <a:cs typeface="Microsoft YaHei" charset="0"/>
+                      </a:endParaRPr>
+                    </a:p>
+                  </a:txBody>
+                  <a:tcPr marL="63500" marR="63500" marT="38100" marB="38100" anchor="ctr">
+                    <a:lnL w="9525" cap="flat" cmpd="sng" algn="ctr">
+                      <a:solidFill>
+                        <a:srgbClr val="E2E2E2"/>
+                      </a:solidFill>
+                      <a:prstDash val="solid"/>
+                      <a:round/>
+                      <a:headEnd type="none" w="med" len="med"/>
+                      <a:tailEnd type="none" w="med" len="med"/>
+                    </a:lnL>
+                    <a:lnR w="9525" cap="flat" cmpd="sng" algn="ctr">
+                      <a:solidFill>
+                        <a:srgbClr val="E2E2E2"/>
+                      </a:solidFill>
+                      <a:prstDash val="solid"/>
+                      <a:round/>
+                      <a:headEnd type="none" w="med" len="med"/>
+                      <a:tailEnd type="none" w="med" len="med"/>
+                    </a:lnR>
+                    <a:lnT w="9525" cap="flat" cmpd="sng" algn="ctr">
+                      <a:solidFill>
+                        <a:srgbClr val="E2E2E2"/>
+                      </a:solidFill>
+                      <a:prstDash val="solid"/>
+                      <a:round/>
+                      <a:headEnd type="none" w="med" len="med"/>
+                      <a:tailEnd type="none" w="med" len="med"/>
+                    </a:lnT>
+                    <a:lnB w="9525" cap="flat" cmpd="sng" algn="ctr">
+                      <a:solidFill>
+                        <a:srgbClr val="E2E2E2"/>
+                      </a:solidFill>
+                      <a:prstDash val="solid"/>
+                      <a:round/>
+                      <a:headEnd type="none" w="med" len="med"/>
+                      <a:tailEnd type="none" w="med" len="med"/>
+                    </a:lnB>
+                    <a:solidFill>
+                      <a:srgbClr val="F7F3F4"/>
+                    </a:solidFill>
+                  </a:tcPr>
+                </a:tc>
+                <a:tc>
+                  <a:txBody>
+                    <a:bodyPr/>
+                    <a:lstStyle/>
+                    <a:p>
+                      <a:pPr algn="l" indent="0" marL="0">
+                        <a:buNone/>
+                      </a:pPr>
+                      <a:r>
+                        <a:rPr lang="en-US" sz="1400" dirty="0">
+                          <a:solidFill>
+                            <a:srgbClr val="23272E"/>
+                          </a:solidFill>
+                          <a:latin typeface="Microsoft YaHei" pitchFamily="34" charset="0"/>
+                          <a:ea typeface="Microsoft YaHei" pitchFamily="34" charset="-122"/>
+                          <a:cs typeface="Microsoft YaHei" pitchFamily="34" charset="-120"/>
+                        </a:rPr>
+                        <a:t>69</a:t>
+                      </a:r>
+                      <a:endParaRPr lang="en-US" sz="1400" dirty="0">
+                        <a:latin typeface="Microsoft YaHei" charset="0"/>
+                        <a:ea typeface="Microsoft YaHei" charset="0"/>
+                        <a:cs typeface="Microsoft YaHei" charset="0"/>
+                      </a:endParaRPr>
+                    </a:p>
+                  </a:txBody>
+                  <a:tcPr marL="63500" marR="63500" marT="38100" marB="38100" anchor="ctr">
+                    <a:lnL w="9525" cap="flat" cmpd="sng" algn="ctr">
+                      <a:solidFill>
+                        <a:srgbClr val="E2E2E2"/>
+                      </a:solidFill>
+                      <a:prstDash val="solid"/>
+                      <a:round/>
+                      <a:headEnd type="none" w="med" len="med"/>
+                      <a:tailEnd type="none" w="med" len="med"/>
+                    </a:lnL>
+                    <a:lnR w="9525" cap="flat" cmpd="sng" algn="ctr">
+                      <a:solidFill>
+                        <a:srgbClr val="E2E2E2"/>
+                      </a:solidFill>
+                      <a:prstDash val="solid"/>
+                      <a:round/>
+                      <a:headEnd type="none" w="med" len="med"/>
+                      <a:tailEnd type="none" w="med" len="med"/>
+                    </a:lnR>
+                    <a:lnT w="9525" cap="flat" cmpd="sng" algn="ctr">
+                      <a:solidFill>
+                        <a:srgbClr val="E2E2E2"/>
+                      </a:solidFill>
+                      <a:prstDash val="solid"/>
+                      <a:round/>
+                      <a:headEnd type="none" w="med" len="med"/>
+                      <a:tailEnd type="none" w="med" len="med"/>
+                    </a:lnT>
+                    <a:lnB w="9525" cap="flat" cmpd="sng" algn="ctr">
+                      <a:solidFill>
+                        <a:srgbClr val="E2E2E2"/>
+                      </a:solidFill>
+                      <a:prstDash val="solid"/>
+                      <a:round/>
+                      <a:headEnd type="none" w="med" len="med"/>
+                      <a:tailEnd type="none" w="med" len="med"/>
+                    </a:lnB>
+                    <a:solidFill>
+                      <a:srgbClr val="F7F3F4"/>
+                    </a:solidFill>
+                  </a:tcPr>
+                </a:tc>
+                <a:tc>
+                  <a:txBody>
+                    <a:bodyPr/>
+                    <a:lstStyle/>
+                    <a:p>
+                      <a:pPr algn="l" indent="0" marL="0">
+                        <a:buNone/>
+                      </a:pPr>
+                      <a:r>
+                        <a:rPr lang="en-US" sz="1400" dirty="0">
+                          <a:solidFill>
+                            <a:srgbClr val="23272E"/>
+                          </a:solidFill>
+                          <a:latin typeface="Microsoft YaHei" pitchFamily="34" charset="0"/>
+                          <a:ea typeface="Microsoft YaHei" pitchFamily="34" charset="-122"/>
+                          <a:cs typeface="Microsoft YaHei" pitchFamily="34" charset="-120"/>
+                        </a:rPr>
+                        <a:t>45 / 40</a:t>
+                      </a:r>
+                      <a:endParaRPr lang="en-US" sz="1400" dirty="0">
+                        <a:latin typeface="Microsoft YaHei" charset="0"/>
+                        <a:ea typeface="Microsoft YaHei" charset="0"/>
+                        <a:cs typeface="Microsoft YaHei" charset="0"/>
+                      </a:endParaRPr>
+                    </a:p>
+                  </a:txBody>
+                  <a:tcPr marL="63500" marR="63500" marT="38100" marB="38100" anchor="ctr">
+                    <a:lnL w="9525" cap="flat" cmpd="sng" algn="ctr">
+                      <a:solidFill>
+                        <a:srgbClr val="E2E2E2"/>
+                      </a:solidFill>
+                      <a:prstDash val="solid"/>
+                      <a:round/>
+                      <a:headEnd type="none" w="med" len="med"/>
+                      <a:tailEnd type="none" w="med" len="med"/>
+                    </a:lnL>
+                    <a:lnR w="9525" cap="flat" cmpd="sng" algn="ctr">
+                      <a:solidFill>
+                        <a:srgbClr val="E2E2E2"/>
+                      </a:solidFill>
+                      <a:prstDash val="solid"/>
+                      <a:round/>
+                      <a:headEnd type="none" w="med" len="med"/>
+                      <a:tailEnd type="none" w="med" len="med"/>
+                    </a:lnR>
+                    <a:lnT w="9525" cap="flat" cmpd="sng" algn="ctr">
+                      <a:solidFill>
+                        <a:srgbClr val="E2E2E2"/>
+                      </a:solidFill>
+                      <a:prstDash val="solid"/>
+                      <a:round/>
+                      <a:headEnd type="none" w="med" len="med"/>
+                      <a:tailEnd type="none" w="med" len="med"/>
+                    </a:lnT>
+                    <a:lnB w="9525" cap="flat" cmpd="sng" algn="ctr">
+                      <a:solidFill>
+                        <a:srgbClr val="E2E2E2"/>
+                      </a:solidFill>
+                      <a:prstDash val="solid"/>
+                      <a:round/>
+                      <a:headEnd type="none" w="med" len="med"/>
+                      <a:tailEnd type="none" w="med" len="med"/>
+                    </a:lnB>
+                    <a:solidFill>
+                      <a:srgbClr val="F7F3F4"/>
+                    </a:solidFill>
+                  </a:tcPr>
+                </a:tc>
+                <a:tc>
+                  <a:txBody>
+                    <a:bodyPr/>
+                    <a:lstStyle/>
+                    <a:p>
+                      <a:pPr algn="l" indent="0" marL="0">
+                        <a:buNone/>
+                      </a:pPr>
+                      <a:r>
+                        <a:rPr lang="en-US" sz="1400" dirty="0">
+                          <a:solidFill>
+                            <a:srgbClr val="23272E"/>
+                          </a:solidFill>
+                          <a:latin typeface="Microsoft YaHei" pitchFamily="34" charset="0"/>
+                          <a:ea typeface="Microsoft YaHei" pitchFamily="34" charset="-122"/>
+                          <a:cs typeface="Microsoft YaHei" pitchFamily="34" charset="-120"/>
+                        </a:rPr>
+                        <a:t>50*</a:t>
+                      </a:r>
+                      <a:endParaRPr lang="en-US" sz="1400" dirty="0">
+                        <a:latin typeface="Microsoft YaHei" charset="0"/>
+                        <a:ea typeface="Microsoft YaHei" charset="0"/>
+                        <a:cs typeface="Microsoft YaHei" charset="0"/>
+                      </a:endParaRPr>
+                    </a:p>
+                  </a:txBody>
+                  <a:tcPr marL="63500" marR="63500" marT="38100" marB="38100" anchor="ctr">
+                    <a:lnL w="9525" cap="flat" cmpd="sng" algn="ctr">
+                      <a:solidFill>
+                        <a:srgbClr val="E2E2E2"/>
+                      </a:solidFill>
+                      <a:prstDash val="solid"/>
+                      <a:round/>
+                      <a:headEnd type="none" w="med" len="med"/>
+                      <a:tailEnd type="none" w="med" len="med"/>
+                    </a:lnL>
+                    <a:lnR w="9525" cap="flat" cmpd="sng" algn="ctr">
+                      <a:solidFill>
+                        <a:srgbClr val="E2E2E2"/>
+                      </a:solidFill>
+                      <a:prstDash val="solid"/>
+                      <a:round/>
+                      <a:headEnd type="none" w="med" len="med"/>
+                      <a:tailEnd type="none" w="med" len="med"/>
+                    </a:lnR>
+                    <a:lnT w="9525" cap="flat" cmpd="sng" algn="ctr">
+                      <a:solidFill>
+                        <a:srgbClr val="E2E2E2"/>
+                      </a:solidFill>
+                      <a:prstDash val="solid"/>
+                      <a:round/>
+                      <a:headEnd type="none" w="med" len="med"/>
+                      <a:tailEnd type="none" w="med" len="med"/>
+                    </a:lnT>
+                    <a:lnB w="9525" cap="flat" cmpd="sng" algn="ctr">
+                      <a:solidFill>
+                        <a:srgbClr val="E2E2E2"/>
+                      </a:solidFill>
+                      <a:prstDash val="solid"/>
+                      <a:round/>
+                      <a:headEnd type="none" w="med" len="med"/>
+                      <a:tailEnd type="none" w="med" len="med"/>
+                    </a:lnB>
+                    <a:solidFill>
+                      <a:srgbClr val="F7F3F4"/>
+                    </a:solidFill>
+                  </a:tcPr>
+                </a:tc>
+                <a:tc>
+                  <a:txBody>
+                    <a:bodyPr/>
+                    <a:lstStyle/>
+                    <a:p>
+                      <a:pPr algn="l" indent="0" marL="0">
+                        <a:buNone/>
+                      </a:pPr>
+                      <a:r>
+                        <a:rPr lang="en-US" sz="1400" dirty="0">
+                          <a:solidFill>
+                            <a:srgbClr val="23272E"/>
+                          </a:solidFill>
+                          <a:latin typeface="Microsoft YaHei" pitchFamily="34" charset="0"/>
+                          <a:ea typeface="Microsoft YaHei" pitchFamily="34" charset="-122"/>
+                          <a:cs typeface="Microsoft YaHei" pitchFamily="34" charset="-120"/>
+                        </a:rPr>
+                        <a:t>维稳补水·换季</a:t>
+                      </a:r>
+                      <a:endParaRPr lang="en-US" sz="1400" dirty="0">
+                        <a:latin typeface="Microsoft YaHei" charset="0"/>
+                        <a:ea typeface="Microsoft YaHei" charset="0"/>
+                        <a:cs typeface="Microsoft YaHei" charset="0"/>
+                      </a:endParaRPr>
+                    </a:p>
+                  </a:txBody>
+                  <a:tcPr marL="63500" marR="63500" marT="38100" marB="38100" anchor="ctr">
+                    <a:lnL w="9525" cap="flat" cmpd="sng" algn="ctr">
+                      <a:solidFill>
+                        <a:srgbClr val="E2E2E2"/>
+                      </a:solidFill>
+                      <a:prstDash val="solid"/>
+                      <a:round/>
+                      <a:headEnd type="none" w="med" len="med"/>
+                      <a:tailEnd type="none" w="med" len="med"/>
+                    </a:lnL>
+                    <a:lnR w="9525" cap="flat" cmpd="sng" algn="ctr">
+                      <a:solidFill>
+                        <a:srgbClr val="E2E2E2"/>
+                      </a:solidFill>
+                      <a:prstDash val="solid"/>
+                      <a:round/>
+                      <a:headEnd type="none" w="med" len="med"/>
+                      <a:tailEnd type="none" w="med" len="med"/>
+                    </a:lnR>
+                    <a:lnT w="9525" cap="flat" cmpd="sng" algn="ctr">
+                      <a:solidFill>
+                        <a:srgbClr val="E2E2E2"/>
+                      </a:solidFill>
+                      <a:prstDash val="solid"/>
+                      <a:round/>
+                      <a:headEnd type="none" w="med" len="med"/>
+                      <a:tailEnd type="none" w="med" len="med"/>
+                    </a:lnT>
+                    <a:lnB w="9525" cap="flat" cmpd="sng" algn="ctr">
+                      <a:solidFill>
+                        <a:srgbClr val="E2E2E2"/>
+                      </a:solidFill>
+                      <a:prstDash val="solid"/>
+                      <a:round/>
+                      <a:headEnd type="none" w="med" len="med"/>
+                      <a:tailEnd type="none" w="med" len="med"/>
+                    </a:lnB>
+                    <a:solidFill>
+                      <a:srgbClr val="F7F3F4"/>
+                    </a:solidFill>
+                  </a:tcPr>
+                </a:tc>
+              </a:tr>
+              <a:tr h="658368">
+                <a:tc>
+                  <a:txBody>
+                    <a:bodyPr/>
+                    <a:lstStyle/>
+                    <a:p>
+                      <a:pPr algn="ctr" indent="0" marL="0">
+                        <a:buNone/>
+                      </a:pPr>
+                      <a:r>
+                        <a:rPr lang="en-US" sz="1400" dirty="0">
+                          <a:solidFill>
+                            <a:srgbClr val="23272E"/>
+                          </a:solidFill>
+                          <a:latin typeface="Microsoft YaHei" pitchFamily="34" charset="0"/>
+                          <a:ea typeface="Microsoft YaHei" pitchFamily="34" charset="-122"/>
+                          <a:cs typeface="Microsoft YaHei" pitchFamily="34" charset="-120"/>
+                        </a:rPr>
+                        <a:t>银色·标准</a:t>
+                      </a:r>
+                      <a:endParaRPr lang="en-US" sz="1400" dirty="0">
+                        <a:latin typeface="Microsoft YaHei" charset="0"/>
+                        <a:ea typeface="Microsoft YaHei" charset="0"/>
+                        <a:cs typeface="Microsoft YaHei" charset="0"/>
+                      </a:endParaRPr>
+                    </a:p>
+                  </a:txBody>
+                  <a:tcPr marL="63500" marR="63500" marT="38100" marB="38100" anchor="ctr">
+                    <a:lnL w="9525" cap="flat" cmpd="sng" algn="ctr">
+                      <a:solidFill>
+                        <a:srgbClr val="E2E2E2"/>
+                      </a:solidFill>
+                      <a:prstDash val="solid"/>
+                      <a:round/>
+                      <a:headEnd type="none" w="med" len="med"/>
+                      <a:tailEnd type="none" w="med" len="med"/>
+                    </a:lnL>
+                    <a:lnR w="9525" cap="flat" cmpd="sng" algn="ctr">
+                      <a:solidFill>
+                        <a:srgbClr val="E2E2E2"/>
+                      </a:solidFill>
+                      <a:prstDash val="solid"/>
+                      <a:round/>
+                      <a:headEnd type="none" w="med" len="med"/>
+                      <a:tailEnd type="none" w="med" len="med"/>
+                    </a:lnR>
+                    <a:lnT w="9525" cap="flat" cmpd="sng" algn="ctr">
+                      <a:solidFill>
+                        <a:srgbClr val="E2E2E2"/>
+                      </a:solidFill>
+                      <a:prstDash val="solid"/>
+                      <a:round/>
+                      <a:headEnd type="none" w="med" len="med"/>
+                      <a:tailEnd type="none" w="med" len="med"/>
+                    </a:lnT>
+                    <a:lnB w="9525" cap="flat" cmpd="sng" algn="ctr">
+                      <a:solidFill>
+                        <a:srgbClr val="E2E2E2"/>
+                      </a:solidFill>
+                      <a:prstDash val="solid"/>
+                      <a:round/>
+                      <a:headEnd type="none" w="med" len="med"/>
+                      <a:tailEnd type="none" w="med" len="med"/>
+                    </a:lnB>
+                    <a:solidFill>
+                      <a:srgbClr val="FFFFFF"/>
+                    </a:solidFill>
+                  </a:tcPr>
+                </a:tc>
+                <a:tc>
+                  <a:txBody>
+                    <a:bodyPr/>
+                    <a:lstStyle/>
+                    <a:p>
+                      <a:pPr algn="l" indent="0" marL="0">
+                        <a:buNone/>
+                      </a:pPr>
+                      <a:r>
+                        <a:rPr lang="en-US" sz="1400" dirty="0">
+                          <a:solidFill>
+                            <a:srgbClr val="23272E"/>
+                          </a:solidFill>
+                          <a:latin typeface="Microsoft YaHei" pitchFamily="34" charset="0"/>
+                          <a:ea typeface="Microsoft YaHei" pitchFamily="34" charset="-122"/>
+                          <a:cs typeface="Microsoft YaHei" pitchFamily="34" charset="-120"/>
+                        </a:rPr>
+                        <a:t>高浓度VC速效面膜</a:t>
+                      </a:r>
+                      <a:endParaRPr lang="en-US" sz="1400" dirty="0">
+                        <a:latin typeface="Microsoft YaHei" charset="0"/>
+                        <a:ea typeface="Microsoft YaHei" charset="0"/>
+                        <a:cs typeface="Microsoft YaHei" charset="0"/>
+                      </a:endParaRPr>
+                    </a:p>
+                  </a:txBody>
+                  <a:tcPr marL="63500" marR="63500" marT="38100" marB="38100" anchor="ctr">
+                    <a:lnL w="9525" cap="flat" cmpd="sng" algn="ctr">
+                      <a:solidFill>
+                        <a:srgbClr val="E2E2E2"/>
+                      </a:solidFill>
+                      <a:prstDash val="solid"/>
+                      <a:round/>
+                      <a:headEnd type="none" w="med" len="med"/>
+                      <a:tailEnd type="none" w="med" len="med"/>
+                    </a:lnL>
+                    <a:lnR w="9525" cap="flat" cmpd="sng" algn="ctr">
+                      <a:solidFill>
+                        <a:srgbClr val="E2E2E2"/>
+                      </a:solidFill>
+                      <a:prstDash val="solid"/>
+                      <a:round/>
+                      <a:headEnd type="none" w="med" len="med"/>
+                      <a:tailEnd type="none" w="med" len="med"/>
+                    </a:lnR>
+                    <a:lnT w="9525" cap="flat" cmpd="sng" algn="ctr">
+                      <a:solidFill>
+                        <a:srgbClr val="E2E2E2"/>
+                      </a:solidFill>
+                      <a:prstDash val="solid"/>
+                      <a:round/>
+                      <a:headEnd type="none" w="med" len="med"/>
+                      <a:tailEnd type="none" w="med" len="med"/>
+                    </a:lnT>
+                    <a:lnB w="9525" cap="flat" cmpd="sng" algn="ctr">
+                      <a:solidFill>
+                        <a:srgbClr val="E2E2E2"/>
+                      </a:solidFill>
+                      <a:prstDash val="solid"/>
+                      <a:round/>
+                      <a:headEnd type="none" w="med" len="med"/>
+                      <a:tailEnd type="none" w="med" len="med"/>
+                    </a:lnB>
+                    <a:solidFill>
+                      <a:srgbClr val="FFFFFF"/>
+                    </a:solidFill>
+                  </a:tcPr>
+                </a:tc>
+                <a:tc>
+                  <a:txBody>
+                    <a:bodyPr/>
+                    <a:lstStyle/>
+                    <a:p>
+                      <a:pPr algn="l" indent="0" marL="0">
+                        <a:buNone/>
+                      </a:pPr>
+                      <a:r>
+                        <a:rPr lang="en-US" sz="1400" dirty="0">
+                          <a:solidFill>
+                            <a:srgbClr val="23272E"/>
+                          </a:solidFill>
+                          <a:latin typeface="Microsoft YaHei" pitchFamily="34" charset="0"/>
+                          <a:ea typeface="Microsoft YaHei" pitchFamily="34" charset="-122"/>
+                          <a:cs typeface="Microsoft YaHei" pitchFamily="34" charset="-120"/>
+                        </a:rPr>
+                        <a:t>69</a:t>
+                      </a:r>
+                      <a:endParaRPr lang="en-US" sz="1400" dirty="0">
+                        <a:latin typeface="Microsoft YaHei" charset="0"/>
+                        <a:ea typeface="Microsoft YaHei" charset="0"/>
+                        <a:cs typeface="Microsoft YaHei" charset="0"/>
+                      </a:endParaRPr>
+                    </a:p>
+                  </a:txBody>
+                  <a:tcPr marL="63500" marR="63500" marT="38100" marB="38100" anchor="ctr">
+                    <a:lnL w="9525" cap="flat" cmpd="sng" algn="ctr">
+                      <a:solidFill>
+                        <a:srgbClr val="E2E2E2"/>
+                      </a:solidFill>
+                      <a:prstDash val="solid"/>
+                      <a:round/>
+                      <a:headEnd type="none" w="med" len="med"/>
+                      <a:tailEnd type="none" w="med" len="med"/>
+                    </a:lnL>
+                    <a:lnR w="9525" cap="flat" cmpd="sng" algn="ctr">
+                      <a:solidFill>
+                        <a:srgbClr val="E2E2E2"/>
+                      </a:solidFill>
+                      <a:prstDash val="solid"/>
+                      <a:round/>
+                      <a:headEnd type="none" w="med" len="med"/>
+                      <a:tailEnd type="none" w="med" len="med"/>
+                    </a:lnR>
+                    <a:lnT w="9525" cap="flat" cmpd="sng" algn="ctr">
+                      <a:solidFill>
+                        <a:srgbClr val="E2E2E2"/>
+                      </a:solidFill>
+                      <a:prstDash val="solid"/>
+                      <a:round/>
+                      <a:headEnd type="none" w="med" len="med"/>
+                      <a:tailEnd type="none" w="med" len="med"/>
+                    </a:lnT>
+                    <a:lnB w="9525" cap="flat" cmpd="sng" algn="ctr">
+                      <a:solidFill>
+                        <a:srgbClr val="E2E2E2"/>
+                      </a:solidFill>
+                      <a:prstDash val="solid"/>
+                      <a:round/>
+                      <a:headEnd type="none" w="med" len="med"/>
+                      <a:tailEnd type="none" w="med" len="med"/>
+                    </a:lnB>
+                    <a:solidFill>
+                      <a:srgbClr val="FFFFFF"/>
+                    </a:solidFill>
+                  </a:tcPr>
+                </a:tc>
+                <a:tc>
+                  <a:txBody>
+                    <a:bodyPr/>
+                    <a:lstStyle/>
+                    <a:p>
+                      <a:pPr algn="l" indent="0" marL="0">
+                        <a:buNone/>
+                      </a:pPr>
+                      <a:r>
+                        <a:rPr lang="en-US" sz="1400" dirty="0">
+                          <a:solidFill>
+                            <a:srgbClr val="23272E"/>
+                          </a:solidFill>
+                          <a:latin typeface="Microsoft YaHei" pitchFamily="34" charset="0"/>
+                          <a:ea typeface="Microsoft YaHei" pitchFamily="34" charset="-122"/>
+                          <a:cs typeface="Microsoft YaHei" pitchFamily="34" charset="-120"/>
+                        </a:rPr>
+                        <a:t>45 / 40</a:t>
+                      </a:r>
+                      <a:endParaRPr lang="en-US" sz="1400" dirty="0">
+                        <a:latin typeface="Microsoft YaHei" charset="0"/>
+                        <a:ea typeface="Microsoft YaHei" charset="0"/>
+                        <a:cs typeface="Microsoft YaHei" charset="0"/>
+                      </a:endParaRPr>
+                    </a:p>
+                  </a:txBody>
+                  <a:tcPr marL="63500" marR="63500" marT="38100" marB="38100" anchor="ctr">
+                    <a:lnL w="9525" cap="flat" cmpd="sng" algn="ctr">
+                      <a:solidFill>
+                        <a:srgbClr val="E2E2E2"/>
+                      </a:solidFill>
+                      <a:prstDash val="solid"/>
+                      <a:round/>
+                      <a:headEnd type="none" w="med" len="med"/>
+                      <a:tailEnd type="none" w="med" len="med"/>
+                    </a:lnL>
+                    <a:lnR w="9525" cap="flat" cmpd="sng" algn="ctr">
+                      <a:solidFill>
+                        <a:srgbClr val="E2E2E2"/>
+                      </a:solidFill>
+                      <a:prstDash val="solid"/>
+                      <a:round/>
+                      <a:headEnd type="none" w="med" len="med"/>
+                      <a:tailEnd type="none" w="med" len="med"/>
+                    </a:lnR>
+                    <a:lnT w="9525" cap="flat" cmpd="sng" algn="ctr">
+                      <a:solidFill>
+                        <a:srgbClr val="E2E2E2"/>
+                      </a:solidFill>
+                      <a:prstDash val="solid"/>
+                      <a:round/>
+                      <a:headEnd type="none" w="med" len="med"/>
+                      <a:tailEnd type="none" w="med" len="med"/>
+                    </a:lnT>
+                    <a:lnB w="9525" cap="flat" cmpd="sng" algn="ctr">
+                      <a:solidFill>
+                        <a:srgbClr val="E2E2E2"/>
+                      </a:solidFill>
+                      <a:prstDash val="solid"/>
+                      <a:round/>
+                      <a:headEnd type="none" w="med" len="med"/>
+                      <a:tailEnd type="none" w="med" len="med"/>
+                    </a:lnB>
+                    <a:solidFill>
+                      <a:srgbClr val="FFFFFF"/>
+                    </a:solidFill>
+                  </a:tcPr>
+                </a:tc>
+                <a:tc>
+                  <a:txBody>
+                    <a:bodyPr/>
+                    <a:lstStyle/>
+                    <a:p>
+                      <a:pPr algn="l" indent="0" marL="0">
+                        <a:buNone/>
+                      </a:pPr>
+                      <a:r>
+                        <a:rPr lang="en-US" sz="1400" dirty="0">
+                          <a:solidFill>
+                            <a:srgbClr val="23272E"/>
+                          </a:solidFill>
+                          <a:latin typeface="Microsoft YaHei" pitchFamily="34" charset="0"/>
+                          <a:ea typeface="Microsoft YaHei" pitchFamily="34" charset="-122"/>
+                          <a:cs typeface="Microsoft YaHei" pitchFamily="34" charset="-120"/>
+                        </a:rPr>
+                        <a:t>50*</a:t>
+                      </a:r>
+                      <a:endParaRPr lang="en-US" sz="1400" dirty="0">
+                        <a:latin typeface="Microsoft YaHei" charset="0"/>
+                        <a:ea typeface="Microsoft YaHei" charset="0"/>
+                        <a:cs typeface="Microsoft YaHei" charset="0"/>
+                      </a:endParaRPr>
+                    </a:p>
+                  </a:txBody>
+                  <a:tcPr marL="63500" marR="63500" marT="38100" marB="38100" anchor="ctr">
+                    <a:lnL w="9525" cap="flat" cmpd="sng" algn="ctr">
+                      <a:solidFill>
+                        <a:srgbClr val="E2E2E2"/>
+                      </a:solidFill>
+                      <a:prstDash val="solid"/>
+                      <a:round/>
+                      <a:headEnd type="none" w="med" len="med"/>
+                      <a:tailEnd type="none" w="med" len="med"/>
+                    </a:lnL>
+                    <a:lnR w="9525" cap="flat" cmpd="sng" algn="ctr">
+                      <a:solidFill>
+                        <a:srgbClr val="E2E2E2"/>
+                      </a:solidFill>
+                      <a:prstDash val="solid"/>
+                      <a:round/>
+                      <a:headEnd type="none" w="med" len="med"/>
+                      <a:tailEnd type="none" w="med" len="med"/>
+                    </a:lnR>
+                    <a:lnT w="9525" cap="flat" cmpd="sng" algn="ctr">
+                      <a:solidFill>
+                        <a:srgbClr val="E2E2E2"/>
+                      </a:solidFill>
+                      <a:prstDash val="solid"/>
+                      <a:round/>
+                      <a:headEnd type="none" w="med" len="med"/>
+                      <a:tailEnd type="none" w="med" len="med"/>
+                    </a:lnT>
+                    <a:lnB w="9525" cap="flat" cmpd="sng" algn="ctr">
+                      <a:solidFill>
+                        <a:srgbClr val="E2E2E2"/>
+                      </a:solidFill>
+                      <a:prstDash val="solid"/>
+                      <a:round/>
+                      <a:headEnd type="none" w="med" len="med"/>
+                      <a:tailEnd type="none" w="med" len="med"/>
+                    </a:lnB>
+                    <a:solidFill>
+                      <a:srgbClr val="FFFFFF"/>
+                    </a:solidFill>
+                  </a:tcPr>
+                </a:tc>
+                <a:tc>
+                  <a:txBody>
+                    <a:bodyPr/>
+                    <a:lstStyle/>
+                    <a:p>
+                      <a:pPr algn="l" indent="0" marL="0">
+                        <a:buNone/>
+                      </a:pPr>
+                      <a:r>
+                        <a:rPr lang="en-US" sz="1400" dirty="0">
+                          <a:solidFill>
+                            <a:srgbClr val="23272E"/>
+                          </a:solidFill>
+                          <a:latin typeface="Microsoft YaHei" pitchFamily="34" charset="0"/>
+                          <a:ea typeface="Microsoft YaHei" pitchFamily="34" charset="-122"/>
+                          <a:cs typeface="Microsoft YaHei" pitchFamily="34" charset="-120"/>
+                        </a:rPr>
+                        <a:t>提亮(⚠️美白慎)</a:t>
+                      </a:r>
+                      <a:endParaRPr lang="en-US" sz="1400" dirty="0">
+                        <a:latin typeface="Microsoft YaHei" charset="0"/>
+                        <a:ea typeface="Microsoft YaHei" charset="0"/>
+                        <a:cs typeface="Microsoft YaHei" charset="0"/>
+                      </a:endParaRPr>
+                    </a:p>
+                  </a:txBody>
+                  <a:tcPr marL="63500" marR="63500" marT="38100" marB="38100" anchor="ctr">
+                    <a:lnL w="9525" cap="flat" cmpd="sng" algn="ctr">
+                      <a:solidFill>
+                        <a:srgbClr val="E2E2E2"/>
+                      </a:solidFill>
+                      <a:prstDash val="solid"/>
+                      <a:round/>
+                      <a:headEnd type="none" w="med" len="med"/>
+                      <a:tailEnd type="none" w="med" len="med"/>
+                    </a:lnL>
+                    <a:lnR w="9525" cap="flat" cmpd="sng" algn="ctr">
+                      <a:solidFill>
+                        <a:srgbClr val="E2E2E2"/>
+                      </a:solidFill>
+                      <a:prstDash val="solid"/>
+                      <a:round/>
+                      <a:headEnd type="none" w="med" len="med"/>
+                      <a:tailEnd type="none" w="med" len="med"/>
+                    </a:lnR>
+                    <a:lnT w="9525" cap="flat" cmpd="sng" algn="ctr">
+                      <a:solidFill>
+                        <a:srgbClr val="E2E2E2"/>
+                      </a:solidFill>
+                      <a:prstDash val="solid"/>
+                      <a:round/>
+                      <a:headEnd type="none" w="med" len="med"/>
+                      <a:tailEnd type="none" w="med" len="med"/>
+                    </a:lnT>
+                    <a:lnB w="9525" cap="flat" cmpd="sng" algn="ctr">
+                      <a:solidFill>
+                        <a:srgbClr val="E2E2E2"/>
+                      </a:solidFill>
+                      <a:prstDash val="solid"/>
+                      <a:round/>
+                      <a:headEnd type="none" w="med" len="med"/>
+                      <a:tailEnd type="none" w="med" len="med"/>
+                    </a:lnB>
+                    <a:solidFill>
+                      <a:srgbClr val="FFFFFF"/>
+                    </a:solidFill>
+                  </a:tcPr>
+                </a:tc>
+              </a:tr>
+            </a:tbl>
+          </a:graphicData>
+        </a:graphic>
+      </p:graphicFrame>
+      <p:sp>
+        <p:nvSpPr>
+          <p:cNvPr id="4" name="Text 1"/>
+          <p:cNvSpPr/>
+          <p:nvPr/>
+        </p:nvSpPr>
+        <p:spPr>
+          <a:xfrm>
+            <a:off x="457200" y="5532120"/>
+            <a:ext cx="11247120" cy="365760"/>
+          </a:xfrm>
+          <a:prstGeom prst="rect">
+            <a:avLst/>
+          </a:prstGeom>
+          <a:noFill/>
+          <a:ln/>
+        </p:spPr>
+        <p:txBody>
+          <a:bodyPr wrap="square" rtlCol="0" anchor="ctr"/>
+          <a:lstStyle/>
+          <a:p>
+            <a:pPr indent="0" marL="0">
+              <a:buNone/>
+            </a:pPr>
+            <a:r>
+              <a:rPr lang="en-US" sz="1250" dirty="0">
+                <a:solidFill>
+                  <a:srgbClr val="8A8F98"/>
+                </a:solidFill>
+                <a:latin typeface="Microsoft YaHei" pitchFamily="34" charset="0"/>
+                <a:ea typeface="Microsoft YaHei" pitchFamily="34" charset="-122"/>
+                <a:cs typeface="Microsoft YaHei" pitchFamily="34" charset="-120"/>
+              </a:rPr>
+              <a:t>主推：金色+黑银走量 · 黑钻VC100内容旗舰 · 深蓝细分 · 银色克制   |   * 库存会补货+陆续进新品</a:t>
+            </a:r>
+            <a:endParaRPr lang="en-US" sz="1250" dirty="0"/>
+          </a:p>
+        </p:txBody>
+      </p:sp>
+      <p:sp>
+        <p:nvSpPr>
+          <p:cNvPr id="5" name="Text 2"/>
+          <p:cNvSpPr/>
+          <p:nvPr/>
+        </p:nvSpPr>
+        <p:spPr>
+          <a:xfrm>
+            <a:off x="457200" y="6537960"/>
+            <a:ext cx="9144000" cy="237744"/>
+          </a:xfrm>
+          <a:prstGeom prst="rect">
+            <a:avLst/>
+          </a:prstGeom>
+          <a:noFill/>
+          <a:ln/>
+        </p:spPr>
+        <p:txBody>
+          <a:bodyPr wrap="square" rtlCol="0" anchor="ctr"/>
+          <a:lstStyle/>
+          <a:p>
+            <a:pPr indent="0" marL="0">
+              <a:buNone/>
+            </a:pPr>
+            <a:r>
+              <a:rPr lang="en-US" sz="850" dirty="0">
+                <a:solidFill>
+                  <a:srgbClr val="8A8F98"/>
+                </a:solidFill>
+                <a:latin typeface="Microsoft YaHei" pitchFamily="34" charset="0"/>
+                <a:ea typeface="Microsoft YaHei" pitchFamily="34" charset="-122"/>
+                <a:cs typeface="Microsoft YaHei" pitchFamily="34" charset="-120"/>
+              </a:rPr>
+              <a:t>Quality 1st · 皇后的秘密 · 代运营</a:t>
+            </a:r>
+            <a:endParaRPr lang="en-US" sz="850" dirty="0"/>
+          </a:p>
+        </p:txBody>
+      </p:sp>
+      <p:sp>
+        <p:nvSpPr>
+          <p:cNvPr id="6" name="Text 3"/>
+          <p:cNvSpPr/>
+          <p:nvPr/>
+        </p:nvSpPr>
+        <p:spPr>
+          <a:xfrm>
+            <a:off x="11430000" y="6537960"/>
+            <a:ext cx="457200" cy="237744"/>
+          </a:xfrm>
+          <a:prstGeom prst="rect">
+            <a:avLst/>
+          </a:prstGeom>
+          <a:noFill/>
+          <a:ln/>
+        </p:spPr>
+        <p:txBody>
+          <a:bodyPr wrap="square" rtlCol="0" anchor="ctr"/>
+          <a:lstStyle/>
+          <a:p>
+            <a:pPr algn="r" indent="0" marL="0">
+              <a:buNone/>
+            </a:pPr>
+            <a:r>
+              <a:rPr lang="en-US" sz="850" dirty="0">
+                <a:solidFill>
+                  <a:srgbClr val="8A8F98"/>
+                </a:solidFill>
+                <a:latin typeface="Microsoft YaHei" pitchFamily="34" charset="0"/>
+                <a:ea typeface="Microsoft YaHei" pitchFamily="34" charset="-122"/>
+                <a:cs typeface="Microsoft YaHei" pitchFamily="34" charset="-120"/>
+              </a:rPr>
+              <a:t>10</a:t>
+            </a:r>
+            <a:endParaRPr lang="en-US" sz="850" dirty="0"/>
+          </a:p>
+        </p:txBody>
+      </p:sp>
+    </p:spTree>
+  </p:cSld>
+  <p:clrMapOvr>
+    <a:masterClrMapping/>
+  </p:clrMapOvr>
+</p:sld>
+</file>
+
+<file path=ppt/slides/slide11.xml><?xml version="1.0" encoding="utf-8"?>
+<p:sld xmlns:a="http://schemas.openxmlformats.org/drawingml/2006/main" xmlns:r="http://schemas.openxmlformats.org/officeDocument/2006/relationships" xmlns:p="http://schemas.openxmlformats.org/presentationml/2006/main">
+  <p:cSld name="Slide 11">
+    <p:bg>
+      <p:bgPr>
+        <a:solidFill>
+          <a:srgbClr val="FFFFFF"/>
+        </a:solidFill>
+      </p:bgPr>
+    </p:bg>
+    <p:spTree>
+      <p:nvGrpSpPr>
+        <p:cNvPr id="1" name=""/>
+        <p:cNvGrpSpPr/>
+        <p:nvPr/>
+      </p:nvGrpSpPr>
+      <p:grpSpPr>
+        <a:xfrm>
+          <a:off x="0" y="0"/>
+          <a:ext cx="0" cy="0"/>
+          <a:chOff x="0" y="0"/>
+          <a:chExt cx="0" cy="0"/>
+        </a:xfrm>
+      </p:grpSpPr>
+      <p:sp>
+        <p:nvSpPr>
+          <p:cNvPr id="2" name="Text 0"/>
+          <p:cNvSpPr/>
+          <p:nvPr/>
+        </p:nvSpPr>
+        <p:spPr>
+          <a:xfrm>
+            <a:off x="457200" y="274320"/>
+            <a:ext cx="11247120" cy="502920"/>
+          </a:xfrm>
+          <a:prstGeom prst="rect">
+            <a:avLst/>
+          </a:prstGeom>
+          <a:noFill/>
+          <a:ln/>
+        </p:spPr>
+        <p:txBody>
+          <a:bodyPr wrap="square" rtlCol="0" anchor="ctr"/>
+          <a:lstStyle/>
+          <a:p>
+            <a:pPr indent="0" marL="0">
+              <a:buNone/>
+            </a:pPr>
+            <a:r>
+              <a:rPr lang="en-US" sz="2400" b="1" dirty="0">
+                <a:solidFill>
+                  <a:srgbClr val="23272E"/>
+                </a:solidFill>
+                <a:latin typeface="Microsoft YaHei" pitchFamily="34" charset="0"/>
+                <a:ea typeface="Microsoft YaHei" pitchFamily="34" charset="-122"/>
+                <a:cs typeface="Microsoft YaHei" pitchFamily="34" charset="-120"/>
+              </a:rPr>
               <a:t>⑥ 笔记分布 + 预算(45万/约45篇)</a:t>
             </a:r>
             <a:endParaRPr lang="en-US" sz="2400" dirty="0"/>
@@ -2127,7 +4898,7 @@
       </p:sp>
       <p:graphicFrame>
         <p:nvGraphicFramePr>
-          <p:cNvPr id="11" name="Table 0"/>
+          <p:cNvPr id="12" name="Table 0"/>
           <p:cNvGraphicFramePr>
             <a:graphicFrameLocks noGrp="1"/>
           </p:cNvGraphicFramePr>
@@ -3297,7 +6068,7 @@
                 <a:ea typeface="Microsoft YaHei" pitchFamily="34" charset="-122"/>
                 <a:cs typeface="Microsoft YaHei" pitchFamily="34" charset="-120"/>
               </a:rPr>
-              <a:t>10</a:t>
+              <a:t>11</a:t>
             </a:r>
             <a:endParaRPr lang="en-US" sz="850" dirty="0"/>
           </a:p>
@@ -3311,9 +6082,9 @@
 </p:sld>
 </file>
 
-<file path=ppt/slides/slide11.xml><?xml version="1.0" encoding="utf-8"?>
+<file path=ppt/slides/slide12.xml><?xml version="1.0" encoding="utf-8"?>
 <p:sld xmlns:a="http://schemas.openxmlformats.org/drawingml/2006/main" xmlns:r="http://schemas.openxmlformats.org/officeDocument/2006/relationships" xmlns:p="http://schemas.openxmlformats.org/presentationml/2006/main">
-  <p:cSld name="Slide 11">
+  <p:cSld name="Slide 12">
     <p:bg>
       <p:bgPr>
         <a:solidFill>
@@ -3376,7 +6147,7 @@
       </p:sp>
       <p:graphicFrame>
         <p:nvGraphicFramePr>
-          <p:cNvPr id="12" name="Table 0"/>
+          <p:cNvPr id="13" name="Table 0"/>
           <p:cNvGraphicFramePr>
             <a:graphicFrameLocks noGrp="1"/>
           </p:cNvGraphicFramePr>
@@ -4886,7 +7657,7 @@
                 <a:ea typeface="Microsoft YaHei" pitchFamily="34" charset="-122"/>
                 <a:cs typeface="Microsoft YaHei" pitchFamily="34" charset="-120"/>
               </a:rPr>
-              <a:t>11</a:t>
+              <a:t>12</a:t>
             </a:r>
             <a:endParaRPr lang="en-US" sz="850" dirty="0"/>
           </a:p>
@@ -4900,9 +7671,9 @@
 </p:sld>
 </file>
 
-<file path=ppt/slides/slide12.xml><?xml version="1.0" encoding="utf-8"?>
+<file path=ppt/slides/slide13.xml><?xml version="1.0" encoding="utf-8"?>
 <p:sld xmlns:a="http://schemas.openxmlformats.org/drawingml/2006/main" xmlns:r="http://schemas.openxmlformats.org/officeDocument/2006/relationships" xmlns:p="http://schemas.openxmlformats.org/presentationml/2006/main">
-  <p:cSld name="Slide 12">
+  <p:cSld name="Slide 13">
     <p:bg>
       <p:bgPr>
         <a:solidFill>
@@ -5664,7 +8435,7 @@
                 <a:ea typeface="Microsoft YaHei" pitchFamily="34" charset="-122"/>
                 <a:cs typeface="Microsoft YaHei" pitchFamily="34" charset="-120"/>
               </a:rPr>
-              <a:t>我们差异化打「高浓度VC精华·提亮·毛孔·进阶功效」，KOC铺量+腰部攻略+头部造势，为双11蓄水。
+              <a:t>差异化打「高浓度VC精华·提亮·毛孔」，且与日本线下药妆店内容不同质(他们做购物囤货，我们做功效护肤)，为双11蓄水。
 </a:t>
             </a:r>
             <a:pPr indent="0" marL="0">
@@ -9341,7 +12112,7 @@
                 <a:ea typeface="Microsoft YaHei" pitchFamily="34" charset="-122"/>
                 <a:cs typeface="Microsoft YaHei" pitchFamily="34" charset="-120"/>
               </a:rPr>
-              <a:t>③ 差异化定位 + 笔记类型配比</a:t>
+              <a:t>③ 内容差异化 · 不与日本线下同质</a:t>
             </a:r>
             <a:endParaRPr lang="en-US" sz="2400" dirty="0"/>
           </a:p>
@@ -9355,8 +12126,8 @@
         </p:nvSpPr>
         <p:spPr>
           <a:xfrm>
-            <a:off x="457200" y="1005840"/>
-            <a:ext cx="11247120" cy="640080"/>
+            <a:off x="457200" y="960120"/>
+            <a:ext cx="11247120" cy="548640"/>
           </a:xfrm>
           <a:prstGeom prst="rect">
             <a:avLst/>
@@ -9365,7 +12136,7 @@
           <a:ln/>
         </p:spPr>
         <p:txBody>
-          <a:bodyPr wrap="square" rtlCol="0" anchor="t"/>
+          <a:bodyPr wrap="square" rtlCol="0" anchor="ctr"/>
           <a:lstStyle/>
           <a:p>
             <a:pPr indent="0" marL="0">
@@ -9374,55 +12145,13 @@
             <a:r>
               <a:rPr lang="en-US" sz="1500" b="1" dirty="0">
                 <a:solidFill>
-                  <a:srgbClr val="B0122C"/>
-                </a:solidFill>
-                <a:latin typeface="Microsoft YaHei" pitchFamily="34" charset="0"/>
-                <a:ea typeface="Microsoft YaHei" pitchFamily="34" charset="-122"/>
-                <a:cs typeface="Microsoft YaHei" pitchFamily="34" charset="-120"/>
-              </a:rPr>
-              <a:t>差异化：</a:t>
-            </a:r>
-            <a:pPr indent="0" marL="0">
-              <a:buNone/>
-            </a:pPr>
-            <a:r>
-              <a:rPr lang="en-US" sz="1500" dirty="0">
-                <a:solidFill>
                   <a:srgbClr val="23272E"/>
                 </a:solidFill>
                 <a:latin typeface="Microsoft YaHei" pitchFamily="34" charset="0"/>
                 <a:ea typeface="Microsoft YaHei" pitchFamily="34" charset="-122"/>
                 <a:cs typeface="Microsoft YaHei" pitchFamily="34" charset="-120"/>
               </a:rPr>
-              <a:t>lululun占「平价补水」；我们打「高浓度VC精华·提亮·毛孔·进阶功效」。   </a:t>
-            </a:r>
-            <a:pPr indent="0" marL="0">
-              <a:buNone/>
-            </a:pPr>
-            <a:r>
-              <a:rPr lang="en-US" sz="1500" b="1" dirty="0">
-                <a:solidFill>
-                  <a:srgbClr val="B0122C"/>
-                </a:solidFill>
-                <a:latin typeface="Microsoft YaHei" pitchFamily="34" charset="0"/>
-                <a:ea typeface="Microsoft YaHei" pitchFamily="34" charset="-122"/>
-                <a:cs typeface="Microsoft YaHei" pitchFamily="34" charset="-120"/>
-              </a:rPr>
-              <a:t>爆文公式：</a:t>
-            </a:r>
-            <a:pPr indent="0" marL="0">
-              <a:buNone/>
-            </a:pPr>
-            <a:r>
-              <a:rPr lang="en-US" sz="1500" dirty="0">
-                <a:solidFill>
-                  <a:srgbClr val="23272E"/>
-                </a:solidFill>
-                <a:latin typeface="Microsoft YaHei" pitchFamily="34" charset="0"/>
-                <a:ea typeface="Microsoft YaHei" pitchFamily="34" charset="-122"/>
-                <a:cs typeface="Microsoft YaHei" pitchFamily="34" charset="-120"/>
-              </a:rPr>
-              <a:t>🇯🇵日本+怎么选/不踩雷+7图合集+按肤质分类+真人口吻</a:t>
+              <a:t>日本线下药妆店在做「购物开箱/平价囤货/代购/怎么选」 → 所以中国小红书我们做「功效护肤/成分/场景解决方案」。</a:t>
             </a:r>
             <a:endParaRPr lang="en-US" sz="1500" dirty="0"/>
           </a:p>
@@ -9443,7 +12172,7 @@
           </p:nvPr>
         </p:nvGraphicFramePr>
         <p:xfrm>
-          <a:off x="457200" y="1828800"/>
+          <a:off x="457200" y="1645920"/>
           <a:ext cx="11247120" cy="914400"/>
         </p:xfrm>
         <a:graphic>
@@ -9451,12 +12180,11 @@
             <a:tbl>
               <a:tblPr/>
               <a:tblGrid>
-                <a:gridCol w="2743200"/>
-                <a:gridCol w="1097280"/>
-                <a:gridCol w="2377440"/>
-                <a:gridCol w="5029200"/>
+                <a:gridCol w="1280160"/>
+                <a:gridCol w="4754880"/>
+                <a:gridCol w="5212080"/>
               </a:tblGrid>
-              <a:tr h="658368">
+              <a:tr h="603504">
                 <a:tc>
                   <a:txBody>
                     <a:bodyPr/>
@@ -9466,7 +12194,7 @@
                         <a:buNone/>
                       </a:pPr>
                       <a:r>
-                        <a:rPr lang="en-US" sz="1600" b="1" dirty="0">
+                        <a:rPr lang="en-US" sz="1500" b="1" dirty="0">
                           <a:solidFill>
                             <a:srgbClr val="FFFFFF"/>
                           </a:solidFill>
@@ -9474,9 +12202,9 @@
                           <a:ea typeface="Microsoft YaHei" pitchFamily="34" charset="-122"/>
                           <a:cs typeface="Microsoft YaHei" pitchFamily="34" charset="-120"/>
                         </a:rPr>
-                        <a:t>内容类型</a:t>
+                        <a:t>维度</a:t>
                       </a:r>
-                      <a:endParaRPr lang="en-US" sz="1600" dirty="0">
+                      <a:endParaRPr lang="en-US" sz="1500" dirty="0">
                         <a:latin typeface="Microsoft YaHei" charset="0"/>
                         <a:ea typeface="Microsoft YaHei" charset="0"/>
                         <a:cs typeface="Microsoft YaHei" charset="0"/>
@@ -9534,7 +12262,7 @@
                         <a:buNone/>
                       </a:pPr>
                       <a:r>
-                        <a:rPr lang="en-US" sz="1600" b="1" dirty="0">
+                        <a:rPr lang="en-US" sz="1500" b="1" dirty="0">
                           <a:solidFill>
                             <a:srgbClr val="FFFFFF"/>
                           </a:solidFill>
@@ -9542,9 +12270,9 @@
                           <a:ea typeface="Microsoft YaHei" pitchFamily="34" charset="-122"/>
                           <a:cs typeface="Microsoft YaHei" pitchFamily="34" charset="-120"/>
                         </a:rPr>
-                        <a:t>篇数</a:t>
+                        <a:t>日本线下药妆店(别人)</a:t>
                       </a:r>
-                      <a:endParaRPr lang="en-US" sz="1600" dirty="0">
+                      <a:endParaRPr lang="en-US" sz="1500" dirty="0">
                         <a:latin typeface="Microsoft YaHei" charset="0"/>
                         <a:ea typeface="Microsoft YaHei" charset="0"/>
                         <a:cs typeface="Microsoft YaHei" charset="0"/>
@@ -9602,7 +12330,7 @@
                         <a:buNone/>
                       </a:pPr>
                       <a:r>
-                        <a:rPr lang="en-US" sz="1600" b="1" dirty="0">
+                        <a:rPr lang="en-US" sz="1500" b="1" dirty="0">
                           <a:solidFill>
                             <a:srgbClr val="FFFFFF"/>
                           </a:solidFill>
@@ -9610,9 +12338,9 @@
                           <a:ea typeface="Microsoft YaHei" pitchFamily="34" charset="-122"/>
                           <a:cs typeface="Microsoft YaHei" pitchFamily="34" charset="-120"/>
                         </a:rPr>
-                        <a:t>达人层级</a:t>
+                        <a:t>中国小红书(我方·差异化)</a:t>
                       </a:r>
-                      <a:endParaRPr lang="en-US" sz="1600" dirty="0">
+                      <a:endParaRPr lang="en-US" sz="1500" dirty="0">
                         <a:latin typeface="Microsoft YaHei" charset="0"/>
                         <a:ea typeface="Microsoft YaHei" charset="0"/>
                         <a:cs typeface="Microsoft YaHei" charset="0"/>
@@ -9661,6 +12389,8 @@
                     </a:solidFill>
                   </a:tcPr>
                 </a:tc>
+              </a:tr>
+              <a:tr h="603504">
                 <a:tc>
                   <a:txBody>
                     <a:bodyPr/>
@@ -9670,77 +12400,7 @@
                         <a:buNone/>
                       </a:pPr>
                       <a:r>
-                        <a:rPr lang="en-US" sz="1600" b="1" dirty="0">
-                          <a:solidFill>
-                            <a:srgbClr val="FFFFFF"/>
-                          </a:solidFill>
-                          <a:latin typeface="Microsoft YaHei" pitchFamily="34" charset="0"/>
-                          <a:ea typeface="Microsoft YaHei" pitchFamily="34" charset="-122"/>
-                          <a:cs typeface="Microsoft YaHei" pitchFamily="34" charset="-120"/>
-                        </a:rPr>
-                        <a:t>说明</a:t>
-                      </a:r>
-                      <a:endParaRPr lang="en-US" sz="1600" dirty="0">
-                        <a:latin typeface="Microsoft YaHei" charset="0"/>
-                        <a:ea typeface="Microsoft YaHei" charset="0"/>
-                        <a:cs typeface="Microsoft YaHei" charset="0"/>
-                      </a:endParaRPr>
-                    </a:p>
-                  </a:txBody>
-                  <a:tcPr marL="91440" marR="91440" marT="45720" marB="45720" anchor="ctr">
-                    <a:lnL w="9525" cap="flat" cmpd="sng" algn="ctr">
-                      <a:solidFill>
-                        <a:srgbClr val="E2E2E2"/>
-                      </a:solidFill>
-                      <a:prstDash val="solid"/>
-                      <a:round/>
-                      <a:headEnd type="none" w="med" len="med"/>
-                      <a:tailEnd type="none" w="med" len="med"/>
-                    </a:lnL>
-                    <a:lnR w="9525" cap="flat" cmpd="sng" algn="ctr">
-                      <a:solidFill>
-                        <a:srgbClr val="E2E2E2"/>
-                      </a:solidFill>
-                      <a:prstDash val="solid"/>
-                      <a:round/>
-                      <a:headEnd type="none" w="med" len="med"/>
-                      <a:tailEnd type="none" w="med" len="med"/>
-                    </a:lnR>
-                    <a:lnT w="9525" cap="flat" cmpd="sng" algn="ctr">
-                      <a:solidFill>
-                        <a:srgbClr val="E2E2E2"/>
-                      </a:solidFill>
-                      <a:prstDash val="solid"/>
-                      <a:round/>
-                      <a:headEnd type="none" w="med" len="med"/>
-                      <a:tailEnd type="none" w="med" len="med"/>
-                    </a:lnT>
-                    <a:lnB w="9525" cap="flat" cmpd="sng" algn="ctr">
-                      <a:solidFill>
-                        <a:srgbClr val="E2E2E2"/>
-                      </a:solidFill>
-                      <a:prstDash val="solid"/>
-                      <a:round/>
-                      <a:headEnd type="none" w="med" len="med"/>
-                      <a:tailEnd type="none" w="med" len="med"/>
-                    </a:lnB>
-                    <a:solidFill>
-                      <a:srgbClr val="7A0E22"/>
-                    </a:solidFill>
-                  </a:tcPr>
-                </a:tc>
-              </a:tr>
-              <a:tr h="658368">
-                <a:tc>
-                  <a:txBody>
-                    <a:bodyPr/>
-                    <a:lstStyle/>
-                    <a:p>
-                      <a:pPr algn="ctr" indent="0" marL="0">
-                        <a:buNone/>
-                      </a:pPr>
-                      <a:r>
-                        <a:rPr lang="en-US" sz="1500" dirty="0">
+                        <a:rPr lang="en-US" sz="1400" dirty="0">
                           <a:solidFill>
                             <a:srgbClr val="23272E"/>
                           </a:solidFill>
@@ -9748,9 +12408,9 @@
                           <a:ea typeface="Microsoft YaHei" pitchFamily="34" charset="-122"/>
                           <a:cs typeface="Microsoft YaHei" pitchFamily="34" charset="-120"/>
                         </a:rPr>
-                        <a:t>B·测评/回购</a:t>
+                        <a:t>心智</a:t>
                       </a:r>
-                      <a:endParaRPr lang="en-US" sz="1500" dirty="0">
+                      <a:endParaRPr lang="en-US" sz="1400" dirty="0">
                         <a:latin typeface="Microsoft YaHei" charset="0"/>
                         <a:ea typeface="Microsoft YaHei" charset="0"/>
                         <a:cs typeface="Microsoft YaHei" charset="0"/>
@@ -9808,7 +12468,7 @@
                         <a:buNone/>
                       </a:pPr>
                       <a:r>
-                        <a:rPr lang="en-US" sz="1500" dirty="0">
+                        <a:rPr lang="en-US" sz="1400" dirty="0">
                           <a:solidFill>
                             <a:srgbClr val="23272E"/>
                           </a:solidFill>
@@ -9816,9 +12476,9 @@
                           <a:ea typeface="Microsoft YaHei" pitchFamily="34" charset="-122"/>
                           <a:cs typeface="Microsoft YaHei" pitchFamily="34" charset="-120"/>
                         </a:rPr>
-                        <a:t>18</a:t>
+                        <a:t>药妆店热销/日本正品/平价好物</a:t>
                       </a:r>
-                      <a:endParaRPr lang="en-US" sz="1500" dirty="0">
+                      <a:endParaRPr lang="en-US" sz="1400" dirty="0">
                         <a:latin typeface="Microsoft YaHei" charset="0"/>
                         <a:ea typeface="Microsoft YaHei" charset="0"/>
                         <a:cs typeface="Microsoft YaHei" charset="0"/>
@@ -9876,7 +12536,7 @@
                         <a:buNone/>
                       </a:pPr>
                       <a:r>
-                        <a:rPr lang="en-US" sz="1500" dirty="0">
+                        <a:rPr lang="en-US" sz="1400" dirty="0">
                           <a:solidFill>
                             <a:srgbClr val="23272E"/>
                           </a:solidFill>
@@ -9884,9 +12544,285 @@
                           <a:ea typeface="Microsoft YaHei" pitchFamily="34" charset="-122"/>
                           <a:cs typeface="Microsoft YaHei" pitchFamily="34" charset="-120"/>
                         </a:rPr>
-                        <a:t>KOC/尾部</a:t>
+                        <a:t>护肤功效/精华级/值得日常用</a:t>
                       </a:r>
-                      <a:endParaRPr lang="en-US" sz="1500" dirty="0">
+                      <a:endParaRPr lang="en-US" sz="1400" dirty="0">
+                        <a:latin typeface="Microsoft YaHei" charset="0"/>
+                        <a:ea typeface="Microsoft YaHei" charset="0"/>
+                        <a:cs typeface="Microsoft YaHei" charset="0"/>
+                      </a:endParaRPr>
+                    </a:p>
+                  </a:txBody>
+                  <a:tcPr marL="63500" marR="63500" marT="38100" marB="38100" anchor="ctr">
+                    <a:lnL w="9525" cap="flat" cmpd="sng" algn="ctr">
+                      <a:solidFill>
+                        <a:srgbClr val="E2E2E2"/>
+                      </a:solidFill>
+                      <a:prstDash val="solid"/>
+                      <a:round/>
+                      <a:headEnd type="none" w="med" len="med"/>
+                      <a:tailEnd type="none" w="med" len="med"/>
+                    </a:lnL>
+                    <a:lnR w="9525" cap="flat" cmpd="sng" algn="ctr">
+                      <a:solidFill>
+                        <a:srgbClr val="E2E2E2"/>
+                      </a:solidFill>
+                      <a:prstDash val="solid"/>
+                      <a:round/>
+                      <a:headEnd type="none" w="med" len="med"/>
+                      <a:tailEnd type="none" w="med" len="med"/>
+                    </a:lnR>
+                    <a:lnT w="9525" cap="flat" cmpd="sng" algn="ctr">
+                      <a:solidFill>
+                        <a:srgbClr val="E2E2E2"/>
+                      </a:solidFill>
+                      <a:prstDash val="solid"/>
+                      <a:round/>
+                      <a:headEnd type="none" w="med" len="med"/>
+                      <a:tailEnd type="none" w="med" len="med"/>
+                    </a:lnT>
+                    <a:lnB w="9525" cap="flat" cmpd="sng" algn="ctr">
+                      <a:solidFill>
+                        <a:srgbClr val="E2E2E2"/>
+                      </a:solidFill>
+                      <a:prstDash val="solid"/>
+                      <a:round/>
+                      <a:headEnd type="none" w="med" len="med"/>
+                      <a:tailEnd type="none" w="med" len="med"/>
+                    </a:lnB>
+                    <a:solidFill>
+                      <a:srgbClr val="FFFFFF"/>
+                    </a:solidFill>
+                  </a:tcPr>
+                </a:tc>
+              </a:tr>
+              <a:tr h="603504">
+                <a:tc>
+                  <a:txBody>
+                    <a:bodyPr/>
+                    <a:lstStyle/>
+                    <a:p>
+                      <a:pPr algn="ctr" indent="0" marL="0">
+                        <a:buNone/>
+                      </a:pPr>
+                      <a:r>
+                        <a:rPr lang="en-US" sz="1400" dirty="0">
+                          <a:solidFill>
+                            <a:srgbClr val="23272E"/>
+                          </a:solidFill>
+                          <a:latin typeface="Microsoft YaHei" pitchFamily="34" charset="0"/>
+                          <a:ea typeface="Microsoft YaHei" pitchFamily="34" charset="-122"/>
+                          <a:cs typeface="Microsoft YaHei" pitchFamily="34" charset="-120"/>
+                        </a:rPr>
+                        <a:t>内容形式</a:t>
+                      </a:r>
+                      <a:endParaRPr lang="en-US" sz="1400" dirty="0">
+                        <a:latin typeface="Microsoft YaHei" charset="0"/>
+                        <a:ea typeface="Microsoft YaHei" charset="0"/>
+                        <a:cs typeface="Microsoft YaHei" charset="0"/>
+                      </a:endParaRPr>
+                    </a:p>
+                  </a:txBody>
+                  <a:tcPr marL="63500" marR="63500" marT="38100" marB="38100" anchor="ctr">
+                    <a:lnL w="9525" cap="flat" cmpd="sng" algn="ctr">
+                      <a:solidFill>
+                        <a:srgbClr val="E2E2E2"/>
+                      </a:solidFill>
+                      <a:prstDash val="solid"/>
+                      <a:round/>
+                      <a:headEnd type="none" w="med" len="med"/>
+                      <a:tailEnd type="none" w="med" len="med"/>
+                    </a:lnL>
+                    <a:lnR w="9525" cap="flat" cmpd="sng" algn="ctr">
+                      <a:solidFill>
+                        <a:srgbClr val="E2E2E2"/>
+                      </a:solidFill>
+                      <a:prstDash val="solid"/>
+                      <a:round/>
+                      <a:headEnd type="none" w="med" len="med"/>
+                      <a:tailEnd type="none" w="med" len="med"/>
+                    </a:lnR>
+                    <a:lnT w="9525" cap="flat" cmpd="sng" algn="ctr">
+                      <a:solidFill>
+                        <a:srgbClr val="E2E2E2"/>
+                      </a:solidFill>
+                      <a:prstDash val="solid"/>
+                      <a:round/>
+                      <a:headEnd type="none" w="med" len="med"/>
+                      <a:tailEnd type="none" w="med" len="med"/>
+                    </a:lnT>
+                    <a:lnB w="9525" cap="flat" cmpd="sng" algn="ctr">
+                      <a:solidFill>
+                        <a:srgbClr val="E2E2E2"/>
+                      </a:solidFill>
+                      <a:prstDash val="solid"/>
+                      <a:round/>
+                      <a:headEnd type="none" w="med" len="med"/>
+                      <a:tailEnd type="none" w="med" len="med"/>
+                    </a:lnB>
+                    <a:solidFill>
+                      <a:srgbClr val="F7F3F4"/>
+                    </a:solidFill>
+                  </a:tcPr>
+                </a:tc>
+                <a:tc>
+                  <a:txBody>
+                    <a:bodyPr/>
+                    <a:lstStyle/>
+                    <a:p>
+                      <a:pPr algn="l" indent="0" marL="0">
+                        <a:buNone/>
+                      </a:pPr>
+                      <a:r>
+                        <a:rPr lang="en-US" sz="1400" dirty="0">
+                          <a:solidFill>
+                            <a:srgbClr val="23272E"/>
+                          </a:solidFill>
+                          <a:latin typeface="Microsoft YaHei" pitchFamily="34" charset="0"/>
+                          <a:ea typeface="Microsoft YaHei" pitchFamily="34" charset="-122"/>
+                          <a:cs typeface="Microsoft YaHei" pitchFamily="34" charset="-120"/>
+                        </a:rPr>
+                        <a:t>购物开箱/囤货清单/代购/怎么选</a:t>
+                      </a:r>
+                      <a:endParaRPr lang="en-US" sz="1400" dirty="0">
+                        <a:latin typeface="Microsoft YaHei" charset="0"/>
+                        <a:ea typeface="Microsoft YaHei" charset="0"/>
+                        <a:cs typeface="Microsoft YaHei" charset="0"/>
+                      </a:endParaRPr>
+                    </a:p>
+                  </a:txBody>
+                  <a:tcPr marL="63500" marR="63500" marT="38100" marB="38100" anchor="ctr">
+                    <a:lnL w="9525" cap="flat" cmpd="sng" algn="ctr">
+                      <a:solidFill>
+                        <a:srgbClr val="E2E2E2"/>
+                      </a:solidFill>
+                      <a:prstDash val="solid"/>
+                      <a:round/>
+                      <a:headEnd type="none" w="med" len="med"/>
+                      <a:tailEnd type="none" w="med" len="med"/>
+                    </a:lnL>
+                    <a:lnR w="9525" cap="flat" cmpd="sng" algn="ctr">
+                      <a:solidFill>
+                        <a:srgbClr val="E2E2E2"/>
+                      </a:solidFill>
+                      <a:prstDash val="solid"/>
+                      <a:round/>
+                      <a:headEnd type="none" w="med" len="med"/>
+                      <a:tailEnd type="none" w="med" len="med"/>
+                    </a:lnR>
+                    <a:lnT w="9525" cap="flat" cmpd="sng" algn="ctr">
+                      <a:solidFill>
+                        <a:srgbClr val="E2E2E2"/>
+                      </a:solidFill>
+                      <a:prstDash val="solid"/>
+                      <a:round/>
+                      <a:headEnd type="none" w="med" len="med"/>
+                      <a:tailEnd type="none" w="med" len="med"/>
+                    </a:lnT>
+                    <a:lnB w="9525" cap="flat" cmpd="sng" algn="ctr">
+                      <a:solidFill>
+                        <a:srgbClr val="E2E2E2"/>
+                      </a:solidFill>
+                      <a:prstDash val="solid"/>
+                      <a:round/>
+                      <a:headEnd type="none" w="med" len="med"/>
+                      <a:tailEnd type="none" w="med" len="med"/>
+                    </a:lnB>
+                    <a:solidFill>
+                      <a:srgbClr val="F7F3F4"/>
+                    </a:solidFill>
+                  </a:tcPr>
+                </a:tc>
+                <a:tc>
+                  <a:txBody>
+                    <a:bodyPr/>
+                    <a:lstStyle/>
+                    <a:p>
+                      <a:pPr algn="l" indent="0" marL="0">
+                        <a:buNone/>
+                      </a:pPr>
+                      <a:r>
+                        <a:rPr lang="en-US" sz="1400" dirty="0">
+                          <a:solidFill>
+                            <a:srgbClr val="23272E"/>
+                          </a:solidFill>
+                          <a:latin typeface="Microsoft YaHei" pitchFamily="34" charset="0"/>
+                          <a:ea typeface="Microsoft YaHei" pitchFamily="34" charset="-122"/>
+                          <a:cs typeface="Microsoft YaHei" pitchFamily="34" charset="-120"/>
+                        </a:rPr>
+                        <a:t>功效测评/成分科普/场景解决方案</a:t>
+                      </a:r>
+                      <a:endParaRPr lang="en-US" sz="1400" dirty="0">
+                        <a:latin typeface="Microsoft YaHei" charset="0"/>
+                        <a:ea typeface="Microsoft YaHei" charset="0"/>
+                        <a:cs typeface="Microsoft YaHei" charset="0"/>
+                      </a:endParaRPr>
+                    </a:p>
+                  </a:txBody>
+                  <a:tcPr marL="63500" marR="63500" marT="38100" marB="38100" anchor="ctr">
+                    <a:lnL w="9525" cap="flat" cmpd="sng" algn="ctr">
+                      <a:solidFill>
+                        <a:srgbClr val="E2E2E2"/>
+                      </a:solidFill>
+                      <a:prstDash val="solid"/>
+                      <a:round/>
+                      <a:headEnd type="none" w="med" len="med"/>
+                      <a:tailEnd type="none" w="med" len="med"/>
+                    </a:lnL>
+                    <a:lnR w="9525" cap="flat" cmpd="sng" algn="ctr">
+                      <a:solidFill>
+                        <a:srgbClr val="E2E2E2"/>
+                      </a:solidFill>
+                      <a:prstDash val="solid"/>
+                      <a:round/>
+                      <a:headEnd type="none" w="med" len="med"/>
+                      <a:tailEnd type="none" w="med" len="med"/>
+                    </a:lnR>
+                    <a:lnT w="9525" cap="flat" cmpd="sng" algn="ctr">
+                      <a:solidFill>
+                        <a:srgbClr val="E2E2E2"/>
+                      </a:solidFill>
+                      <a:prstDash val="solid"/>
+                      <a:round/>
+                      <a:headEnd type="none" w="med" len="med"/>
+                      <a:tailEnd type="none" w="med" len="med"/>
+                    </a:lnT>
+                    <a:lnB w="9525" cap="flat" cmpd="sng" algn="ctr">
+                      <a:solidFill>
+                        <a:srgbClr val="E2E2E2"/>
+                      </a:solidFill>
+                      <a:prstDash val="solid"/>
+                      <a:round/>
+                      <a:headEnd type="none" w="med" len="med"/>
+                      <a:tailEnd type="none" w="med" len="med"/>
+                    </a:lnB>
+                    <a:solidFill>
+                      <a:srgbClr val="F7F3F4"/>
+                    </a:solidFill>
+                  </a:tcPr>
+                </a:tc>
+              </a:tr>
+              <a:tr h="603504">
+                <a:tc>
+                  <a:txBody>
+                    <a:bodyPr/>
+                    <a:lstStyle/>
+                    <a:p>
+                      <a:pPr algn="ctr" indent="0" marL="0">
+                        <a:buNone/>
+                      </a:pPr>
+                      <a:r>
+                        <a:rPr lang="en-US" sz="1400" dirty="0">
+                          <a:solidFill>
+                            <a:srgbClr val="23272E"/>
+                          </a:solidFill>
+                          <a:latin typeface="Microsoft YaHei" pitchFamily="34" charset="0"/>
+                          <a:ea typeface="Microsoft YaHei" pitchFamily="34" charset="-122"/>
+                          <a:cs typeface="Microsoft YaHei" pitchFamily="34" charset="-120"/>
+                        </a:rPr>
+                        <a:t>场景</a:t>
+                      </a:r>
+                      <a:endParaRPr lang="en-US" sz="1400" dirty="0">
                         <a:latin typeface="Microsoft YaHei" charset="0"/>
                         <a:ea typeface="Microsoft YaHei" charset="0"/>
                         <a:cs typeface="Microsoft YaHei" charset="0"/>
@@ -9944,7 +12880,7 @@
                         <a:buNone/>
                       </a:pPr>
                       <a:r>
-                        <a:rPr lang="en-US" sz="1500" dirty="0">
+                        <a:rPr lang="en-US" sz="1400" dirty="0">
                           <a:solidFill>
                             <a:srgbClr val="23272E"/>
                           </a:solidFill>
@@ -9952,9 +12888,9 @@
                           <a:ea typeface="Microsoft YaHei" pitchFamily="34" charset="-122"/>
                           <a:cs typeface="Microsoft YaHei" pitchFamily="34" charset="-120"/>
                         </a:rPr>
-                        <a:t>真人体感·信任·铺量主力</a:t>
+                        <a:t>在日本药妆店/旅游购物</a:t>
                       </a:r>
-                      <a:endParaRPr lang="en-US" sz="1500" dirty="0">
+                      <a:endParaRPr lang="en-US" sz="1400" dirty="0">
                         <a:latin typeface="Microsoft YaHei" charset="0"/>
                         <a:ea typeface="Microsoft YaHei" charset="0"/>
                         <a:cs typeface="Microsoft YaHei" charset="0"/>
@@ -10003,8 +12939,76 @@
                     </a:solidFill>
                   </a:tcPr>
                 </a:tc>
+                <a:tc>
+                  <a:txBody>
+                    <a:bodyPr/>
+                    <a:lstStyle/>
+                    <a:p>
+                      <a:pPr algn="l" indent="0" marL="0">
+                        <a:buNone/>
+                      </a:pPr>
+                      <a:r>
+                        <a:rPr lang="en-US" sz="1400" dirty="0">
+                          <a:solidFill>
+                            <a:srgbClr val="23272E"/>
+                          </a:solidFill>
+                          <a:latin typeface="Microsoft YaHei" pitchFamily="34" charset="0"/>
+                          <a:ea typeface="Microsoft YaHei" pitchFamily="34" charset="-122"/>
+                          <a:cs typeface="Microsoft YaHei" pitchFamily="34" charset="-120"/>
+                        </a:rPr>
+                        <a:t>熬夜急救/妆前/换季/日常护肤</a:t>
+                      </a:r>
+                      <a:endParaRPr lang="en-US" sz="1400" dirty="0">
+                        <a:latin typeface="Microsoft YaHei" charset="0"/>
+                        <a:ea typeface="Microsoft YaHei" charset="0"/>
+                        <a:cs typeface="Microsoft YaHei" charset="0"/>
+                      </a:endParaRPr>
+                    </a:p>
+                  </a:txBody>
+                  <a:tcPr marL="63500" marR="63500" marT="38100" marB="38100" anchor="ctr">
+                    <a:lnL w="9525" cap="flat" cmpd="sng" algn="ctr">
+                      <a:solidFill>
+                        <a:srgbClr val="E2E2E2"/>
+                      </a:solidFill>
+                      <a:prstDash val="solid"/>
+                      <a:round/>
+                      <a:headEnd type="none" w="med" len="med"/>
+                      <a:tailEnd type="none" w="med" len="med"/>
+                    </a:lnL>
+                    <a:lnR w="9525" cap="flat" cmpd="sng" algn="ctr">
+                      <a:solidFill>
+                        <a:srgbClr val="E2E2E2"/>
+                      </a:solidFill>
+                      <a:prstDash val="solid"/>
+                      <a:round/>
+                      <a:headEnd type="none" w="med" len="med"/>
+                      <a:tailEnd type="none" w="med" len="med"/>
+                    </a:lnR>
+                    <a:lnT w="9525" cap="flat" cmpd="sng" algn="ctr">
+                      <a:solidFill>
+                        <a:srgbClr val="E2E2E2"/>
+                      </a:solidFill>
+                      <a:prstDash val="solid"/>
+                      <a:round/>
+                      <a:headEnd type="none" w="med" len="med"/>
+                      <a:tailEnd type="none" w="med" len="med"/>
+                    </a:lnT>
+                    <a:lnB w="9525" cap="flat" cmpd="sng" algn="ctr">
+                      <a:solidFill>
+                        <a:srgbClr val="E2E2E2"/>
+                      </a:solidFill>
+                      <a:prstDash val="solid"/>
+                      <a:round/>
+                      <a:headEnd type="none" w="med" len="med"/>
+                      <a:tailEnd type="none" w="med" len="med"/>
+                    </a:lnB>
+                    <a:solidFill>
+                      <a:srgbClr val="FFFFFF"/>
+                    </a:solidFill>
+                  </a:tcPr>
+                </a:tc>
               </a:tr>
-              <a:tr h="658368">
+              <a:tr h="603504">
                 <a:tc>
                   <a:txBody>
                     <a:bodyPr/>
@@ -10014,7 +13018,7 @@
                         <a:buNone/>
                       </a:pPr>
                       <a:r>
-                        <a:rPr lang="en-US" sz="1500" dirty="0">
+                        <a:rPr lang="en-US" sz="1400" dirty="0">
                           <a:solidFill>
                             <a:srgbClr val="23272E"/>
                           </a:solidFill>
@@ -10022,9 +13026,9 @@
                           <a:ea typeface="Microsoft YaHei" pitchFamily="34" charset="-122"/>
                           <a:cs typeface="Microsoft YaHei" pitchFamily="34" charset="-120"/>
                         </a:rPr>
-                        <a:t>C·场景种草</a:t>
+                        <a:t>卖点</a:t>
                       </a:r>
-                      <a:endParaRPr lang="en-US" sz="1500" dirty="0">
+                      <a:endParaRPr lang="en-US" sz="1400" dirty="0">
                         <a:latin typeface="Microsoft YaHei" charset="0"/>
                         <a:ea typeface="Microsoft YaHei" charset="0"/>
                         <a:cs typeface="Microsoft YaHei" charset="0"/>
@@ -10082,7 +13086,7 @@
                         <a:buNone/>
                       </a:pPr>
                       <a:r>
-                        <a:rPr lang="en-US" sz="1500" dirty="0">
+                        <a:rPr lang="en-US" sz="1400" dirty="0">
                           <a:solidFill>
                             <a:srgbClr val="23272E"/>
                           </a:solidFill>
@@ -10090,9 +13094,9 @@
                           <a:ea typeface="Microsoft YaHei" pitchFamily="34" charset="-122"/>
                           <a:cs typeface="Microsoft YaHei" pitchFamily="34" charset="-120"/>
                         </a:rPr>
-                        <a:t>9</a:t>
+                        <a:t>便宜/日本买得到</a:t>
                       </a:r>
-                      <a:endParaRPr lang="en-US" sz="1500" dirty="0">
+                      <a:endParaRPr lang="en-US" sz="1400" dirty="0">
                         <a:latin typeface="Microsoft YaHei" charset="0"/>
                         <a:ea typeface="Microsoft YaHei" charset="0"/>
                         <a:cs typeface="Microsoft YaHei" charset="0"/>
@@ -10150,7 +13154,7 @@
                         <a:buNone/>
                       </a:pPr>
                       <a:r>
-                        <a:rPr lang="en-US" sz="1500" dirty="0">
+                        <a:rPr lang="en-US" sz="1400" dirty="0">
                           <a:solidFill>
                             <a:srgbClr val="23272E"/>
                           </a:solidFill>
@@ -10158,9 +13162,9 @@
                           <a:ea typeface="Microsoft YaHei" pitchFamily="34" charset="-122"/>
                           <a:cs typeface="Microsoft YaHei" pitchFamily="34" charset="-120"/>
                         </a:rPr>
-                        <a:t>KOC/腰部</a:t>
+                        <a:t>高浓度VC/提亮/毛孔/进阶功效</a:t>
                       </a:r>
-                      <a:endParaRPr lang="en-US" sz="1500" dirty="0">
+                      <a:endParaRPr lang="en-US" sz="1400" dirty="0">
                         <a:latin typeface="Microsoft YaHei" charset="0"/>
                         <a:ea typeface="Microsoft YaHei" charset="0"/>
                         <a:cs typeface="Microsoft YaHei" charset="0"/>
@@ -10209,76 +13213,8 @@
                     </a:solidFill>
                   </a:tcPr>
                 </a:tc>
-                <a:tc>
-                  <a:txBody>
-                    <a:bodyPr/>
-                    <a:lstStyle/>
-                    <a:p>
-                      <a:pPr algn="l" indent="0" marL="0">
-                        <a:buNone/>
-                      </a:pPr>
-                      <a:r>
-                        <a:rPr lang="en-US" sz="1500" dirty="0">
-                          <a:solidFill>
-                            <a:srgbClr val="23272E"/>
-                          </a:solidFill>
-                          <a:latin typeface="Microsoft YaHei" pitchFamily="34" charset="0"/>
-                          <a:ea typeface="Microsoft YaHei" pitchFamily="34" charset="-122"/>
-                          <a:cs typeface="Microsoft YaHei" pitchFamily="34" charset="-120"/>
-                        </a:rPr>
-                        <a:t>熬夜/妆前/换季 · 含视频(洼地)</a:t>
-                      </a:r>
-                      <a:endParaRPr lang="en-US" sz="1500" dirty="0">
-                        <a:latin typeface="Microsoft YaHei" charset="0"/>
-                        <a:ea typeface="Microsoft YaHei" charset="0"/>
-                        <a:cs typeface="Microsoft YaHei" charset="0"/>
-                      </a:endParaRPr>
-                    </a:p>
-                  </a:txBody>
-                  <a:tcPr marL="63500" marR="63500" marT="38100" marB="38100" anchor="ctr">
-                    <a:lnL w="9525" cap="flat" cmpd="sng" algn="ctr">
-                      <a:solidFill>
-                        <a:srgbClr val="E2E2E2"/>
-                      </a:solidFill>
-                      <a:prstDash val="solid"/>
-                      <a:round/>
-                      <a:headEnd type="none" w="med" len="med"/>
-                      <a:tailEnd type="none" w="med" len="med"/>
-                    </a:lnL>
-                    <a:lnR w="9525" cap="flat" cmpd="sng" algn="ctr">
-                      <a:solidFill>
-                        <a:srgbClr val="E2E2E2"/>
-                      </a:solidFill>
-                      <a:prstDash val="solid"/>
-                      <a:round/>
-                      <a:headEnd type="none" w="med" len="med"/>
-                      <a:tailEnd type="none" w="med" len="med"/>
-                    </a:lnR>
-                    <a:lnT w="9525" cap="flat" cmpd="sng" algn="ctr">
-                      <a:solidFill>
-                        <a:srgbClr val="E2E2E2"/>
-                      </a:solidFill>
-                      <a:prstDash val="solid"/>
-                      <a:round/>
-                      <a:headEnd type="none" w="med" len="med"/>
-                      <a:tailEnd type="none" w="med" len="med"/>
-                    </a:lnT>
-                    <a:lnB w="9525" cap="flat" cmpd="sng" algn="ctr">
-                      <a:solidFill>
-                        <a:srgbClr val="E2E2E2"/>
-                      </a:solidFill>
-                      <a:prstDash val="solid"/>
-                      <a:round/>
-                      <a:headEnd type="none" w="med" len="med"/>
-                      <a:tailEnd type="none" w="med" len="med"/>
-                    </a:lnB>
-                    <a:solidFill>
-                      <a:srgbClr val="F7F3F4"/>
-                    </a:solidFill>
-                  </a:tcPr>
-                </a:tc>
               </a:tr>
-              <a:tr h="658368">
+              <a:tr h="603504">
                 <a:tc>
                   <a:txBody>
                     <a:bodyPr/>
@@ -10288,7 +13224,7 @@
                         <a:buNone/>
                       </a:pPr>
                       <a:r>
-                        <a:rPr lang="en-US" sz="1500" dirty="0">
+                        <a:rPr lang="en-US" sz="1400" dirty="0">
                           <a:solidFill>
                             <a:srgbClr val="23272E"/>
                           </a:solidFill>
@@ -10296,9 +13232,9 @@
                           <a:ea typeface="Microsoft YaHei" pitchFamily="34" charset="-122"/>
                           <a:cs typeface="Microsoft YaHei" pitchFamily="34" charset="-120"/>
                         </a:rPr>
-                        <a:t>A·选购攻略/合集</a:t>
+                        <a:t>作用</a:t>
                       </a:r>
-                      <a:endParaRPr lang="en-US" sz="1500" dirty="0">
+                      <a:endParaRPr lang="en-US" sz="1400" dirty="0">
                         <a:latin typeface="Microsoft YaHei" charset="0"/>
                         <a:ea typeface="Microsoft YaHei" charset="0"/>
                         <a:cs typeface="Microsoft YaHei" charset="0"/>
@@ -10356,7 +13292,7 @@
                         <a:buNone/>
                       </a:pPr>
                       <a:r>
-                        <a:rPr lang="en-US" sz="1500" dirty="0">
+                        <a:rPr lang="en-US" sz="1400" dirty="0">
                           <a:solidFill>
                             <a:srgbClr val="23272E"/>
                           </a:solidFill>
@@ -10364,9 +13300,9 @@
                           <a:ea typeface="Microsoft YaHei" pitchFamily="34" charset="-122"/>
                           <a:cs typeface="Microsoft YaHei" pitchFamily="34" charset="-120"/>
                         </a:rPr>
-                        <a:t>8</a:t>
+                        <a:t>建认知·信任背书</a:t>
                       </a:r>
-                      <a:endParaRPr lang="en-US" sz="1500" dirty="0">
+                      <a:endParaRPr lang="en-US" sz="1400" dirty="0">
                         <a:latin typeface="Microsoft YaHei" charset="0"/>
                         <a:ea typeface="Microsoft YaHei" charset="0"/>
                         <a:cs typeface="Microsoft YaHei" charset="0"/>
@@ -10424,7 +13360,7 @@
                         <a:buNone/>
                       </a:pPr>
                       <a:r>
-                        <a:rPr lang="en-US" sz="1500" dirty="0">
+                        <a:rPr lang="en-US" sz="1400" dirty="0">
                           <a:solidFill>
                             <a:srgbClr val="23272E"/>
                           </a:solidFill>
@@ -10432,625 +13368,9 @@
                           <a:ea typeface="Microsoft YaHei" pitchFamily="34" charset="-122"/>
                           <a:cs typeface="Microsoft YaHei" pitchFamily="34" charset="-120"/>
                         </a:rPr>
-                        <a:t>腰部/头部</a:t>
+                        <a:t>建护肤价值·种草转化</a:t>
                       </a:r>
-                      <a:endParaRPr lang="en-US" sz="1500" dirty="0">
-                        <a:latin typeface="Microsoft YaHei" charset="0"/>
-                        <a:ea typeface="Microsoft YaHei" charset="0"/>
-                        <a:cs typeface="Microsoft YaHei" charset="0"/>
-                      </a:endParaRPr>
-                    </a:p>
-                  </a:txBody>
-                  <a:tcPr marL="63500" marR="63500" marT="38100" marB="38100" anchor="ctr">
-                    <a:lnL w="9525" cap="flat" cmpd="sng" algn="ctr">
-                      <a:solidFill>
-                        <a:srgbClr val="E2E2E2"/>
-                      </a:solidFill>
-                      <a:prstDash val="solid"/>
-                      <a:round/>
-                      <a:headEnd type="none" w="med" len="med"/>
-                      <a:tailEnd type="none" w="med" len="med"/>
-                    </a:lnL>
-                    <a:lnR w="9525" cap="flat" cmpd="sng" algn="ctr">
-                      <a:solidFill>
-                        <a:srgbClr val="E2E2E2"/>
-                      </a:solidFill>
-                      <a:prstDash val="solid"/>
-                      <a:round/>
-                      <a:headEnd type="none" w="med" len="med"/>
-                      <a:tailEnd type="none" w="med" len="med"/>
-                    </a:lnR>
-                    <a:lnT w="9525" cap="flat" cmpd="sng" algn="ctr">
-                      <a:solidFill>
-                        <a:srgbClr val="E2E2E2"/>
-                      </a:solidFill>
-                      <a:prstDash val="solid"/>
-                      <a:round/>
-                      <a:headEnd type="none" w="med" len="med"/>
-                      <a:tailEnd type="none" w="med" len="med"/>
-                    </a:lnT>
-                    <a:lnB w="9525" cap="flat" cmpd="sng" algn="ctr">
-                      <a:solidFill>
-                        <a:srgbClr val="E2E2E2"/>
-                      </a:solidFill>
-                      <a:prstDash val="solid"/>
-                      <a:round/>
-                      <a:headEnd type="none" w="med" len="med"/>
-                      <a:tailEnd type="none" w="med" len="med"/>
-                    </a:lnB>
-                    <a:solidFill>
-                      <a:srgbClr val="FFFFFF"/>
-                    </a:solidFill>
-                  </a:tcPr>
-                </a:tc>
-                <a:tc>
-                  <a:txBody>
-                    <a:bodyPr/>
-                    <a:lstStyle/>
-                    <a:p>
-                      <a:pPr algn="l" indent="0" marL="0">
-                        <a:buNone/>
-                      </a:pPr>
-                      <a:r>
-                        <a:rPr lang="en-US" sz="1500" dirty="0">
-                          <a:solidFill>
-                            <a:srgbClr val="23272E"/>
-                          </a:solidFill>
-                          <a:latin typeface="Microsoft YaHei" pitchFamily="34" charset="0"/>
-                          <a:ea typeface="Microsoft YaHei" pitchFamily="34" charset="-122"/>
-                          <a:cs typeface="Microsoft YaHei" pitchFamily="34" charset="-120"/>
-                        </a:rPr>
-                        <a:t>爆文引擎·7+图·按肤质选</a:t>
-                      </a:r>
-                      <a:endParaRPr lang="en-US" sz="1500" dirty="0">
-                        <a:latin typeface="Microsoft YaHei" charset="0"/>
-                        <a:ea typeface="Microsoft YaHei" charset="0"/>
-                        <a:cs typeface="Microsoft YaHei" charset="0"/>
-                      </a:endParaRPr>
-                    </a:p>
-                  </a:txBody>
-                  <a:tcPr marL="63500" marR="63500" marT="38100" marB="38100" anchor="ctr">
-                    <a:lnL w="9525" cap="flat" cmpd="sng" algn="ctr">
-                      <a:solidFill>
-                        <a:srgbClr val="E2E2E2"/>
-                      </a:solidFill>
-                      <a:prstDash val="solid"/>
-                      <a:round/>
-                      <a:headEnd type="none" w="med" len="med"/>
-                      <a:tailEnd type="none" w="med" len="med"/>
-                    </a:lnL>
-                    <a:lnR w="9525" cap="flat" cmpd="sng" algn="ctr">
-                      <a:solidFill>
-                        <a:srgbClr val="E2E2E2"/>
-                      </a:solidFill>
-                      <a:prstDash val="solid"/>
-                      <a:round/>
-                      <a:headEnd type="none" w="med" len="med"/>
-                      <a:tailEnd type="none" w="med" len="med"/>
-                    </a:lnR>
-                    <a:lnT w="9525" cap="flat" cmpd="sng" algn="ctr">
-                      <a:solidFill>
-                        <a:srgbClr val="E2E2E2"/>
-                      </a:solidFill>
-                      <a:prstDash val="solid"/>
-                      <a:round/>
-                      <a:headEnd type="none" w="med" len="med"/>
-                      <a:tailEnd type="none" w="med" len="med"/>
-                    </a:lnT>
-                    <a:lnB w="9525" cap="flat" cmpd="sng" algn="ctr">
-                      <a:solidFill>
-                        <a:srgbClr val="E2E2E2"/>
-                      </a:solidFill>
-                      <a:prstDash val="solid"/>
-                      <a:round/>
-                      <a:headEnd type="none" w="med" len="med"/>
-                      <a:tailEnd type="none" w="med" len="med"/>
-                    </a:lnB>
-                    <a:solidFill>
-                      <a:srgbClr val="FFFFFF"/>
-                    </a:solidFill>
-                  </a:tcPr>
-                </a:tc>
-              </a:tr>
-              <a:tr h="658368">
-                <a:tc>
-                  <a:txBody>
-                    <a:bodyPr/>
-                    <a:lstStyle/>
-                    <a:p>
-                      <a:pPr algn="ctr" indent="0" marL="0">
-                        <a:buNone/>
-                      </a:pPr>
-                      <a:r>
-                        <a:rPr lang="en-US" sz="1500" dirty="0">
-                          <a:solidFill>
-                            <a:srgbClr val="23272E"/>
-                          </a:solidFill>
-                          <a:latin typeface="Microsoft YaHei" pitchFamily="34" charset="0"/>
-                          <a:ea typeface="Microsoft YaHei" pitchFamily="34" charset="-122"/>
-                          <a:cs typeface="Microsoft YaHei" pitchFamily="34" charset="-120"/>
-                        </a:rPr>
-                        <a:t>D·开箱vlog</a:t>
-                      </a:r>
-                      <a:endParaRPr lang="en-US" sz="1500" dirty="0">
-                        <a:latin typeface="Microsoft YaHei" charset="0"/>
-                        <a:ea typeface="Microsoft YaHei" charset="0"/>
-                        <a:cs typeface="Microsoft YaHei" charset="0"/>
-                      </a:endParaRPr>
-                    </a:p>
-                  </a:txBody>
-                  <a:tcPr marL="63500" marR="63500" marT="38100" marB="38100" anchor="ctr">
-                    <a:lnL w="9525" cap="flat" cmpd="sng" algn="ctr">
-                      <a:solidFill>
-                        <a:srgbClr val="E2E2E2"/>
-                      </a:solidFill>
-                      <a:prstDash val="solid"/>
-                      <a:round/>
-                      <a:headEnd type="none" w="med" len="med"/>
-                      <a:tailEnd type="none" w="med" len="med"/>
-                    </a:lnL>
-                    <a:lnR w="9525" cap="flat" cmpd="sng" algn="ctr">
-                      <a:solidFill>
-                        <a:srgbClr val="E2E2E2"/>
-                      </a:solidFill>
-                      <a:prstDash val="solid"/>
-                      <a:round/>
-                      <a:headEnd type="none" w="med" len="med"/>
-                      <a:tailEnd type="none" w="med" len="med"/>
-                    </a:lnR>
-                    <a:lnT w="9525" cap="flat" cmpd="sng" algn="ctr">
-                      <a:solidFill>
-                        <a:srgbClr val="E2E2E2"/>
-                      </a:solidFill>
-                      <a:prstDash val="solid"/>
-                      <a:round/>
-                      <a:headEnd type="none" w="med" len="med"/>
-                      <a:tailEnd type="none" w="med" len="med"/>
-                    </a:lnT>
-                    <a:lnB w="9525" cap="flat" cmpd="sng" algn="ctr">
-                      <a:solidFill>
-                        <a:srgbClr val="E2E2E2"/>
-                      </a:solidFill>
-                      <a:prstDash val="solid"/>
-                      <a:round/>
-                      <a:headEnd type="none" w="med" len="med"/>
-                      <a:tailEnd type="none" w="med" len="med"/>
-                    </a:lnB>
-                    <a:solidFill>
-                      <a:srgbClr val="F7F3F4"/>
-                    </a:solidFill>
-                  </a:tcPr>
-                </a:tc>
-                <a:tc>
-                  <a:txBody>
-                    <a:bodyPr/>
-                    <a:lstStyle/>
-                    <a:p>
-                      <a:pPr algn="l" indent="0" marL="0">
-                        <a:buNone/>
-                      </a:pPr>
-                      <a:r>
-                        <a:rPr lang="en-US" sz="1500" dirty="0">
-                          <a:solidFill>
-                            <a:srgbClr val="23272E"/>
-                          </a:solidFill>
-                          <a:latin typeface="Microsoft YaHei" pitchFamily="34" charset="0"/>
-                          <a:ea typeface="Microsoft YaHei" pitchFamily="34" charset="-122"/>
-                          <a:cs typeface="Microsoft YaHei" pitchFamily="34" charset="-120"/>
-                        </a:rPr>
-                        <a:t>5</a:t>
-                      </a:r>
-                      <a:endParaRPr lang="en-US" sz="1500" dirty="0">
-                        <a:latin typeface="Microsoft YaHei" charset="0"/>
-                        <a:ea typeface="Microsoft YaHei" charset="0"/>
-                        <a:cs typeface="Microsoft YaHei" charset="0"/>
-                      </a:endParaRPr>
-                    </a:p>
-                  </a:txBody>
-                  <a:tcPr marL="63500" marR="63500" marT="38100" marB="38100" anchor="ctr">
-                    <a:lnL w="9525" cap="flat" cmpd="sng" algn="ctr">
-                      <a:solidFill>
-                        <a:srgbClr val="E2E2E2"/>
-                      </a:solidFill>
-                      <a:prstDash val="solid"/>
-                      <a:round/>
-                      <a:headEnd type="none" w="med" len="med"/>
-                      <a:tailEnd type="none" w="med" len="med"/>
-                    </a:lnL>
-                    <a:lnR w="9525" cap="flat" cmpd="sng" algn="ctr">
-                      <a:solidFill>
-                        <a:srgbClr val="E2E2E2"/>
-                      </a:solidFill>
-                      <a:prstDash val="solid"/>
-                      <a:round/>
-                      <a:headEnd type="none" w="med" len="med"/>
-                      <a:tailEnd type="none" w="med" len="med"/>
-                    </a:lnR>
-                    <a:lnT w="9525" cap="flat" cmpd="sng" algn="ctr">
-                      <a:solidFill>
-                        <a:srgbClr val="E2E2E2"/>
-                      </a:solidFill>
-                      <a:prstDash val="solid"/>
-                      <a:round/>
-                      <a:headEnd type="none" w="med" len="med"/>
-                      <a:tailEnd type="none" w="med" len="med"/>
-                    </a:lnT>
-                    <a:lnB w="9525" cap="flat" cmpd="sng" algn="ctr">
-                      <a:solidFill>
-                        <a:srgbClr val="E2E2E2"/>
-                      </a:solidFill>
-                      <a:prstDash val="solid"/>
-                      <a:round/>
-                      <a:headEnd type="none" w="med" len="med"/>
-                      <a:tailEnd type="none" w="med" len="med"/>
-                    </a:lnB>
-                    <a:solidFill>
-                      <a:srgbClr val="F7F3F4"/>
-                    </a:solidFill>
-                  </a:tcPr>
-                </a:tc>
-                <a:tc>
-                  <a:txBody>
-                    <a:bodyPr/>
-                    <a:lstStyle/>
-                    <a:p>
-                      <a:pPr algn="l" indent="0" marL="0">
-                        <a:buNone/>
-                      </a:pPr>
-                      <a:r>
-                        <a:rPr lang="en-US" sz="1500" dirty="0">
-                          <a:solidFill>
-                            <a:srgbClr val="23272E"/>
-                          </a:solidFill>
-                          <a:latin typeface="Microsoft YaHei" pitchFamily="34" charset="0"/>
-                          <a:ea typeface="Microsoft YaHei" pitchFamily="34" charset="-122"/>
-                          <a:cs typeface="Microsoft YaHei" pitchFamily="34" charset="-120"/>
-                        </a:rPr>
-                        <a:t>KOC</a:t>
-                      </a:r>
-                      <a:endParaRPr lang="en-US" sz="1500" dirty="0">
-                        <a:latin typeface="Microsoft YaHei" charset="0"/>
-                        <a:ea typeface="Microsoft YaHei" charset="0"/>
-                        <a:cs typeface="Microsoft YaHei" charset="0"/>
-                      </a:endParaRPr>
-                    </a:p>
-                  </a:txBody>
-                  <a:tcPr marL="63500" marR="63500" marT="38100" marB="38100" anchor="ctr">
-                    <a:lnL w="9525" cap="flat" cmpd="sng" algn="ctr">
-                      <a:solidFill>
-                        <a:srgbClr val="E2E2E2"/>
-                      </a:solidFill>
-                      <a:prstDash val="solid"/>
-                      <a:round/>
-                      <a:headEnd type="none" w="med" len="med"/>
-                      <a:tailEnd type="none" w="med" len="med"/>
-                    </a:lnL>
-                    <a:lnR w="9525" cap="flat" cmpd="sng" algn="ctr">
-                      <a:solidFill>
-                        <a:srgbClr val="E2E2E2"/>
-                      </a:solidFill>
-                      <a:prstDash val="solid"/>
-                      <a:round/>
-                      <a:headEnd type="none" w="med" len="med"/>
-                      <a:tailEnd type="none" w="med" len="med"/>
-                    </a:lnR>
-                    <a:lnT w="9525" cap="flat" cmpd="sng" algn="ctr">
-                      <a:solidFill>
-                        <a:srgbClr val="E2E2E2"/>
-                      </a:solidFill>
-                      <a:prstDash val="solid"/>
-                      <a:round/>
-                      <a:headEnd type="none" w="med" len="med"/>
-                      <a:tailEnd type="none" w="med" len="med"/>
-                    </a:lnT>
-                    <a:lnB w="9525" cap="flat" cmpd="sng" algn="ctr">
-                      <a:solidFill>
-                        <a:srgbClr val="E2E2E2"/>
-                      </a:solidFill>
-                      <a:prstDash val="solid"/>
-                      <a:round/>
-                      <a:headEnd type="none" w="med" len="med"/>
-                      <a:tailEnd type="none" w="med" len="med"/>
-                    </a:lnB>
-                    <a:solidFill>
-                      <a:srgbClr val="F7F3F4"/>
-                    </a:solidFill>
-                  </a:tcPr>
-                </a:tc>
-                <a:tc>
-                  <a:txBody>
-                    <a:bodyPr/>
-                    <a:lstStyle/>
-                    <a:p>
-                      <a:pPr algn="l" indent="0" marL="0">
-                        <a:buNone/>
-                      </a:pPr>
-                      <a:r>
-                        <a:rPr lang="en-US" sz="1500" dirty="0">
-                          <a:solidFill>
-                            <a:srgbClr val="23272E"/>
-                          </a:solidFill>
-                          <a:latin typeface="Microsoft YaHei" pitchFamily="34" charset="0"/>
-                          <a:ea typeface="Microsoft YaHei" pitchFamily="34" charset="-122"/>
-                          <a:cs typeface="Microsoft YaHei" pitchFamily="34" charset="-120"/>
-                        </a:rPr>
-                        <a:t>日本好物/药妆店场景</a:t>
-                      </a:r>
-                      <a:endParaRPr lang="en-US" sz="1500" dirty="0">
-                        <a:latin typeface="Microsoft YaHei" charset="0"/>
-                        <a:ea typeface="Microsoft YaHei" charset="0"/>
-                        <a:cs typeface="Microsoft YaHei" charset="0"/>
-                      </a:endParaRPr>
-                    </a:p>
-                  </a:txBody>
-                  <a:tcPr marL="63500" marR="63500" marT="38100" marB="38100" anchor="ctr">
-                    <a:lnL w="9525" cap="flat" cmpd="sng" algn="ctr">
-                      <a:solidFill>
-                        <a:srgbClr val="E2E2E2"/>
-                      </a:solidFill>
-                      <a:prstDash val="solid"/>
-                      <a:round/>
-                      <a:headEnd type="none" w="med" len="med"/>
-                      <a:tailEnd type="none" w="med" len="med"/>
-                    </a:lnL>
-                    <a:lnR w="9525" cap="flat" cmpd="sng" algn="ctr">
-                      <a:solidFill>
-                        <a:srgbClr val="E2E2E2"/>
-                      </a:solidFill>
-                      <a:prstDash val="solid"/>
-                      <a:round/>
-                      <a:headEnd type="none" w="med" len="med"/>
-                      <a:tailEnd type="none" w="med" len="med"/>
-                    </a:lnR>
-                    <a:lnT w="9525" cap="flat" cmpd="sng" algn="ctr">
-                      <a:solidFill>
-                        <a:srgbClr val="E2E2E2"/>
-                      </a:solidFill>
-                      <a:prstDash val="solid"/>
-                      <a:round/>
-                      <a:headEnd type="none" w="med" len="med"/>
-                      <a:tailEnd type="none" w="med" len="med"/>
-                    </a:lnT>
-                    <a:lnB w="9525" cap="flat" cmpd="sng" algn="ctr">
-                      <a:solidFill>
-                        <a:srgbClr val="E2E2E2"/>
-                      </a:solidFill>
-                      <a:prstDash val="solid"/>
-                      <a:round/>
-                      <a:headEnd type="none" w="med" len="med"/>
-                      <a:tailEnd type="none" w="med" len="med"/>
-                    </a:lnB>
-                    <a:solidFill>
-                      <a:srgbClr val="F7F3F4"/>
-                    </a:solidFill>
-                  </a:tcPr>
-                </a:tc>
-              </a:tr>
-              <a:tr h="658368">
-                <a:tc>
-                  <a:txBody>
-                    <a:bodyPr/>
-                    <a:lstStyle/>
-                    <a:p>
-                      <a:pPr algn="ctr" indent="0" marL="0">
-                        <a:buNone/>
-                      </a:pPr>
-                      <a:r>
-                        <a:rPr lang="en-US" sz="1500" dirty="0">
-                          <a:solidFill>
-                            <a:srgbClr val="23272E"/>
-                          </a:solidFill>
-                          <a:latin typeface="Microsoft YaHei" pitchFamily="34" charset="0"/>
-                          <a:ea typeface="Microsoft YaHei" pitchFamily="34" charset="-122"/>
-                          <a:cs typeface="Microsoft YaHei" pitchFamily="34" charset="-120"/>
-                        </a:rPr>
-                        <a:t>E·比价/囤货</a:t>
-                      </a:r>
-                      <a:endParaRPr lang="en-US" sz="1500" dirty="0">
-                        <a:latin typeface="Microsoft YaHei" charset="0"/>
-                        <a:ea typeface="Microsoft YaHei" charset="0"/>
-                        <a:cs typeface="Microsoft YaHei" charset="0"/>
-                      </a:endParaRPr>
-                    </a:p>
-                  </a:txBody>
-                  <a:tcPr marL="63500" marR="63500" marT="38100" marB="38100" anchor="ctr">
-                    <a:lnL w="9525" cap="flat" cmpd="sng" algn="ctr">
-                      <a:solidFill>
-                        <a:srgbClr val="E2E2E2"/>
-                      </a:solidFill>
-                      <a:prstDash val="solid"/>
-                      <a:round/>
-                      <a:headEnd type="none" w="med" len="med"/>
-                      <a:tailEnd type="none" w="med" len="med"/>
-                    </a:lnL>
-                    <a:lnR w="9525" cap="flat" cmpd="sng" algn="ctr">
-                      <a:solidFill>
-                        <a:srgbClr val="E2E2E2"/>
-                      </a:solidFill>
-                      <a:prstDash val="solid"/>
-                      <a:round/>
-                      <a:headEnd type="none" w="med" len="med"/>
-                      <a:tailEnd type="none" w="med" len="med"/>
-                    </a:lnR>
-                    <a:lnT w="9525" cap="flat" cmpd="sng" algn="ctr">
-                      <a:solidFill>
-                        <a:srgbClr val="E2E2E2"/>
-                      </a:solidFill>
-                      <a:prstDash val="solid"/>
-                      <a:round/>
-                      <a:headEnd type="none" w="med" len="med"/>
-                      <a:tailEnd type="none" w="med" len="med"/>
-                    </a:lnT>
-                    <a:lnB w="9525" cap="flat" cmpd="sng" algn="ctr">
-                      <a:solidFill>
-                        <a:srgbClr val="E2E2E2"/>
-                      </a:solidFill>
-                      <a:prstDash val="solid"/>
-                      <a:round/>
-                      <a:headEnd type="none" w="med" len="med"/>
-                      <a:tailEnd type="none" w="med" len="med"/>
-                    </a:lnB>
-                    <a:solidFill>
-                      <a:srgbClr val="FFFFFF"/>
-                    </a:solidFill>
-                  </a:tcPr>
-                </a:tc>
-                <a:tc>
-                  <a:txBody>
-                    <a:bodyPr/>
-                    <a:lstStyle/>
-                    <a:p>
-                      <a:pPr algn="l" indent="0" marL="0">
-                        <a:buNone/>
-                      </a:pPr>
-                      <a:r>
-                        <a:rPr lang="en-US" sz="1500" dirty="0">
-                          <a:solidFill>
-                            <a:srgbClr val="23272E"/>
-                          </a:solidFill>
-                          <a:latin typeface="Microsoft YaHei" pitchFamily="34" charset="0"/>
-                          <a:ea typeface="Microsoft YaHei" pitchFamily="34" charset="-122"/>
-                          <a:cs typeface="Microsoft YaHei" pitchFamily="34" charset="-120"/>
-                        </a:rPr>
-                        <a:t>5</a:t>
-                      </a:r>
-                      <a:endParaRPr lang="en-US" sz="1500" dirty="0">
-                        <a:latin typeface="Microsoft YaHei" charset="0"/>
-                        <a:ea typeface="Microsoft YaHei" charset="0"/>
-                        <a:cs typeface="Microsoft YaHei" charset="0"/>
-                      </a:endParaRPr>
-                    </a:p>
-                  </a:txBody>
-                  <a:tcPr marL="63500" marR="63500" marT="38100" marB="38100" anchor="ctr">
-                    <a:lnL w="9525" cap="flat" cmpd="sng" algn="ctr">
-                      <a:solidFill>
-                        <a:srgbClr val="E2E2E2"/>
-                      </a:solidFill>
-                      <a:prstDash val="solid"/>
-                      <a:round/>
-                      <a:headEnd type="none" w="med" len="med"/>
-                      <a:tailEnd type="none" w="med" len="med"/>
-                    </a:lnL>
-                    <a:lnR w="9525" cap="flat" cmpd="sng" algn="ctr">
-                      <a:solidFill>
-                        <a:srgbClr val="E2E2E2"/>
-                      </a:solidFill>
-                      <a:prstDash val="solid"/>
-                      <a:round/>
-                      <a:headEnd type="none" w="med" len="med"/>
-                      <a:tailEnd type="none" w="med" len="med"/>
-                    </a:lnR>
-                    <a:lnT w="9525" cap="flat" cmpd="sng" algn="ctr">
-                      <a:solidFill>
-                        <a:srgbClr val="E2E2E2"/>
-                      </a:solidFill>
-                      <a:prstDash val="solid"/>
-                      <a:round/>
-                      <a:headEnd type="none" w="med" len="med"/>
-                      <a:tailEnd type="none" w="med" len="med"/>
-                    </a:lnT>
-                    <a:lnB w="9525" cap="flat" cmpd="sng" algn="ctr">
-                      <a:solidFill>
-                        <a:srgbClr val="E2E2E2"/>
-                      </a:solidFill>
-                      <a:prstDash val="solid"/>
-                      <a:round/>
-                      <a:headEnd type="none" w="med" len="med"/>
-                      <a:tailEnd type="none" w="med" len="med"/>
-                    </a:lnB>
-                    <a:solidFill>
-                      <a:srgbClr val="FFFFFF"/>
-                    </a:solidFill>
-                  </a:tcPr>
-                </a:tc>
-                <a:tc>
-                  <a:txBody>
-                    <a:bodyPr/>
-                    <a:lstStyle/>
-                    <a:p>
-                      <a:pPr algn="l" indent="0" marL="0">
-                        <a:buNone/>
-                      </a:pPr>
-                      <a:r>
-                        <a:rPr lang="en-US" sz="1500" dirty="0">
-                          <a:solidFill>
-                            <a:srgbClr val="23272E"/>
-                          </a:solidFill>
-                          <a:latin typeface="Microsoft YaHei" pitchFamily="34" charset="0"/>
-                          <a:ea typeface="Microsoft YaHei" pitchFamily="34" charset="-122"/>
-                          <a:cs typeface="Microsoft YaHei" pitchFamily="34" charset="-120"/>
-                        </a:rPr>
-                        <a:t>KOC</a:t>
-                      </a:r>
-                      <a:endParaRPr lang="en-US" sz="1500" dirty="0">
-                        <a:latin typeface="Microsoft YaHei" charset="0"/>
-                        <a:ea typeface="Microsoft YaHei" charset="0"/>
-                        <a:cs typeface="Microsoft YaHei" charset="0"/>
-                      </a:endParaRPr>
-                    </a:p>
-                  </a:txBody>
-                  <a:tcPr marL="63500" marR="63500" marT="38100" marB="38100" anchor="ctr">
-                    <a:lnL w="9525" cap="flat" cmpd="sng" algn="ctr">
-                      <a:solidFill>
-                        <a:srgbClr val="E2E2E2"/>
-                      </a:solidFill>
-                      <a:prstDash val="solid"/>
-                      <a:round/>
-                      <a:headEnd type="none" w="med" len="med"/>
-                      <a:tailEnd type="none" w="med" len="med"/>
-                    </a:lnL>
-                    <a:lnR w="9525" cap="flat" cmpd="sng" algn="ctr">
-                      <a:solidFill>
-                        <a:srgbClr val="E2E2E2"/>
-                      </a:solidFill>
-                      <a:prstDash val="solid"/>
-                      <a:round/>
-                      <a:headEnd type="none" w="med" len="med"/>
-                      <a:tailEnd type="none" w="med" len="med"/>
-                    </a:lnR>
-                    <a:lnT w="9525" cap="flat" cmpd="sng" algn="ctr">
-                      <a:solidFill>
-                        <a:srgbClr val="E2E2E2"/>
-                      </a:solidFill>
-                      <a:prstDash val="solid"/>
-                      <a:round/>
-                      <a:headEnd type="none" w="med" len="med"/>
-                      <a:tailEnd type="none" w="med" len="med"/>
-                    </a:lnT>
-                    <a:lnB w="9525" cap="flat" cmpd="sng" algn="ctr">
-                      <a:solidFill>
-                        <a:srgbClr val="E2E2E2"/>
-                      </a:solidFill>
-                      <a:prstDash val="solid"/>
-                      <a:round/>
-                      <a:headEnd type="none" w="med" len="med"/>
-                      <a:tailEnd type="none" w="med" len="med"/>
-                    </a:lnB>
-                    <a:solidFill>
-                      <a:srgbClr val="FFFFFF"/>
-                    </a:solidFill>
-                  </a:tcPr>
-                </a:tc>
-                <a:tc>
-                  <a:txBody>
-                    <a:bodyPr/>
-                    <a:lstStyle/>
-                    <a:p>
-                      <a:pPr algn="l" indent="0" marL="0">
-                        <a:buNone/>
-                      </a:pPr>
-                      <a:r>
-                        <a:rPr lang="en-US" sz="1500" dirty="0">
-                          <a:solidFill>
-                            <a:srgbClr val="23272E"/>
-                          </a:solidFill>
-                          <a:latin typeface="Microsoft YaHei" pitchFamily="34" charset="0"/>
-                          <a:ea typeface="Microsoft YaHei" pitchFamily="34" charset="-122"/>
-                          <a:cs typeface="Microsoft YaHei" pitchFamily="34" charset="-120"/>
-                        </a:rPr>
-                        <a:t>组合装直播价·囤货划算</a:t>
-                      </a:r>
-                      <a:endParaRPr lang="en-US" sz="1500" dirty="0">
+                      <a:endParaRPr lang="en-US" sz="1400" dirty="0">
                         <a:latin typeface="Microsoft YaHei" charset="0"/>
                         <a:ea typeface="Microsoft YaHei" charset="0"/>
                         <a:cs typeface="Microsoft YaHei" charset="0"/>
@@ -11107,6 +13427,45 @@
       <p:sp>
         <p:nvSpPr>
           <p:cNvPr id="5" name="Text 2"/>
+          <p:cNvSpPr/>
+          <p:nvPr/>
+        </p:nvSpPr>
+        <p:spPr>
+          <a:xfrm>
+            <a:off x="457200" y="5440680"/>
+            <a:ext cx="11247120" cy="777240"/>
+          </a:xfrm>
+          <a:prstGeom prst="rect">
+            <a:avLst/>
+          </a:prstGeom>
+          <a:noFill/>
+          <a:ln/>
+        </p:spPr>
+        <p:txBody>
+          <a:bodyPr wrap="square" rtlCol="0" anchor="ctr"/>
+          <a:lstStyle/>
+          <a:p>
+            <a:pPr indent="0" marL="0">
+              <a:buNone/>
+            </a:pPr>
+            <a:r>
+              <a:rPr lang="en-US" sz="1450" b="1" dirty="0">
+                <a:solidFill>
+                  <a:srgbClr val="B0122C"/>
+                </a:solidFill>
+                <a:latin typeface="Microsoft YaHei" pitchFamily="34" charset="0"/>
+                <a:ea typeface="Microsoft YaHei" pitchFamily="34" charset="-122"/>
+                <a:cs typeface="Microsoft YaHei" pitchFamily="34" charset="-120"/>
+              </a:rPr>
+              <a:t>核心传达：不是「去日本才买的平价片」，而是「值得纳入日常的高浓度精华面膜」。他们讲「在哪买·多便宜」，我们讲「为什么用·解决什么」。</a:t>
+            </a:r>
+            <a:endParaRPr lang="en-US" sz="1450" dirty="0"/>
+          </a:p>
+        </p:txBody>
+      </p:sp>
+      <p:sp>
+        <p:nvSpPr>
+          <p:cNvPr id="6" name="Text 3"/>
           <p:cNvSpPr/>
           <p:nvPr/>
         </p:nvSpPr>
@@ -11145,7 +13504,7 @@
       </p:sp>
       <p:sp>
         <p:nvSpPr>
-          <p:cNvPr id="6" name="Text 3"/>
+          <p:cNvPr id="7" name="Text 4"/>
           <p:cNvSpPr/>
           <p:nvPr/>
         </p:nvSpPr>
@@ -11176,7 +13535,7 @@
                 <a:ea typeface="Microsoft YaHei" pitchFamily="34" charset="-122"/>
                 <a:cs typeface="Microsoft YaHei" pitchFamily="34" charset="-120"/>
               </a:rPr>
-              <a:t>7</a:t>
+              <a:t>8</a:t>
             </a:r>
             <a:endParaRPr lang="en-US" sz="850" dirty="0"/>
           </a:p>
@@ -11247,9 +13606,90 @@
                 <a:ea typeface="Microsoft YaHei" pitchFamily="34" charset="-122"/>
                 <a:cs typeface="Microsoft YaHei" pitchFamily="34" charset="-120"/>
               </a:rPr>
-              <a:t>④ 关键词库 · 功效词合规三档</a:t>
+              <a:t>③ 笔记类型配比 · 护肤角度</a:t>
             </a:r>
             <a:endParaRPr lang="en-US" sz="2400" dirty="0"/>
+          </a:p>
+        </p:txBody>
+      </p:sp>
+      <p:sp>
+        <p:nvSpPr>
+          <p:cNvPr id="3" name="Text 1"/>
+          <p:cNvSpPr/>
+          <p:nvPr/>
+        </p:nvSpPr>
+        <p:spPr>
+          <a:xfrm>
+            <a:off x="457200" y="1005840"/>
+            <a:ext cx="11247120" cy="640080"/>
+          </a:xfrm>
+          <a:prstGeom prst="rect">
+            <a:avLst/>
+          </a:prstGeom>
+          <a:noFill/>
+          <a:ln/>
+        </p:spPr>
+        <p:txBody>
+          <a:bodyPr wrap="square" rtlCol="0" anchor="t"/>
+          <a:lstStyle/>
+          <a:p>
+            <a:pPr indent="0" marL="0">
+              <a:buNone/>
+            </a:pPr>
+            <a:r>
+              <a:rPr lang="en-US" sz="1500" b="1" dirty="0">
+                <a:solidFill>
+                  <a:srgbClr val="B0122C"/>
+                </a:solidFill>
+                <a:latin typeface="Microsoft YaHei" pitchFamily="34" charset="0"/>
+                <a:ea typeface="Microsoft YaHei" pitchFamily="34" charset="-122"/>
+                <a:cs typeface="Microsoft YaHei" pitchFamily="34" charset="-120"/>
+              </a:rPr>
+              <a:t>爆文公式：</a:t>
+            </a:r>
+            <a:pPr indent="0" marL="0">
+              <a:buNone/>
+            </a:pPr>
+            <a:r>
+              <a:rPr lang="en-US" sz="1500" dirty="0">
+                <a:solidFill>
+                  <a:srgbClr val="23272E"/>
+                </a:solidFill>
+                <a:latin typeface="Microsoft YaHei" pitchFamily="34" charset="0"/>
+                <a:ea typeface="Microsoft YaHei" pitchFamily="34" charset="-122"/>
+                <a:cs typeface="Microsoft YaHei" pitchFamily="34" charset="-120"/>
+              </a:rPr>
+              <a:t>🇯🇵日本+怎么选/不踩雷+7图合集+按肤质分类+真人口吻。 </a:t>
+            </a:r>
+            <a:pPr indent="0" marL="0">
+              <a:buNone/>
+            </a:pPr>
+            <a:r>
+              <a:rPr lang="en-US" sz="1500" b="1" dirty="0">
+                <a:solidFill>
+                  <a:srgbClr val="B0122C"/>
+                </a:solidFill>
+                <a:latin typeface="Microsoft YaHei" pitchFamily="34" charset="0"/>
+                <a:ea typeface="Microsoft YaHei" pitchFamily="34" charset="-122"/>
+                <a:cs typeface="Microsoft YaHei" pitchFamily="34" charset="-120"/>
+              </a:rPr>
+              <a:t>差异化：</a:t>
+            </a:r>
+            <a:pPr indent="0" marL="0">
+              <a:buNone/>
+            </a:pPr>
+            <a:r>
+              <a:rPr lang="en-US" sz="1500" dirty="0">
+                <a:solidFill>
+                  <a:srgbClr val="23272E"/>
+                </a:solidFill>
+                <a:latin typeface="Microsoft YaHei" pitchFamily="34" charset="0"/>
+                <a:ea typeface="Microsoft YaHei" pitchFamily="34" charset="-122"/>
+                <a:cs typeface="Microsoft YaHei" pitchFamily="34" charset="-120"/>
+              </a:rPr>
+              <a:t>各类型统一走「护肤功效」角度，不做日本购物开箱(避免同质化)。</a:t>
+            </a:r>
+            <a:endParaRPr lang="en-US" sz="1500" dirty="0"/>
           </a:p>
         </p:txBody>
       </p:sp>
@@ -11268,7 +13708,7 @@
           </p:nvPr>
         </p:nvGraphicFramePr>
         <p:xfrm>
-          <a:off x="457200" y="1371600"/>
+          <a:off x="457200" y="1828800"/>
           <a:ext cx="11247120" cy="914400"/>
         </p:xfrm>
         <a:graphic>
@@ -11276,11 +13716,12 @@
             <a:tbl>
               <a:tblPr/>
               <a:tblGrid>
-                <a:gridCol w="3749040"/>
-                <a:gridCol w="3291840"/>
-                <a:gridCol w="4206240"/>
+                <a:gridCol w="2743200"/>
+                <a:gridCol w="1097280"/>
+                <a:gridCol w="2377440"/>
+                <a:gridCol w="5029200"/>
               </a:tblGrid>
-              <a:tr h="457200">
+              <a:tr h="658368">
                 <a:tc>
                   <a:txBody>
                     <a:bodyPr/>
@@ -11298,7 +13739,7 @@
                           <a:ea typeface="Microsoft YaHei" pitchFamily="34" charset="-122"/>
                           <a:cs typeface="Microsoft YaHei" pitchFamily="34" charset="-120"/>
                         </a:rPr>
-                        <a:t>✅ 可用(安全)</a:t>
+                        <a:t>内容类型</a:t>
                       </a:r>
                       <a:endParaRPr lang="en-US" sz="1600" dirty="0">
                         <a:latin typeface="Microsoft YaHei" charset="0"/>
@@ -11366,7 +13807,7 @@
                           <a:ea typeface="Microsoft YaHei" pitchFamily="34" charset="-122"/>
                           <a:cs typeface="Microsoft YaHei" pitchFamily="34" charset="-120"/>
                         </a:rPr>
-                        <a:t>⚠️ 软化后可用</a:t>
+                        <a:t>篇数</a:t>
                       </a:r>
                       <a:endParaRPr lang="en-US" sz="1600" dirty="0">
                         <a:latin typeface="Microsoft YaHei" charset="0"/>
@@ -11434,7 +13875,7 @@
                           <a:ea typeface="Microsoft YaHei" pitchFamily="34" charset="-122"/>
                           <a:cs typeface="Microsoft YaHei" pitchFamily="34" charset="-120"/>
                         </a:rPr>
-                        <a:t>❌ 禁用(违规/需特证)</a:t>
+                        <a:t>达人层级</a:t>
                       </a:r>
                       <a:endParaRPr lang="en-US" sz="1600" dirty="0">
                         <a:latin typeface="Microsoft YaHei" charset="0"/>
@@ -11485,8 +13926,76 @@
                     </a:solidFill>
                   </a:tcPr>
                 </a:tc>
+                <a:tc>
+                  <a:txBody>
+                    <a:bodyPr/>
+                    <a:lstStyle/>
+                    <a:p>
+                      <a:pPr algn="ctr" indent="0" marL="0">
+                        <a:buNone/>
+                      </a:pPr>
+                      <a:r>
+                        <a:rPr lang="en-US" sz="1600" b="1" dirty="0">
+                          <a:solidFill>
+                            <a:srgbClr val="FFFFFF"/>
+                          </a:solidFill>
+                          <a:latin typeface="Microsoft YaHei" pitchFamily="34" charset="0"/>
+                          <a:ea typeface="Microsoft YaHei" pitchFamily="34" charset="-122"/>
+                          <a:cs typeface="Microsoft YaHei" pitchFamily="34" charset="-120"/>
+                        </a:rPr>
+                        <a:t>说明</a:t>
+                      </a:r>
+                      <a:endParaRPr lang="en-US" sz="1600" dirty="0">
+                        <a:latin typeface="Microsoft YaHei" charset="0"/>
+                        <a:ea typeface="Microsoft YaHei" charset="0"/>
+                        <a:cs typeface="Microsoft YaHei" charset="0"/>
+                      </a:endParaRPr>
+                    </a:p>
+                  </a:txBody>
+                  <a:tcPr marL="91440" marR="91440" marT="45720" marB="45720" anchor="ctr">
+                    <a:lnL w="9525" cap="flat" cmpd="sng" algn="ctr">
+                      <a:solidFill>
+                        <a:srgbClr val="E2E2E2"/>
+                      </a:solidFill>
+                      <a:prstDash val="solid"/>
+                      <a:round/>
+                      <a:headEnd type="none" w="med" len="med"/>
+                      <a:tailEnd type="none" w="med" len="med"/>
+                    </a:lnL>
+                    <a:lnR w="9525" cap="flat" cmpd="sng" algn="ctr">
+                      <a:solidFill>
+                        <a:srgbClr val="E2E2E2"/>
+                      </a:solidFill>
+                      <a:prstDash val="solid"/>
+                      <a:round/>
+                      <a:headEnd type="none" w="med" len="med"/>
+                      <a:tailEnd type="none" w="med" len="med"/>
+                    </a:lnR>
+                    <a:lnT w="9525" cap="flat" cmpd="sng" algn="ctr">
+                      <a:solidFill>
+                        <a:srgbClr val="E2E2E2"/>
+                      </a:solidFill>
+                      <a:prstDash val="solid"/>
+                      <a:round/>
+                      <a:headEnd type="none" w="med" len="med"/>
+                      <a:tailEnd type="none" w="med" len="med"/>
+                    </a:lnT>
+                    <a:lnB w="9525" cap="flat" cmpd="sng" algn="ctr">
+                      <a:solidFill>
+                        <a:srgbClr val="E2E2E2"/>
+                      </a:solidFill>
+                      <a:prstDash val="solid"/>
+                      <a:round/>
+                      <a:headEnd type="none" w="med" len="med"/>
+                      <a:tailEnd type="none" w="med" len="med"/>
+                    </a:lnB>
+                    <a:solidFill>
+                      <a:srgbClr val="7A0E22"/>
+                    </a:solidFill>
+                  </a:tcPr>
+                </a:tc>
               </a:tr>
-              <a:tr h="457200">
+              <a:tr h="658368">
                 <a:tc>
                   <a:txBody>
                     <a:bodyPr/>
@@ -11504,49 +14013,7 @@
                           <a:ea typeface="Microsoft YaHei" pitchFamily="34" charset="-122"/>
                           <a:cs typeface="Microsoft YaHei" pitchFamily="34" charset="-120"/>
                         </a:rPr>
-                        <a:t>补水 · 保湿 · 服帖 · 不闷肤</a:t>
-                      </a:r>
-                      <a:endParaRPr lang="en-US" sz="1500" dirty="0">
-                        <a:latin typeface="Microsoft YaHei" charset="0"/>
-                        <a:ea typeface="Microsoft YaHei" charset="0"/>
-                        <a:cs typeface="Microsoft YaHei" charset="0"/>
-                      </a:endParaRPr>
-                    </a:p>
-                    <a:p>
-                      <a:pPr algn="ctr" indent="0" marL="0">
-                        <a:buNone/>
-                      </a:pPr>
-                      <a:r>
-                        <a:rPr lang="en-US" sz="1500" dirty="0">
-                          <a:solidFill>
-                            <a:srgbClr val="23272E"/>
-                          </a:solidFill>
-                          <a:latin typeface="Microsoft YaHei" pitchFamily="34" charset="0"/>
-                          <a:ea typeface="Microsoft YaHei" pitchFamily="34" charset="-122"/>
-                          <a:cs typeface="Microsoft YaHei" pitchFamily="34" charset="-120"/>
-                        </a:rPr>
-                        <a:t>成分名(VC/烟酰胺/神经酰胺)</a:t>
-                      </a:r>
-                      <a:endParaRPr lang="en-US" sz="1500" dirty="0">
-                        <a:latin typeface="Microsoft YaHei" charset="0"/>
-                        <a:ea typeface="Microsoft YaHei" charset="0"/>
-                        <a:cs typeface="Microsoft YaHei" charset="0"/>
-                      </a:endParaRPr>
-                    </a:p>
-                    <a:p>
-                      <a:pPr algn="ctr" indent="0" marL="0">
-                        <a:buNone/>
-                      </a:pPr>
-                      <a:r>
-                        <a:rPr lang="en-US" sz="1500" dirty="0">
-                          <a:solidFill>
-                            <a:srgbClr val="23272E"/>
-                          </a:solidFill>
-                          <a:latin typeface="Microsoft YaHei" pitchFamily="34" charset="0"/>
-                          <a:ea typeface="Microsoft YaHei" pitchFamily="34" charset="-122"/>
-                          <a:cs typeface="Microsoft YaHei" pitchFamily="34" charset="-120"/>
-                        </a:rPr>
-                        <a:t>3分钟 · 妆前 · 清爽 · 细腻 · 哑光</a:t>
+                        <a:t>B·测评/回购</a:t>
                       </a:r>
                       <a:endParaRPr lang="en-US" sz="1500" dirty="0">
                         <a:latin typeface="Microsoft YaHei" charset="0"/>
@@ -11614,49 +14081,7 @@
                           <a:ea typeface="Microsoft YaHei" pitchFamily="34" charset="-122"/>
                           <a:cs typeface="Microsoft YaHei" pitchFamily="34" charset="-120"/>
                         </a:rPr>
-                        <a:t>提亮 · 细致毛孔(替收缩)</a:t>
-                      </a:r>
-                      <a:endParaRPr lang="en-US" sz="1500" dirty="0">
-                        <a:latin typeface="Microsoft YaHei" charset="0"/>
-                        <a:ea typeface="Microsoft YaHei" charset="0"/>
-                        <a:cs typeface="Microsoft YaHei" charset="0"/>
-                      </a:endParaRPr>
-                    </a:p>
-                    <a:p>
-                      <a:pPr algn="l" indent="0" marL="0">
-                        <a:buNone/>
-                      </a:pPr>
-                      <a:r>
-                        <a:rPr lang="en-US" sz="1500" dirty="0">
-                          <a:solidFill>
-                            <a:srgbClr val="23272E"/>
-                          </a:solidFill>
-                          <a:latin typeface="Microsoft YaHei" pitchFamily="34" charset="0"/>
-                          <a:ea typeface="Microsoft YaHei" pitchFamily="34" charset="-122"/>
-                          <a:cs typeface="Microsoft YaHei" pitchFamily="34" charset="-120"/>
-                        </a:rPr>
-                        <a:t>改善暗沉感 · 控油</a:t>
-                      </a:r>
-                      <a:endParaRPr lang="en-US" sz="1500" dirty="0">
-                        <a:latin typeface="Microsoft YaHei" charset="0"/>
-                        <a:ea typeface="Microsoft YaHei" charset="0"/>
-                        <a:cs typeface="Microsoft YaHei" charset="0"/>
-                      </a:endParaRPr>
-                    </a:p>
-                    <a:p>
-                      <a:pPr algn="l" indent="0" marL="0">
-                        <a:buNone/>
-                      </a:pPr>
-                      <a:r>
-                        <a:rPr lang="en-US" sz="1500" dirty="0">
-                          <a:solidFill>
-                            <a:srgbClr val="23272E"/>
-                          </a:solidFill>
-                          <a:latin typeface="Microsoft YaHei" pitchFamily="34" charset="0"/>
-                          <a:ea typeface="Microsoft YaHei" pitchFamily="34" charset="-122"/>
-                          <a:cs typeface="Microsoft YaHei" pitchFamily="34" charset="-120"/>
-                        </a:rPr>
-                        <a:t>透亮 · 匀净肤色感</a:t>
+                        <a:t>18</a:t>
                       </a:r>
                       <a:endParaRPr lang="en-US" sz="1500" dirty="0">
                         <a:latin typeface="Microsoft YaHei" charset="0"/>
@@ -11724,7 +14149,7 @@
                           <a:ea typeface="Microsoft YaHei" pitchFamily="34" charset="-122"/>
                           <a:cs typeface="Microsoft YaHei" pitchFamily="34" charset="-120"/>
                         </a:rPr>
-                        <a:t>美白 · 焕白 · 去黄 · 淡斑 · 淡痘印</a:t>
+                        <a:t>KOC/尾部</a:t>
                       </a:r>
                       <a:endParaRPr lang="en-US" sz="1500" dirty="0">
                         <a:latin typeface="Microsoft YaHei" charset="0"/>
@@ -11732,6 +14157,53 @@
                         <a:cs typeface="Microsoft YaHei" charset="0"/>
                       </a:endParaRPr>
                     </a:p>
+                  </a:txBody>
+                  <a:tcPr marL="63500" marR="63500" marT="38100" marB="38100" anchor="ctr">
+                    <a:lnL w="9525" cap="flat" cmpd="sng" algn="ctr">
+                      <a:solidFill>
+                        <a:srgbClr val="E2E2E2"/>
+                      </a:solidFill>
+                      <a:prstDash val="solid"/>
+                      <a:round/>
+                      <a:headEnd type="none" w="med" len="med"/>
+                      <a:tailEnd type="none" w="med" len="med"/>
+                    </a:lnL>
+                    <a:lnR w="9525" cap="flat" cmpd="sng" algn="ctr">
+                      <a:solidFill>
+                        <a:srgbClr val="E2E2E2"/>
+                      </a:solidFill>
+                      <a:prstDash val="solid"/>
+                      <a:round/>
+                      <a:headEnd type="none" w="med" len="med"/>
+                      <a:tailEnd type="none" w="med" len="med"/>
+                    </a:lnR>
+                    <a:lnT w="9525" cap="flat" cmpd="sng" algn="ctr">
+                      <a:solidFill>
+                        <a:srgbClr val="E2E2E2"/>
+                      </a:solidFill>
+                      <a:prstDash val="solid"/>
+                      <a:round/>
+                      <a:headEnd type="none" w="med" len="med"/>
+                      <a:tailEnd type="none" w="med" len="med"/>
+                    </a:lnT>
+                    <a:lnB w="9525" cap="flat" cmpd="sng" algn="ctr">
+                      <a:solidFill>
+                        <a:srgbClr val="E2E2E2"/>
+                      </a:solidFill>
+                      <a:prstDash val="solid"/>
+                      <a:round/>
+                      <a:headEnd type="none" w="med" len="med"/>
+                      <a:tailEnd type="none" w="med" len="med"/>
+                    </a:lnB>
+                    <a:solidFill>
+                      <a:srgbClr val="FFFFFF"/>
+                    </a:solidFill>
+                  </a:tcPr>
+                </a:tc>
+                <a:tc>
+                  <a:txBody>
+                    <a:bodyPr/>
+                    <a:lstStyle/>
                     <a:p>
                       <a:pPr algn="l" indent="0" marL="0">
                         <a:buNone/>
@@ -11745,7 +14217,7 @@
                           <a:ea typeface="Microsoft YaHei" pitchFamily="34" charset="-122"/>
                           <a:cs typeface="Microsoft YaHei" pitchFamily="34" charset="-120"/>
                         </a:rPr>
-                        <a:t>抑黑 · 祛痘 · 修复受损 · 修护屏障</a:t>
+                        <a:t>真人体感·信任·铺量主力</a:t>
                       </a:r>
                       <a:endParaRPr lang="en-US" sz="1500" dirty="0">
                         <a:latin typeface="Microsoft YaHei" charset="0"/>
@@ -11753,6 +14225,123 @@
                         <a:cs typeface="Microsoft YaHei" charset="0"/>
                       </a:endParaRPr>
                     </a:p>
+                  </a:txBody>
+                  <a:tcPr marL="63500" marR="63500" marT="38100" marB="38100" anchor="ctr">
+                    <a:lnL w="9525" cap="flat" cmpd="sng" algn="ctr">
+                      <a:solidFill>
+                        <a:srgbClr val="E2E2E2"/>
+                      </a:solidFill>
+                      <a:prstDash val="solid"/>
+                      <a:round/>
+                      <a:headEnd type="none" w="med" len="med"/>
+                      <a:tailEnd type="none" w="med" len="med"/>
+                    </a:lnL>
+                    <a:lnR w="9525" cap="flat" cmpd="sng" algn="ctr">
+                      <a:solidFill>
+                        <a:srgbClr val="E2E2E2"/>
+                      </a:solidFill>
+                      <a:prstDash val="solid"/>
+                      <a:round/>
+                      <a:headEnd type="none" w="med" len="med"/>
+                      <a:tailEnd type="none" w="med" len="med"/>
+                    </a:lnR>
+                    <a:lnT w="9525" cap="flat" cmpd="sng" algn="ctr">
+                      <a:solidFill>
+                        <a:srgbClr val="E2E2E2"/>
+                      </a:solidFill>
+                      <a:prstDash val="solid"/>
+                      <a:round/>
+                      <a:headEnd type="none" w="med" len="med"/>
+                      <a:tailEnd type="none" w="med" len="med"/>
+                    </a:lnT>
+                    <a:lnB w="9525" cap="flat" cmpd="sng" algn="ctr">
+                      <a:solidFill>
+                        <a:srgbClr val="E2E2E2"/>
+                      </a:solidFill>
+                      <a:prstDash val="solid"/>
+                      <a:round/>
+                      <a:headEnd type="none" w="med" len="med"/>
+                      <a:tailEnd type="none" w="med" len="med"/>
+                    </a:lnB>
+                    <a:solidFill>
+                      <a:srgbClr val="FFFFFF"/>
+                    </a:solidFill>
+                  </a:tcPr>
+                </a:tc>
+              </a:tr>
+              <a:tr h="658368">
+                <a:tc>
+                  <a:txBody>
+                    <a:bodyPr/>
+                    <a:lstStyle/>
+                    <a:p>
+                      <a:pPr algn="ctr" indent="0" marL="0">
+                        <a:buNone/>
+                      </a:pPr>
+                      <a:r>
+                        <a:rPr lang="en-US" sz="1500" dirty="0">
+                          <a:solidFill>
+                            <a:srgbClr val="23272E"/>
+                          </a:solidFill>
+                          <a:latin typeface="Microsoft YaHei" pitchFamily="34" charset="0"/>
+                          <a:ea typeface="Microsoft YaHei" pitchFamily="34" charset="-122"/>
+                          <a:cs typeface="Microsoft YaHei" pitchFamily="34" charset="-120"/>
+                        </a:rPr>
+                        <a:t>C·场景种草</a:t>
+                      </a:r>
+                      <a:endParaRPr lang="en-US" sz="1500" dirty="0">
+                        <a:latin typeface="Microsoft YaHei" charset="0"/>
+                        <a:ea typeface="Microsoft YaHei" charset="0"/>
+                        <a:cs typeface="Microsoft YaHei" charset="0"/>
+                      </a:endParaRPr>
+                    </a:p>
+                  </a:txBody>
+                  <a:tcPr marL="63500" marR="63500" marT="38100" marB="38100" anchor="ctr">
+                    <a:lnL w="9525" cap="flat" cmpd="sng" algn="ctr">
+                      <a:solidFill>
+                        <a:srgbClr val="E2E2E2"/>
+                      </a:solidFill>
+                      <a:prstDash val="solid"/>
+                      <a:round/>
+                      <a:headEnd type="none" w="med" len="med"/>
+                      <a:tailEnd type="none" w="med" len="med"/>
+                    </a:lnL>
+                    <a:lnR w="9525" cap="flat" cmpd="sng" algn="ctr">
+                      <a:solidFill>
+                        <a:srgbClr val="E2E2E2"/>
+                      </a:solidFill>
+                      <a:prstDash val="solid"/>
+                      <a:round/>
+                      <a:headEnd type="none" w="med" len="med"/>
+                      <a:tailEnd type="none" w="med" len="med"/>
+                    </a:lnR>
+                    <a:lnT w="9525" cap="flat" cmpd="sng" algn="ctr">
+                      <a:solidFill>
+                        <a:srgbClr val="E2E2E2"/>
+                      </a:solidFill>
+                      <a:prstDash val="solid"/>
+                      <a:round/>
+                      <a:headEnd type="none" w="med" len="med"/>
+                      <a:tailEnd type="none" w="med" len="med"/>
+                    </a:lnT>
+                    <a:lnB w="9525" cap="flat" cmpd="sng" algn="ctr">
+                      <a:solidFill>
+                        <a:srgbClr val="E2E2E2"/>
+                      </a:solidFill>
+                      <a:prstDash val="solid"/>
+                      <a:round/>
+                      <a:headEnd type="none" w="med" len="med"/>
+                      <a:tailEnd type="none" w="med" len="med"/>
+                    </a:lnB>
+                    <a:solidFill>
+                      <a:srgbClr val="F7F3F4"/>
+                    </a:solidFill>
+                  </a:tcPr>
+                </a:tc>
+                <a:tc>
+                  <a:txBody>
+                    <a:bodyPr/>
+                    <a:lstStyle/>
                     <a:p>
                       <a:pPr algn="l" indent="0" marL="0">
                         <a:buNone/>
@@ -11766,7 +14355,965 @@
                           <a:ea typeface="Microsoft YaHei" pitchFamily="34" charset="-122"/>
                           <a:cs typeface="Microsoft YaHei" pitchFamily="34" charset="-120"/>
                         </a:rPr>
-                        <a:t>促胶原 · 抗老 · 院线级 · 断货王 · NO.1</a:t>
+                        <a:t>9</a:t>
+                      </a:r>
+                      <a:endParaRPr lang="en-US" sz="1500" dirty="0">
+                        <a:latin typeface="Microsoft YaHei" charset="0"/>
+                        <a:ea typeface="Microsoft YaHei" charset="0"/>
+                        <a:cs typeface="Microsoft YaHei" charset="0"/>
+                      </a:endParaRPr>
+                    </a:p>
+                  </a:txBody>
+                  <a:tcPr marL="63500" marR="63500" marT="38100" marB="38100" anchor="ctr">
+                    <a:lnL w="9525" cap="flat" cmpd="sng" algn="ctr">
+                      <a:solidFill>
+                        <a:srgbClr val="E2E2E2"/>
+                      </a:solidFill>
+                      <a:prstDash val="solid"/>
+                      <a:round/>
+                      <a:headEnd type="none" w="med" len="med"/>
+                      <a:tailEnd type="none" w="med" len="med"/>
+                    </a:lnL>
+                    <a:lnR w="9525" cap="flat" cmpd="sng" algn="ctr">
+                      <a:solidFill>
+                        <a:srgbClr val="E2E2E2"/>
+                      </a:solidFill>
+                      <a:prstDash val="solid"/>
+                      <a:round/>
+                      <a:headEnd type="none" w="med" len="med"/>
+                      <a:tailEnd type="none" w="med" len="med"/>
+                    </a:lnR>
+                    <a:lnT w="9525" cap="flat" cmpd="sng" algn="ctr">
+                      <a:solidFill>
+                        <a:srgbClr val="E2E2E2"/>
+                      </a:solidFill>
+                      <a:prstDash val="solid"/>
+                      <a:round/>
+                      <a:headEnd type="none" w="med" len="med"/>
+                      <a:tailEnd type="none" w="med" len="med"/>
+                    </a:lnT>
+                    <a:lnB w="9525" cap="flat" cmpd="sng" algn="ctr">
+                      <a:solidFill>
+                        <a:srgbClr val="E2E2E2"/>
+                      </a:solidFill>
+                      <a:prstDash val="solid"/>
+                      <a:round/>
+                      <a:headEnd type="none" w="med" len="med"/>
+                      <a:tailEnd type="none" w="med" len="med"/>
+                    </a:lnB>
+                    <a:solidFill>
+                      <a:srgbClr val="F7F3F4"/>
+                    </a:solidFill>
+                  </a:tcPr>
+                </a:tc>
+                <a:tc>
+                  <a:txBody>
+                    <a:bodyPr/>
+                    <a:lstStyle/>
+                    <a:p>
+                      <a:pPr algn="l" indent="0" marL="0">
+                        <a:buNone/>
+                      </a:pPr>
+                      <a:r>
+                        <a:rPr lang="en-US" sz="1500" dirty="0">
+                          <a:solidFill>
+                            <a:srgbClr val="23272E"/>
+                          </a:solidFill>
+                          <a:latin typeface="Microsoft YaHei" pitchFamily="34" charset="0"/>
+                          <a:ea typeface="Microsoft YaHei" pitchFamily="34" charset="-122"/>
+                          <a:cs typeface="Microsoft YaHei" pitchFamily="34" charset="-120"/>
+                        </a:rPr>
+                        <a:t>KOC/腰部</a:t>
+                      </a:r>
+                      <a:endParaRPr lang="en-US" sz="1500" dirty="0">
+                        <a:latin typeface="Microsoft YaHei" charset="0"/>
+                        <a:ea typeface="Microsoft YaHei" charset="0"/>
+                        <a:cs typeface="Microsoft YaHei" charset="0"/>
+                      </a:endParaRPr>
+                    </a:p>
+                  </a:txBody>
+                  <a:tcPr marL="63500" marR="63500" marT="38100" marB="38100" anchor="ctr">
+                    <a:lnL w="9525" cap="flat" cmpd="sng" algn="ctr">
+                      <a:solidFill>
+                        <a:srgbClr val="E2E2E2"/>
+                      </a:solidFill>
+                      <a:prstDash val="solid"/>
+                      <a:round/>
+                      <a:headEnd type="none" w="med" len="med"/>
+                      <a:tailEnd type="none" w="med" len="med"/>
+                    </a:lnL>
+                    <a:lnR w="9525" cap="flat" cmpd="sng" algn="ctr">
+                      <a:solidFill>
+                        <a:srgbClr val="E2E2E2"/>
+                      </a:solidFill>
+                      <a:prstDash val="solid"/>
+                      <a:round/>
+                      <a:headEnd type="none" w="med" len="med"/>
+                      <a:tailEnd type="none" w="med" len="med"/>
+                    </a:lnR>
+                    <a:lnT w="9525" cap="flat" cmpd="sng" algn="ctr">
+                      <a:solidFill>
+                        <a:srgbClr val="E2E2E2"/>
+                      </a:solidFill>
+                      <a:prstDash val="solid"/>
+                      <a:round/>
+                      <a:headEnd type="none" w="med" len="med"/>
+                      <a:tailEnd type="none" w="med" len="med"/>
+                    </a:lnT>
+                    <a:lnB w="9525" cap="flat" cmpd="sng" algn="ctr">
+                      <a:solidFill>
+                        <a:srgbClr val="E2E2E2"/>
+                      </a:solidFill>
+                      <a:prstDash val="solid"/>
+                      <a:round/>
+                      <a:headEnd type="none" w="med" len="med"/>
+                      <a:tailEnd type="none" w="med" len="med"/>
+                    </a:lnB>
+                    <a:solidFill>
+                      <a:srgbClr val="F7F3F4"/>
+                    </a:solidFill>
+                  </a:tcPr>
+                </a:tc>
+                <a:tc>
+                  <a:txBody>
+                    <a:bodyPr/>
+                    <a:lstStyle/>
+                    <a:p>
+                      <a:pPr algn="l" indent="0" marL="0">
+                        <a:buNone/>
+                      </a:pPr>
+                      <a:r>
+                        <a:rPr lang="en-US" sz="1500" dirty="0">
+                          <a:solidFill>
+                            <a:srgbClr val="23272E"/>
+                          </a:solidFill>
+                          <a:latin typeface="Microsoft YaHei" pitchFamily="34" charset="0"/>
+                          <a:ea typeface="Microsoft YaHei" pitchFamily="34" charset="-122"/>
+                          <a:cs typeface="Microsoft YaHei" pitchFamily="34" charset="-120"/>
+                        </a:rPr>
+                        <a:t>熬夜/妆前/换季 · 含视频(洼地)</a:t>
+                      </a:r>
+                      <a:endParaRPr lang="en-US" sz="1500" dirty="0">
+                        <a:latin typeface="Microsoft YaHei" charset="0"/>
+                        <a:ea typeface="Microsoft YaHei" charset="0"/>
+                        <a:cs typeface="Microsoft YaHei" charset="0"/>
+                      </a:endParaRPr>
+                    </a:p>
+                  </a:txBody>
+                  <a:tcPr marL="63500" marR="63500" marT="38100" marB="38100" anchor="ctr">
+                    <a:lnL w="9525" cap="flat" cmpd="sng" algn="ctr">
+                      <a:solidFill>
+                        <a:srgbClr val="E2E2E2"/>
+                      </a:solidFill>
+                      <a:prstDash val="solid"/>
+                      <a:round/>
+                      <a:headEnd type="none" w="med" len="med"/>
+                      <a:tailEnd type="none" w="med" len="med"/>
+                    </a:lnL>
+                    <a:lnR w="9525" cap="flat" cmpd="sng" algn="ctr">
+                      <a:solidFill>
+                        <a:srgbClr val="E2E2E2"/>
+                      </a:solidFill>
+                      <a:prstDash val="solid"/>
+                      <a:round/>
+                      <a:headEnd type="none" w="med" len="med"/>
+                      <a:tailEnd type="none" w="med" len="med"/>
+                    </a:lnR>
+                    <a:lnT w="9525" cap="flat" cmpd="sng" algn="ctr">
+                      <a:solidFill>
+                        <a:srgbClr val="E2E2E2"/>
+                      </a:solidFill>
+                      <a:prstDash val="solid"/>
+                      <a:round/>
+                      <a:headEnd type="none" w="med" len="med"/>
+                      <a:tailEnd type="none" w="med" len="med"/>
+                    </a:lnT>
+                    <a:lnB w="9525" cap="flat" cmpd="sng" algn="ctr">
+                      <a:solidFill>
+                        <a:srgbClr val="E2E2E2"/>
+                      </a:solidFill>
+                      <a:prstDash val="solid"/>
+                      <a:round/>
+                      <a:headEnd type="none" w="med" len="med"/>
+                      <a:tailEnd type="none" w="med" len="med"/>
+                    </a:lnB>
+                    <a:solidFill>
+                      <a:srgbClr val="F7F3F4"/>
+                    </a:solidFill>
+                  </a:tcPr>
+                </a:tc>
+              </a:tr>
+              <a:tr h="658368">
+                <a:tc>
+                  <a:txBody>
+                    <a:bodyPr/>
+                    <a:lstStyle/>
+                    <a:p>
+                      <a:pPr algn="ctr" indent="0" marL="0">
+                        <a:buNone/>
+                      </a:pPr>
+                      <a:r>
+                        <a:rPr lang="en-US" sz="1500" dirty="0">
+                          <a:solidFill>
+                            <a:srgbClr val="23272E"/>
+                          </a:solidFill>
+                          <a:latin typeface="Microsoft YaHei" pitchFamily="34" charset="0"/>
+                          <a:ea typeface="Microsoft YaHei" pitchFamily="34" charset="-122"/>
+                          <a:cs typeface="Microsoft YaHei" pitchFamily="34" charset="-120"/>
+                        </a:rPr>
+                        <a:t>A·选购攻略/合集</a:t>
+                      </a:r>
+                      <a:endParaRPr lang="en-US" sz="1500" dirty="0">
+                        <a:latin typeface="Microsoft YaHei" charset="0"/>
+                        <a:ea typeface="Microsoft YaHei" charset="0"/>
+                        <a:cs typeface="Microsoft YaHei" charset="0"/>
+                      </a:endParaRPr>
+                    </a:p>
+                  </a:txBody>
+                  <a:tcPr marL="63500" marR="63500" marT="38100" marB="38100" anchor="ctr">
+                    <a:lnL w="9525" cap="flat" cmpd="sng" algn="ctr">
+                      <a:solidFill>
+                        <a:srgbClr val="E2E2E2"/>
+                      </a:solidFill>
+                      <a:prstDash val="solid"/>
+                      <a:round/>
+                      <a:headEnd type="none" w="med" len="med"/>
+                      <a:tailEnd type="none" w="med" len="med"/>
+                    </a:lnL>
+                    <a:lnR w="9525" cap="flat" cmpd="sng" algn="ctr">
+                      <a:solidFill>
+                        <a:srgbClr val="E2E2E2"/>
+                      </a:solidFill>
+                      <a:prstDash val="solid"/>
+                      <a:round/>
+                      <a:headEnd type="none" w="med" len="med"/>
+                      <a:tailEnd type="none" w="med" len="med"/>
+                    </a:lnR>
+                    <a:lnT w="9525" cap="flat" cmpd="sng" algn="ctr">
+                      <a:solidFill>
+                        <a:srgbClr val="E2E2E2"/>
+                      </a:solidFill>
+                      <a:prstDash val="solid"/>
+                      <a:round/>
+                      <a:headEnd type="none" w="med" len="med"/>
+                      <a:tailEnd type="none" w="med" len="med"/>
+                    </a:lnT>
+                    <a:lnB w="9525" cap="flat" cmpd="sng" algn="ctr">
+                      <a:solidFill>
+                        <a:srgbClr val="E2E2E2"/>
+                      </a:solidFill>
+                      <a:prstDash val="solid"/>
+                      <a:round/>
+                      <a:headEnd type="none" w="med" len="med"/>
+                      <a:tailEnd type="none" w="med" len="med"/>
+                    </a:lnB>
+                    <a:solidFill>
+                      <a:srgbClr val="FFFFFF"/>
+                    </a:solidFill>
+                  </a:tcPr>
+                </a:tc>
+                <a:tc>
+                  <a:txBody>
+                    <a:bodyPr/>
+                    <a:lstStyle/>
+                    <a:p>
+                      <a:pPr algn="l" indent="0" marL="0">
+                        <a:buNone/>
+                      </a:pPr>
+                      <a:r>
+                        <a:rPr lang="en-US" sz="1500" dirty="0">
+                          <a:solidFill>
+                            <a:srgbClr val="23272E"/>
+                          </a:solidFill>
+                          <a:latin typeface="Microsoft YaHei" pitchFamily="34" charset="0"/>
+                          <a:ea typeface="Microsoft YaHei" pitchFamily="34" charset="-122"/>
+                          <a:cs typeface="Microsoft YaHei" pitchFamily="34" charset="-120"/>
+                        </a:rPr>
+                        <a:t>8</a:t>
+                      </a:r>
+                      <a:endParaRPr lang="en-US" sz="1500" dirty="0">
+                        <a:latin typeface="Microsoft YaHei" charset="0"/>
+                        <a:ea typeface="Microsoft YaHei" charset="0"/>
+                        <a:cs typeface="Microsoft YaHei" charset="0"/>
+                      </a:endParaRPr>
+                    </a:p>
+                  </a:txBody>
+                  <a:tcPr marL="63500" marR="63500" marT="38100" marB="38100" anchor="ctr">
+                    <a:lnL w="9525" cap="flat" cmpd="sng" algn="ctr">
+                      <a:solidFill>
+                        <a:srgbClr val="E2E2E2"/>
+                      </a:solidFill>
+                      <a:prstDash val="solid"/>
+                      <a:round/>
+                      <a:headEnd type="none" w="med" len="med"/>
+                      <a:tailEnd type="none" w="med" len="med"/>
+                    </a:lnL>
+                    <a:lnR w="9525" cap="flat" cmpd="sng" algn="ctr">
+                      <a:solidFill>
+                        <a:srgbClr val="E2E2E2"/>
+                      </a:solidFill>
+                      <a:prstDash val="solid"/>
+                      <a:round/>
+                      <a:headEnd type="none" w="med" len="med"/>
+                      <a:tailEnd type="none" w="med" len="med"/>
+                    </a:lnR>
+                    <a:lnT w="9525" cap="flat" cmpd="sng" algn="ctr">
+                      <a:solidFill>
+                        <a:srgbClr val="E2E2E2"/>
+                      </a:solidFill>
+                      <a:prstDash val="solid"/>
+                      <a:round/>
+                      <a:headEnd type="none" w="med" len="med"/>
+                      <a:tailEnd type="none" w="med" len="med"/>
+                    </a:lnT>
+                    <a:lnB w="9525" cap="flat" cmpd="sng" algn="ctr">
+                      <a:solidFill>
+                        <a:srgbClr val="E2E2E2"/>
+                      </a:solidFill>
+                      <a:prstDash val="solid"/>
+                      <a:round/>
+                      <a:headEnd type="none" w="med" len="med"/>
+                      <a:tailEnd type="none" w="med" len="med"/>
+                    </a:lnB>
+                    <a:solidFill>
+                      <a:srgbClr val="FFFFFF"/>
+                    </a:solidFill>
+                  </a:tcPr>
+                </a:tc>
+                <a:tc>
+                  <a:txBody>
+                    <a:bodyPr/>
+                    <a:lstStyle/>
+                    <a:p>
+                      <a:pPr algn="l" indent="0" marL="0">
+                        <a:buNone/>
+                      </a:pPr>
+                      <a:r>
+                        <a:rPr lang="en-US" sz="1500" dirty="0">
+                          <a:solidFill>
+                            <a:srgbClr val="23272E"/>
+                          </a:solidFill>
+                          <a:latin typeface="Microsoft YaHei" pitchFamily="34" charset="0"/>
+                          <a:ea typeface="Microsoft YaHei" pitchFamily="34" charset="-122"/>
+                          <a:cs typeface="Microsoft YaHei" pitchFamily="34" charset="-120"/>
+                        </a:rPr>
+                        <a:t>腰部/头部</a:t>
+                      </a:r>
+                      <a:endParaRPr lang="en-US" sz="1500" dirty="0">
+                        <a:latin typeface="Microsoft YaHei" charset="0"/>
+                        <a:ea typeface="Microsoft YaHei" charset="0"/>
+                        <a:cs typeface="Microsoft YaHei" charset="0"/>
+                      </a:endParaRPr>
+                    </a:p>
+                  </a:txBody>
+                  <a:tcPr marL="63500" marR="63500" marT="38100" marB="38100" anchor="ctr">
+                    <a:lnL w="9525" cap="flat" cmpd="sng" algn="ctr">
+                      <a:solidFill>
+                        <a:srgbClr val="E2E2E2"/>
+                      </a:solidFill>
+                      <a:prstDash val="solid"/>
+                      <a:round/>
+                      <a:headEnd type="none" w="med" len="med"/>
+                      <a:tailEnd type="none" w="med" len="med"/>
+                    </a:lnL>
+                    <a:lnR w="9525" cap="flat" cmpd="sng" algn="ctr">
+                      <a:solidFill>
+                        <a:srgbClr val="E2E2E2"/>
+                      </a:solidFill>
+                      <a:prstDash val="solid"/>
+                      <a:round/>
+                      <a:headEnd type="none" w="med" len="med"/>
+                      <a:tailEnd type="none" w="med" len="med"/>
+                    </a:lnR>
+                    <a:lnT w="9525" cap="flat" cmpd="sng" algn="ctr">
+                      <a:solidFill>
+                        <a:srgbClr val="E2E2E2"/>
+                      </a:solidFill>
+                      <a:prstDash val="solid"/>
+                      <a:round/>
+                      <a:headEnd type="none" w="med" len="med"/>
+                      <a:tailEnd type="none" w="med" len="med"/>
+                    </a:lnT>
+                    <a:lnB w="9525" cap="flat" cmpd="sng" algn="ctr">
+                      <a:solidFill>
+                        <a:srgbClr val="E2E2E2"/>
+                      </a:solidFill>
+                      <a:prstDash val="solid"/>
+                      <a:round/>
+                      <a:headEnd type="none" w="med" len="med"/>
+                      <a:tailEnd type="none" w="med" len="med"/>
+                    </a:lnB>
+                    <a:solidFill>
+                      <a:srgbClr val="FFFFFF"/>
+                    </a:solidFill>
+                  </a:tcPr>
+                </a:tc>
+                <a:tc>
+                  <a:txBody>
+                    <a:bodyPr/>
+                    <a:lstStyle/>
+                    <a:p>
+                      <a:pPr algn="l" indent="0" marL="0">
+                        <a:buNone/>
+                      </a:pPr>
+                      <a:r>
+                        <a:rPr lang="en-US" sz="1500" dirty="0">
+                          <a:solidFill>
+                            <a:srgbClr val="23272E"/>
+                          </a:solidFill>
+                          <a:latin typeface="Microsoft YaHei" pitchFamily="34" charset="0"/>
+                          <a:ea typeface="Microsoft YaHei" pitchFamily="34" charset="-122"/>
+                          <a:cs typeface="Microsoft YaHei" pitchFamily="34" charset="-120"/>
+                        </a:rPr>
+                        <a:t>爆文引擎·7+图·按肤质选</a:t>
+                      </a:r>
+                      <a:endParaRPr lang="en-US" sz="1500" dirty="0">
+                        <a:latin typeface="Microsoft YaHei" charset="0"/>
+                        <a:ea typeface="Microsoft YaHei" charset="0"/>
+                        <a:cs typeface="Microsoft YaHei" charset="0"/>
+                      </a:endParaRPr>
+                    </a:p>
+                  </a:txBody>
+                  <a:tcPr marL="63500" marR="63500" marT="38100" marB="38100" anchor="ctr">
+                    <a:lnL w="9525" cap="flat" cmpd="sng" algn="ctr">
+                      <a:solidFill>
+                        <a:srgbClr val="E2E2E2"/>
+                      </a:solidFill>
+                      <a:prstDash val="solid"/>
+                      <a:round/>
+                      <a:headEnd type="none" w="med" len="med"/>
+                      <a:tailEnd type="none" w="med" len="med"/>
+                    </a:lnL>
+                    <a:lnR w="9525" cap="flat" cmpd="sng" algn="ctr">
+                      <a:solidFill>
+                        <a:srgbClr val="E2E2E2"/>
+                      </a:solidFill>
+                      <a:prstDash val="solid"/>
+                      <a:round/>
+                      <a:headEnd type="none" w="med" len="med"/>
+                      <a:tailEnd type="none" w="med" len="med"/>
+                    </a:lnR>
+                    <a:lnT w="9525" cap="flat" cmpd="sng" algn="ctr">
+                      <a:solidFill>
+                        <a:srgbClr val="E2E2E2"/>
+                      </a:solidFill>
+                      <a:prstDash val="solid"/>
+                      <a:round/>
+                      <a:headEnd type="none" w="med" len="med"/>
+                      <a:tailEnd type="none" w="med" len="med"/>
+                    </a:lnT>
+                    <a:lnB w="9525" cap="flat" cmpd="sng" algn="ctr">
+                      <a:solidFill>
+                        <a:srgbClr val="E2E2E2"/>
+                      </a:solidFill>
+                      <a:prstDash val="solid"/>
+                      <a:round/>
+                      <a:headEnd type="none" w="med" len="med"/>
+                      <a:tailEnd type="none" w="med" len="med"/>
+                    </a:lnB>
+                    <a:solidFill>
+                      <a:srgbClr val="FFFFFF"/>
+                    </a:solidFill>
+                  </a:tcPr>
+                </a:tc>
+              </a:tr>
+              <a:tr h="658368">
+                <a:tc>
+                  <a:txBody>
+                    <a:bodyPr/>
+                    <a:lstStyle/>
+                    <a:p>
+                      <a:pPr algn="ctr" indent="0" marL="0">
+                        <a:buNone/>
+                      </a:pPr>
+                      <a:r>
+                        <a:rPr lang="en-US" sz="1500" dirty="0">
+                          <a:solidFill>
+                            <a:srgbClr val="23272E"/>
+                          </a:solidFill>
+                          <a:latin typeface="Microsoft YaHei" pitchFamily="34" charset="0"/>
+                          <a:ea typeface="Microsoft YaHei" pitchFamily="34" charset="-122"/>
+                          <a:cs typeface="Microsoft YaHei" pitchFamily="34" charset="-120"/>
+                        </a:rPr>
+                        <a:t>D·开箱vlog</a:t>
+                      </a:r>
+                      <a:endParaRPr lang="en-US" sz="1500" dirty="0">
+                        <a:latin typeface="Microsoft YaHei" charset="0"/>
+                        <a:ea typeface="Microsoft YaHei" charset="0"/>
+                        <a:cs typeface="Microsoft YaHei" charset="0"/>
+                      </a:endParaRPr>
+                    </a:p>
+                  </a:txBody>
+                  <a:tcPr marL="63500" marR="63500" marT="38100" marB="38100" anchor="ctr">
+                    <a:lnL w="9525" cap="flat" cmpd="sng" algn="ctr">
+                      <a:solidFill>
+                        <a:srgbClr val="E2E2E2"/>
+                      </a:solidFill>
+                      <a:prstDash val="solid"/>
+                      <a:round/>
+                      <a:headEnd type="none" w="med" len="med"/>
+                      <a:tailEnd type="none" w="med" len="med"/>
+                    </a:lnL>
+                    <a:lnR w="9525" cap="flat" cmpd="sng" algn="ctr">
+                      <a:solidFill>
+                        <a:srgbClr val="E2E2E2"/>
+                      </a:solidFill>
+                      <a:prstDash val="solid"/>
+                      <a:round/>
+                      <a:headEnd type="none" w="med" len="med"/>
+                      <a:tailEnd type="none" w="med" len="med"/>
+                    </a:lnR>
+                    <a:lnT w="9525" cap="flat" cmpd="sng" algn="ctr">
+                      <a:solidFill>
+                        <a:srgbClr val="E2E2E2"/>
+                      </a:solidFill>
+                      <a:prstDash val="solid"/>
+                      <a:round/>
+                      <a:headEnd type="none" w="med" len="med"/>
+                      <a:tailEnd type="none" w="med" len="med"/>
+                    </a:lnT>
+                    <a:lnB w="9525" cap="flat" cmpd="sng" algn="ctr">
+                      <a:solidFill>
+                        <a:srgbClr val="E2E2E2"/>
+                      </a:solidFill>
+                      <a:prstDash val="solid"/>
+                      <a:round/>
+                      <a:headEnd type="none" w="med" len="med"/>
+                      <a:tailEnd type="none" w="med" len="med"/>
+                    </a:lnB>
+                    <a:solidFill>
+                      <a:srgbClr val="F7F3F4"/>
+                    </a:solidFill>
+                  </a:tcPr>
+                </a:tc>
+                <a:tc>
+                  <a:txBody>
+                    <a:bodyPr/>
+                    <a:lstStyle/>
+                    <a:p>
+                      <a:pPr algn="l" indent="0" marL="0">
+                        <a:buNone/>
+                      </a:pPr>
+                      <a:r>
+                        <a:rPr lang="en-US" sz="1500" dirty="0">
+                          <a:solidFill>
+                            <a:srgbClr val="23272E"/>
+                          </a:solidFill>
+                          <a:latin typeface="Microsoft YaHei" pitchFamily="34" charset="0"/>
+                          <a:ea typeface="Microsoft YaHei" pitchFamily="34" charset="-122"/>
+                          <a:cs typeface="Microsoft YaHei" pitchFamily="34" charset="-120"/>
+                        </a:rPr>
+                        <a:t>5</a:t>
+                      </a:r>
+                      <a:endParaRPr lang="en-US" sz="1500" dirty="0">
+                        <a:latin typeface="Microsoft YaHei" charset="0"/>
+                        <a:ea typeface="Microsoft YaHei" charset="0"/>
+                        <a:cs typeface="Microsoft YaHei" charset="0"/>
+                      </a:endParaRPr>
+                    </a:p>
+                  </a:txBody>
+                  <a:tcPr marL="63500" marR="63500" marT="38100" marB="38100" anchor="ctr">
+                    <a:lnL w="9525" cap="flat" cmpd="sng" algn="ctr">
+                      <a:solidFill>
+                        <a:srgbClr val="E2E2E2"/>
+                      </a:solidFill>
+                      <a:prstDash val="solid"/>
+                      <a:round/>
+                      <a:headEnd type="none" w="med" len="med"/>
+                      <a:tailEnd type="none" w="med" len="med"/>
+                    </a:lnL>
+                    <a:lnR w="9525" cap="flat" cmpd="sng" algn="ctr">
+                      <a:solidFill>
+                        <a:srgbClr val="E2E2E2"/>
+                      </a:solidFill>
+                      <a:prstDash val="solid"/>
+                      <a:round/>
+                      <a:headEnd type="none" w="med" len="med"/>
+                      <a:tailEnd type="none" w="med" len="med"/>
+                    </a:lnR>
+                    <a:lnT w="9525" cap="flat" cmpd="sng" algn="ctr">
+                      <a:solidFill>
+                        <a:srgbClr val="E2E2E2"/>
+                      </a:solidFill>
+                      <a:prstDash val="solid"/>
+                      <a:round/>
+                      <a:headEnd type="none" w="med" len="med"/>
+                      <a:tailEnd type="none" w="med" len="med"/>
+                    </a:lnT>
+                    <a:lnB w="9525" cap="flat" cmpd="sng" algn="ctr">
+                      <a:solidFill>
+                        <a:srgbClr val="E2E2E2"/>
+                      </a:solidFill>
+                      <a:prstDash val="solid"/>
+                      <a:round/>
+                      <a:headEnd type="none" w="med" len="med"/>
+                      <a:tailEnd type="none" w="med" len="med"/>
+                    </a:lnB>
+                    <a:solidFill>
+                      <a:srgbClr val="F7F3F4"/>
+                    </a:solidFill>
+                  </a:tcPr>
+                </a:tc>
+                <a:tc>
+                  <a:txBody>
+                    <a:bodyPr/>
+                    <a:lstStyle/>
+                    <a:p>
+                      <a:pPr algn="l" indent="0" marL="0">
+                        <a:buNone/>
+                      </a:pPr>
+                      <a:r>
+                        <a:rPr lang="en-US" sz="1500" dirty="0">
+                          <a:solidFill>
+                            <a:srgbClr val="23272E"/>
+                          </a:solidFill>
+                          <a:latin typeface="Microsoft YaHei" pitchFamily="34" charset="0"/>
+                          <a:ea typeface="Microsoft YaHei" pitchFamily="34" charset="-122"/>
+                          <a:cs typeface="Microsoft YaHei" pitchFamily="34" charset="-120"/>
+                        </a:rPr>
+                        <a:t>KOC</a:t>
+                      </a:r>
+                      <a:endParaRPr lang="en-US" sz="1500" dirty="0">
+                        <a:latin typeface="Microsoft YaHei" charset="0"/>
+                        <a:ea typeface="Microsoft YaHei" charset="0"/>
+                        <a:cs typeface="Microsoft YaHei" charset="0"/>
+                      </a:endParaRPr>
+                    </a:p>
+                  </a:txBody>
+                  <a:tcPr marL="63500" marR="63500" marT="38100" marB="38100" anchor="ctr">
+                    <a:lnL w="9525" cap="flat" cmpd="sng" algn="ctr">
+                      <a:solidFill>
+                        <a:srgbClr val="E2E2E2"/>
+                      </a:solidFill>
+                      <a:prstDash val="solid"/>
+                      <a:round/>
+                      <a:headEnd type="none" w="med" len="med"/>
+                      <a:tailEnd type="none" w="med" len="med"/>
+                    </a:lnL>
+                    <a:lnR w="9525" cap="flat" cmpd="sng" algn="ctr">
+                      <a:solidFill>
+                        <a:srgbClr val="E2E2E2"/>
+                      </a:solidFill>
+                      <a:prstDash val="solid"/>
+                      <a:round/>
+                      <a:headEnd type="none" w="med" len="med"/>
+                      <a:tailEnd type="none" w="med" len="med"/>
+                    </a:lnR>
+                    <a:lnT w="9525" cap="flat" cmpd="sng" algn="ctr">
+                      <a:solidFill>
+                        <a:srgbClr val="E2E2E2"/>
+                      </a:solidFill>
+                      <a:prstDash val="solid"/>
+                      <a:round/>
+                      <a:headEnd type="none" w="med" len="med"/>
+                      <a:tailEnd type="none" w="med" len="med"/>
+                    </a:lnT>
+                    <a:lnB w="9525" cap="flat" cmpd="sng" algn="ctr">
+                      <a:solidFill>
+                        <a:srgbClr val="E2E2E2"/>
+                      </a:solidFill>
+                      <a:prstDash val="solid"/>
+                      <a:round/>
+                      <a:headEnd type="none" w="med" len="med"/>
+                      <a:tailEnd type="none" w="med" len="med"/>
+                    </a:lnB>
+                    <a:solidFill>
+                      <a:srgbClr val="F7F3F4"/>
+                    </a:solidFill>
+                  </a:tcPr>
+                </a:tc>
+                <a:tc>
+                  <a:txBody>
+                    <a:bodyPr/>
+                    <a:lstStyle/>
+                    <a:p>
+                      <a:pPr algn="l" indent="0" marL="0">
+                        <a:buNone/>
+                      </a:pPr>
+                      <a:r>
+                        <a:rPr lang="en-US" sz="1500" dirty="0">
+                          <a:solidFill>
+                            <a:srgbClr val="23272E"/>
+                          </a:solidFill>
+                          <a:latin typeface="Microsoft YaHei" pitchFamily="34" charset="0"/>
+                          <a:ea typeface="Microsoft YaHei" pitchFamily="34" charset="-122"/>
+                          <a:cs typeface="Microsoft YaHei" pitchFamily="34" charset="-120"/>
+                        </a:rPr>
+                        <a:t>日本好物/药妆店场景</a:t>
+                      </a:r>
+                      <a:endParaRPr lang="en-US" sz="1500" dirty="0">
+                        <a:latin typeface="Microsoft YaHei" charset="0"/>
+                        <a:ea typeface="Microsoft YaHei" charset="0"/>
+                        <a:cs typeface="Microsoft YaHei" charset="0"/>
+                      </a:endParaRPr>
+                    </a:p>
+                  </a:txBody>
+                  <a:tcPr marL="63500" marR="63500" marT="38100" marB="38100" anchor="ctr">
+                    <a:lnL w="9525" cap="flat" cmpd="sng" algn="ctr">
+                      <a:solidFill>
+                        <a:srgbClr val="E2E2E2"/>
+                      </a:solidFill>
+                      <a:prstDash val="solid"/>
+                      <a:round/>
+                      <a:headEnd type="none" w="med" len="med"/>
+                      <a:tailEnd type="none" w="med" len="med"/>
+                    </a:lnL>
+                    <a:lnR w="9525" cap="flat" cmpd="sng" algn="ctr">
+                      <a:solidFill>
+                        <a:srgbClr val="E2E2E2"/>
+                      </a:solidFill>
+                      <a:prstDash val="solid"/>
+                      <a:round/>
+                      <a:headEnd type="none" w="med" len="med"/>
+                      <a:tailEnd type="none" w="med" len="med"/>
+                    </a:lnR>
+                    <a:lnT w="9525" cap="flat" cmpd="sng" algn="ctr">
+                      <a:solidFill>
+                        <a:srgbClr val="E2E2E2"/>
+                      </a:solidFill>
+                      <a:prstDash val="solid"/>
+                      <a:round/>
+                      <a:headEnd type="none" w="med" len="med"/>
+                      <a:tailEnd type="none" w="med" len="med"/>
+                    </a:lnT>
+                    <a:lnB w="9525" cap="flat" cmpd="sng" algn="ctr">
+                      <a:solidFill>
+                        <a:srgbClr val="E2E2E2"/>
+                      </a:solidFill>
+                      <a:prstDash val="solid"/>
+                      <a:round/>
+                      <a:headEnd type="none" w="med" len="med"/>
+                      <a:tailEnd type="none" w="med" len="med"/>
+                    </a:lnB>
+                    <a:solidFill>
+                      <a:srgbClr val="F7F3F4"/>
+                    </a:solidFill>
+                  </a:tcPr>
+                </a:tc>
+              </a:tr>
+              <a:tr h="658368">
+                <a:tc>
+                  <a:txBody>
+                    <a:bodyPr/>
+                    <a:lstStyle/>
+                    <a:p>
+                      <a:pPr algn="ctr" indent="0" marL="0">
+                        <a:buNone/>
+                      </a:pPr>
+                      <a:r>
+                        <a:rPr lang="en-US" sz="1500" dirty="0">
+                          <a:solidFill>
+                            <a:srgbClr val="23272E"/>
+                          </a:solidFill>
+                          <a:latin typeface="Microsoft YaHei" pitchFamily="34" charset="0"/>
+                          <a:ea typeface="Microsoft YaHei" pitchFamily="34" charset="-122"/>
+                          <a:cs typeface="Microsoft YaHei" pitchFamily="34" charset="-120"/>
+                        </a:rPr>
+                        <a:t>E·比价/囤货</a:t>
+                      </a:r>
+                      <a:endParaRPr lang="en-US" sz="1500" dirty="0">
+                        <a:latin typeface="Microsoft YaHei" charset="0"/>
+                        <a:ea typeface="Microsoft YaHei" charset="0"/>
+                        <a:cs typeface="Microsoft YaHei" charset="0"/>
+                      </a:endParaRPr>
+                    </a:p>
+                  </a:txBody>
+                  <a:tcPr marL="63500" marR="63500" marT="38100" marB="38100" anchor="ctr">
+                    <a:lnL w="9525" cap="flat" cmpd="sng" algn="ctr">
+                      <a:solidFill>
+                        <a:srgbClr val="E2E2E2"/>
+                      </a:solidFill>
+                      <a:prstDash val="solid"/>
+                      <a:round/>
+                      <a:headEnd type="none" w="med" len="med"/>
+                      <a:tailEnd type="none" w="med" len="med"/>
+                    </a:lnL>
+                    <a:lnR w="9525" cap="flat" cmpd="sng" algn="ctr">
+                      <a:solidFill>
+                        <a:srgbClr val="E2E2E2"/>
+                      </a:solidFill>
+                      <a:prstDash val="solid"/>
+                      <a:round/>
+                      <a:headEnd type="none" w="med" len="med"/>
+                      <a:tailEnd type="none" w="med" len="med"/>
+                    </a:lnR>
+                    <a:lnT w="9525" cap="flat" cmpd="sng" algn="ctr">
+                      <a:solidFill>
+                        <a:srgbClr val="E2E2E2"/>
+                      </a:solidFill>
+                      <a:prstDash val="solid"/>
+                      <a:round/>
+                      <a:headEnd type="none" w="med" len="med"/>
+                      <a:tailEnd type="none" w="med" len="med"/>
+                    </a:lnT>
+                    <a:lnB w="9525" cap="flat" cmpd="sng" algn="ctr">
+                      <a:solidFill>
+                        <a:srgbClr val="E2E2E2"/>
+                      </a:solidFill>
+                      <a:prstDash val="solid"/>
+                      <a:round/>
+                      <a:headEnd type="none" w="med" len="med"/>
+                      <a:tailEnd type="none" w="med" len="med"/>
+                    </a:lnB>
+                    <a:solidFill>
+                      <a:srgbClr val="FFFFFF"/>
+                    </a:solidFill>
+                  </a:tcPr>
+                </a:tc>
+                <a:tc>
+                  <a:txBody>
+                    <a:bodyPr/>
+                    <a:lstStyle/>
+                    <a:p>
+                      <a:pPr algn="l" indent="0" marL="0">
+                        <a:buNone/>
+                      </a:pPr>
+                      <a:r>
+                        <a:rPr lang="en-US" sz="1500" dirty="0">
+                          <a:solidFill>
+                            <a:srgbClr val="23272E"/>
+                          </a:solidFill>
+                          <a:latin typeface="Microsoft YaHei" pitchFamily="34" charset="0"/>
+                          <a:ea typeface="Microsoft YaHei" pitchFamily="34" charset="-122"/>
+                          <a:cs typeface="Microsoft YaHei" pitchFamily="34" charset="-120"/>
+                        </a:rPr>
+                        <a:t>5</a:t>
+                      </a:r>
+                      <a:endParaRPr lang="en-US" sz="1500" dirty="0">
+                        <a:latin typeface="Microsoft YaHei" charset="0"/>
+                        <a:ea typeface="Microsoft YaHei" charset="0"/>
+                        <a:cs typeface="Microsoft YaHei" charset="0"/>
+                      </a:endParaRPr>
+                    </a:p>
+                  </a:txBody>
+                  <a:tcPr marL="63500" marR="63500" marT="38100" marB="38100" anchor="ctr">
+                    <a:lnL w="9525" cap="flat" cmpd="sng" algn="ctr">
+                      <a:solidFill>
+                        <a:srgbClr val="E2E2E2"/>
+                      </a:solidFill>
+                      <a:prstDash val="solid"/>
+                      <a:round/>
+                      <a:headEnd type="none" w="med" len="med"/>
+                      <a:tailEnd type="none" w="med" len="med"/>
+                    </a:lnL>
+                    <a:lnR w="9525" cap="flat" cmpd="sng" algn="ctr">
+                      <a:solidFill>
+                        <a:srgbClr val="E2E2E2"/>
+                      </a:solidFill>
+                      <a:prstDash val="solid"/>
+                      <a:round/>
+                      <a:headEnd type="none" w="med" len="med"/>
+                      <a:tailEnd type="none" w="med" len="med"/>
+                    </a:lnR>
+                    <a:lnT w="9525" cap="flat" cmpd="sng" algn="ctr">
+                      <a:solidFill>
+                        <a:srgbClr val="E2E2E2"/>
+                      </a:solidFill>
+                      <a:prstDash val="solid"/>
+                      <a:round/>
+                      <a:headEnd type="none" w="med" len="med"/>
+                      <a:tailEnd type="none" w="med" len="med"/>
+                    </a:lnT>
+                    <a:lnB w="9525" cap="flat" cmpd="sng" algn="ctr">
+                      <a:solidFill>
+                        <a:srgbClr val="E2E2E2"/>
+                      </a:solidFill>
+                      <a:prstDash val="solid"/>
+                      <a:round/>
+                      <a:headEnd type="none" w="med" len="med"/>
+                      <a:tailEnd type="none" w="med" len="med"/>
+                    </a:lnB>
+                    <a:solidFill>
+                      <a:srgbClr val="FFFFFF"/>
+                    </a:solidFill>
+                  </a:tcPr>
+                </a:tc>
+                <a:tc>
+                  <a:txBody>
+                    <a:bodyPr/>
+                    <a:lstStyle/>
+                    <a:p>
+                      <a:pPr algn="l" indent="0" marL="0">
+                        <a:buNone/>
+                      </a:pPr>
+                      <a:r>
+                        <a:rPr lang="en-US" sz="1500" dirty="0">
+                          <a:solidFill>
+                            <a:srgbClr val="23272E"/>
+                          </a:solidFill>
+                          <a:latin typeface="Microsoft YaHei" pitchFamily="34" charset="0"/>
+                          <a:ea typeface="Microsoft YaHei" pitchFamily="34" charset="-122"/>
+                          <a:cs typeface="Microsoft YaHei" pitchFamily="34" charset="-120"/>
+                        </a:rPr>
+                        <a:t>KOC</a:t>
+                      </a:r>
+                      <a:endParaRPr lang="en-US" sz="1500" dirty="0">
+                        <a:latin typeface="Microsoft YaHei" charset="0"/>
+                        <a:ea typeface="Microsoft YaHei" charset="0"/>
+                        <a:cs typeface="Microsoft YaHei" charset="0"/>
+                      </a:endParaRPr>
+                    </a:p>
+                  </a:txBody>
+                  <a:tcPr marL="63500" marR="63500" marT="38100" marB="38100" anchor="ctr">
+                    <a:lnL w="9525" cap="flat" cmpd="sng" algn="ctr">
+                      <a:solidFill>
+                        <a:srgbClr val="E2E2E2"/>
+                      </a:solidFill>
+                      <a:prstDash val="solid"/>
+                      <a:round/>
+                      <a:headEnd type="none" w="med" len="med"/>
+                      <a:tailEnd type="none" w="med" len="med"/>
+                    </a:lnL>
+                    <a:lnR w="9525" cap="flat" cmpd="sng" algn="ctr">
+                      <a:solidFill>
+                        <a:srgbClr val="E2E2E2"/>
+                      </a:solidFill>
+                      <a:prstDash val="solid"/>
+                      <a:round/>
+                      <a:headEnd type="none" w="med" len="med"/>
+                      <a:tailEnd type="none" w="med" len="med"/>
+                    </a:lnR>
+                    <a:lnT w="9525" cap="flat" cmpd="sng" algn="ctr">
+                      <a:solidFill>
+                        <a:srgbClr val="E2E2E2"/>
+                      </a:solidFill>
+                      <a:prstDash val="solid"/>
+                      <a:round/>
+                      <a:headEnd type="none" w="med" len="med"/>
+                      <a:tailEnd type="none" w="med" len="med"/>
+                    </a:lnT>
+                    <a:lnB w="9525" cap="flat" cmpd="sng" algn="ctr">
+                      <a:solidFill>
+                        <a:srgbClr val="E2E2E2"/>
+                      </a:solidFill>
+                      <a:prstDash val="solid"/>
+                      <a:round/>
+                      <a:headEnd type="none" w="med" len="med"/>
+                      <a:tailEnd type="none" w="med" len="med"/>
+                    </a:lnB>
+                    <a:solidFill>
+                      <a:srgbClr val="FFFFFF"/>
+                    </a:solidFill>
+                  </a:tcPr>
+                </a:tc>
+                <a:tc>
+                  <a:txBody>
+                    <a:bodyPr/>
+                    <a:lstStyle/>
+                    <a:p>
+                      <a:pPr algn="l" indent="0" marL="0">
+                        <a:buNone/>
+                      </a:pPr>
+                      <a:r>
+                        <a:rPr lang="en-US" sz="1500" dirty="0">
+                          <a:solidFill>
+                            <a:srgbClr val="23272E"/>
+                          </a:solidFill>
+                          <a:latin typeface="Microsoft YaHei" pitchFamily="34" charset="0"/>
+                          <a:ea typeface="Microsoft YaHei" pitchFamily="34" charset="-122"/>
+                          <a:cs typeface="Microsoft YaHei" pitchFamily="34" charset="-120"/>
+                        </a:rPr>
+                        <a:t>组合装直播价·囤货划算</a:t>
                       </a:r>
                       <a:endParaRPr lang="en-US" sz="1500" dirty="0">
                         <a:latin typeface="Microsoft YaHei" charset="0"/>
@@ -11822,99 +15369,6 @@
           </a:graphicData>
         </a:graphic>
       </p:graphicFrame>
-      <p:sp>
-        <p:nvSpPr>
-          <p:cNvPr id="4" name="Text 1"/>
-          <p:cNvSpPr/>
-          <p:nvPr/>
-        </p:nvSpPr>
-        <p:spPr>
-          <a:xfrm>
-            <a:off x="457200" y="5074920"/>
-            <a:ext cx="11247120" cy="1005840"/>
-          </a:xfrm>
-          <a:prstGeom prst="rect">
-            <a:avLst/>
-          </a:prstGeom>
-          <a:noFill/>
-          <a:ln/>
-        </p:spPr>
-        <p:txBody>
-          <a:bodyPr wrap="square" rtlCol="0" anchor="ctr"/>
-          <a:lstStyle/>
-          <a:p>
-            <a:pPr indent="0" marL="0">
-              <a:lnSpc>
-                <a:spcPct val="130000"/>
-              </a:lnSpc>
-              <a:buNone/>
-            </a:pPr>
-            <a:r>
-              <a:rPr lang="en-US" sz="1400" b="1" dirty="0">
-                <a:solidFill>
-                  <a:srgbClr val="23272E"/>
-                </a:solidFill>
-                <a:latin typeface="Microsoft YaHei" pitchFamily="34" charset="0"/>
-                <a:ea typeface="Microsoft YaHei" pitchFamily="34" charset="-122"/>
-                <a:cs typeface="Microsoft YaHei" pitchFamily="34" charset="-120"/>
-              </a:rPr>
-              <a:t>品牌词：</a:t>
-            </a:r>
-            <a:pPr indent="0" marL="0">
-              <a:lnSpc>
-                <a:spcPct val="130000"/>
-              </a:lnSpc>
-              <a:buNone/>
-            </a:pPr>
-            <a:r>
-              <a:rPr lang="en-US" sz="1400" dirty="0">
-                <a:solidFill>
-                  <a:srgbClr val="23272E"/>
-                </a:solidFill>
-                <a:latin typeface="Microsoft YaHei" pitchFamily="34" charset="0"/>
-                <a:ea typeface="Microsoft YaHei" pitchFamily="34" charset="-122"/>
-                <a:cs typeface="Microsoft YaHei" pitchFamily="34" charset="-120"/>
-              </a:rPr>
-              <a:t>皇后的秘密·Quality 1st·黑钻VC100    </a:t>
-            </a:r>
-            <a:pPr indent="0" marL="0">
-              <a:lnSpc>
-                <a:spcPct val="130000"/>
-              </a:lnSpc>
-              <a:buNone/>
-            </a:pPr>
-            <a:r>
-              <a:rPr lang="en-US" sz="1400" b="1" dirty="0">
-                <a:solidFill>
-                  <a:srgbClr val="B0122C"/>
-                </a:solidFill>
-                <a:latin typeface="Microsoft YaHei" pitchFamily="34" charset="0"/>
-                <a:ea typeface="Microsoft YaHei" pitchFamily="34" charset="-122"/>
-                <a:cs typeface="Microsoft YaHei" pitchFamily="34" charset="-120"/>
-              </a:rPr>
-              <a:t>长尾金矿：</a:t>
-            </a:r>
-            <a:pPr indent="0" marL="0">
-              <a:lnSpc>
-                <a:spcPct val="130000"/>
-              </a:lnSpc>
-              <a:buNone/>
-            </a:pPr>
-            <a:r>
-              <a:rPr lang="en-US" sz="1400" dirty="0">
-                <a:solidFill>
-                  <a:srgbClr val="23272E"/>
-                </a:solidFill>
-                <a:latin typeface="Microsoft YaHei" pitchFamily="34" charset="0"/>
-                <a:ea typeface="Microsoft YaHei" pitchFamily="34" charset="-122"/>
-                <a:cs typeface="Microsoft YaHei" pitchFamily="34" charset="-120"/>
-              </a:rPr>
-              <a:t>日本面膜怎么选·面膜不踩雷·VC面膜怎么选·油皮/敏感肌面膜推荐·神经酰胺面膜</a:t>
-            </a:r>
-            <a:endParaRPr lang="en-US" sz="1400" dirty="0"/>
-          </a:p>
-        </p:txBody>
-      </p:sp>
       <p:sp>
         <p:nvSpPr>
           <p:cNvPr id="5" name="Text 2"/>
@@ -12058,7 +15512,7 @@
                 <a:ea typeface="Microsoft YaHei" pitchFamily="34" charset="-122"/>
                 <a:cs typeface="Microsoft YaHei" pitchFamily="34" charset="-120"/>
               </a:rPr>
-              <a:t>⑤ SPU 设定 + 定价</a:t>
+              <a:t>④ 关键词库 · 功效词合规三档</a:t>
             </a:r>
             <a:endParaRPr lang="en-US" sz="2400" dirty="0"/>
           </a:p>
@@ -12079,7 +15533,7 @@
           </p:nvPr>
         </p:nvGraphicFramePr>
         <p:xfrm>
-          <a:off x="457200" y="1463040"/>
+          <a:off x="457200" y="1371600"/>
           <a:ext cx="11247120" cy="914400"/>
         </p:xfrm>
         <a:graphic>
@@ -12087,14 +15541,11 @@
             <a:tbl>
               <a:tblPr/>
               <a:tblGrid>
-                <a:gridCol w="1737360"/>
-                <a:gridCol w="3200400"/>
-                <a:gridCol w="1097280"/>
-                <a:gridCol w="1737360"/>
-                <a:gridCol w="914400"/>
-                <a:gridCol w="2560320"/>
+                <a:gridCol w="3749040"/>
+                <a:gridCol w="3291840"/>
+                <a:gridCol w="4206240"/>
               </a:tblGrid>
-              <a:tr h="658368">
+              <a:tr h="457200">
                 <a:tc>
                   <a:txBody>
                     <a:bodyPr/>
@@ -12104,7 +15555,7 @@
                         <a:buNone/>
                       </a:pPr>
                       <a:r>
-                        <a:rPr lang="en-US" sz="1500" b="1" dirty="0">
+                        <a:rPr lang="en-US" sz="1600" b="1" dirty="0">
                           <a:solidFill>
                             <a:srgbClr val="FFFFFF"/>
                           </a:solidFill>
@@ -12112,9 +15563,9 @@
                           <a:ea typeface="Microsoft YaHei" pitchFamily="34" charset="-122"/>
                           <a:cs typeface="Microsoft YaHei" pitchFamily="34" charset="-120"/>
                         </a:rPr>
-                        <a:t>颜色(版)</a:t>
+                        <a:t>✅ 可用(安全)</a:t>
                       </a:r>
-                      <a:endParaRPr lang="en-US" sz="1500" dirty="0">
+                      <a:endParaRPr lang="en-US" sz="1600" dirty="0">
                         <a:latin typeface="Microsoft YaHei" charset="0"/>
                         <a:ea typeface="Microsoft YaHei" charset="0"/>
                         <a:cs typeface="Microsoft YaHei" charset="0"/>
@@ -12172,7 +15623,7 @@
                         <a:buNone/>
                       </a:pPr>
                       <a:r>
-                        <a:rPr lang="en-US" sz="1500" b="1" dirty="0">
+                        <a:rPr lang="en-US" sz="1600" b="1" dirty="0">
                           <a:solidFill>
                             <a:srgbClr val="FFFFFF"/>
                           </a:solidFill>
@@ -12180,9 +15631,9 @@
                           <a:ea typeface="Microsoft YaHei" pitchFamily="34" charset="-122"/>
                           <a:cs typeface="Microsoft YaHei" pitchFamily="34" charset="-120"/>
                         </a:rPr>
-                        <a:t>官方名</a:t>
+                        <a:t>⚠️ 软化后可用</a:t>
                       </a:r>
-                      <a:endParaRPr lang="en-US" sz="1500" dirty="0">
+                      <a:endParaRPr lang="en-US" sz="1600" dirty="0">
                         <a:latin typeface="Microsoft YaHei" charset="0"/>
                         <a:ea typeface="Microsoft YaHei" charset="0"/>
                         <a:cs typeface="Microsoft YaHei" charset="0"/>
@@ -12240,7 +15691,7 @@
                         <a:buNone/>
                       </a:pPr>
                       <a:r>
-                        <a:rPr lang="en-US" sz="1500" b="1" dirty="0">
+                        <a:rPr lang="en-US" sz="1600" b="1" dirty="0">
                           <a:solidFill>
                             <a:srgbClr val="FFFFFF"/>
                           </a:solidFill>
@@ -12248,9 +15699,9 @@
                           <a:ea typeface="Microsoft YaHei" pitchFamily="34" charset="-122"/>
                           <a:cs typeface="Microsoft YaHei" pitchFamily="34" charset="-120"/>
                         </a:rPr>
-                        <a:t>日常价</a:t>
+                        <a:t>❌ 禁用(违规/需特证)</a:t>
                       </a:r>
-                      <a:endParaRPr lang="en-US" sz="1500" dirty="0">
+                      <a:endParaRPr lang="en-US" sz="1600" dirty="0">
                         <a:latin typeface="Microsoft YaHei" charset="0"/>
                         <a:ea typeface="Microsoft YaHei" charset="0"/>
                         <a:cs typeface="Microsoft YaHei" charset="0"/>
@@ -12299,6 +15750,8 @@
                     </a:solidFill>
                   </a:tcPr>
                 </a:tc>
+              </a:tr>
+              <a:tr h="457200">
                 <a:tc>
                   <a:txBody>
                     <a:bodyPr/>
@@ -12308,15 +15761,15 @@
                         <a:buNone/>
                       </a:pPr>
                       <a:r>
-                        <a:rPr lang="en-US" sz="1500" b="1" dirty="0">
+                        <a:rPr lang="en-US" sz="1500" dirty="0">
                           <a:solidFill>
-                            <a:srgbClr val="FFFFFF"/>
+                            <a:srgbClr val="23272E"/>
                           </a:solidFill>
                           <a:latin typeface="Microsoft YaHei" pitchFamily="34" charset="0"/>
                           <a:ea typeface="Microsoft YaHei" pitchFamily="34" charset="-122"/>
                           <a:cs typeface="Microsoft YaHei" pitchFamily="34" charset="-120"/>
                         </a:rPr>
-                        <a:t>直播价(2/6袋)</a:t>
+                        <a:t>补水 · 保湿 · 服帖 · 不闷肤</a:t>
                       </a:r>
                       <a:endParaRPr lang="en-US" sz="1500" dirty="0">
                         <a:latin typeface="Microsoft YaHei" charset="0"/>
@@ -12324,67 +15777,20 @@
                         <a:cs typeface="Microsoft YaHei" charset="0"/>
                       </a:endParaRPr>
                     </a:p>
-                  </a:txBody>
-                  <a:tcPr marL="91440" marR="91440" marT="45720" marB="45720" anchor="ctr">
-                    <a:lnL w="9525" cap="flat" cmpd="sng" algn="ctr">
-                      <a:solidFill>
-                        <a:srgbClr val="E2E2E2"/>
-                      </a:solidFill>
-                      <a:prstDash val="solid"/>
-                      <a:round/>
-                      <a:headEnd type="none" w="med" len="med"/>
-                      <a:tailEnd type="none" w="med" len="med"/>
-                    </a:lnL>
-                    <a:lnR w="9525" cap="flat" cmpd="sng" algn="ctr">
-                      <a:solidFill>
-                        <a:srgbClr val="E2E2E2"/>
-                      </a:solidFill>
-                      <a:prstDash val="solid"/>
-                      <a:round/>
-                      <a:headEnd type="none" w="med" len="med"/>
-                      <a:tailEnd type="none" w="med" len="med"/>
-                    </a:lnR>
-                    <a:lnT w="9525" cap="flat" cmpd="sng" algn="ctr">
-                      <a:solidFill>
-                        <a:srgbClr val="E2E2E2"/>
-                      </a:solidFill>
-                      <a:prstDash val="solid"/>
-                      <a:round/>
-                      <a:headEnd type="none" w="med" len="med"/>
-                      <a:tailEnd type="none" w="med" len="med"/>
-                    </a:lnT>
-                    <a:lnB w="9525" cap="flat" cmpd="sng" algn="ctr">
-                      <a:solidFill>
-                        <a:srgbClr val="E2E2E2"/>
-                      </a:solidFill>
-                      <a:prstDash val="solid"/>
-                      <a:round/>
-                      <a:headEnd type="none" w="med" len="med"/>
-                      <a:tailEnd type="none" w="med" len="med"/>
-                    </a:lnB>
-                    <a:solidFill>
-                      <a:srgbClr val="7A0E22"/>
-                    </a:solidFill>
-                  </a:tcPr>
-                </a:tc>
-                <a:tc>
-                  <a:txBody>
-                    <a:bodyPr/>
-                    <a:lstStyle/>
                     <a:p>
                       <a:pPr algn="ctr" indent="0" marL="0">
                         <a:buNone/>
                       </a:pPr>
                       <a:r>
-                        <a:rPr lang="en-US" sz="1500" b="1" dirty="0">
+                        <a:rPr lang="en-US" sz="1500" dirty="0">
                           <a:solidFill>
-                            <a:srgbClr val="FFFFFF"/>
+                            <a:srgbClr val="23272E"/>
                           </a:solidFill>
                           <a:latin typeface="Microsoft YaHei" pitchFamily="34" charset="0"/>
                           <a:ea typeface="Microsoft YaHei" pitchFamily="34" charset="-122"/>
                           <a:cs typeface="Microsoft YaHei" pitchFamily="34" charset="-120"/>
                         </a:rPr>
-                        <a:t>库存</a:t>
+                        <a:t>成分名(VC/烟酰胺/神经酰胺)</a:t>
                       </a:r>
                       <a:endParaRPr lang="en-US" sz="1500" dirty="0">
                         <a:latin typeface="Microsoft YaHei" charset="0"/>
@@ -12392,129 +15798,12 @@
                         <a:cs typeface="Microsoft YaHei" charset="0"/>
                       </a:endParaRPr>
                     </a:p>
-                  </a:txBody>
-                  <a:tcPr marL="91440" marR="91440" marT="45720" marB="45720" anchor="ctr">
-                    <a:lnL w="9525" cap="flat" cmpd="sng" algn="ctr">
-                      <a:solidFill>
-                        <a:srgbClr val="E2E2E2"/>
-                      </a:solidFill>
-                      <a:prstDash val="solid"/>
-                      <a:round/>
-                      <a:headEnd type="none" w="med" len="med"/>
-                      <a:tailEnd type="none" w="med" len="med"/>
-                    </a:lnL>
-                    <a:lnR w="9525" cap="flat" cmpd="sng" algn="ctr">
-                      <a:solidFill>
-                        <a:srgbClr val="E2E2E2"/>
-                      </a:solidFill>
-                      <a:prstDash val="solid"/>
-                      <a:round/>
-                      <a:headEnd type="none" w="med" len="med"/>
-                      <a:tailEnd type="none" w="med" len="med"/>
-                    </a:lnR>
-                    <a:lnT w="9525" cap="flat" cmpd="sng" algn="ctr">
-                      <a:solidFill>
-                        <a:srgbClr val="E2E2E2"/>
-                      </a:solidFill>
-                      <a:prstDash val="solid"/>
-                      <a:round/>
-                      <a:headEnd type="none" w="med" len="med"/>
-                      <a:tailEnd type="none" w="med" len="med"/>
-                    </a:lnT>
-                    <a:lnB w="9525" cap="flat" cmpd="sng" algn="ctr">
-                      <a:solidFill>
-                        <a:srgbClr val="E2E2E2"/>
-                      </a:solidFill>
-                      <a:prstDash val="solid"/>
-                      <a:round/>
-                      <a:headEnd type="none" w="med" len="med"/>
-                      <a:tailEnd type="none" w="med" len="med"/>
-                    </a:lnB>
-                    <a:solidFill>
-                      <a:srgbClr val="7A0E22"/>
-                    </a:solidFill>
-                  </a:tcPr>
-                </a:tc>
-                <a:tc>
-                  <a:txBody>
-                    <a:bodyPr/>
-                    <a:lstStyle/>
                     <a:p>
                       <a:pPr algn="ctr" indent="0" marL="0">
                         <a:buNone/>
                       </a:pPr>
                       <a:r>
-                        <a:rPr lang="en-US" sz="1500" b="1" dirty="0">
-                          <a:solidFill>
-                            <a:srgbClr val="FFFFFF"/>
-                          </a:solidFill>
-                          <a:latin typeface="Microsoft YaHei" pitchFamily="34" charset="0"/>
-                          <a:ea typeface="Microsoft YaHei" pitchFamily="34" charset="-122"/>
-                          <a:cs typeface="Microsoft YaHei" pitchFamily="34" charset="-120"/>
-                        </a:rPr>
-                        <a:t>差异定位</a:t>
-                      </a:r>
-                      <a:endParaRPr lang="en-US" sz="1500" dirty="0">
-                        <a:latin typeface="Microsoft YaHei" charset="0"/>
-                        <a:ea typeface="Microsoft YaHei" charset="0"/>
-                        <a:cs typeface="Microsoft YaHei" charset="0"/>
-                      </a:endParaRPr>
-                    </a:p>
-                  </a:txBody>
-                  <a:tcPr marL="91440" marR="91440" marT="45720" marB="45720" anchor="ctr">
-                    <a:lnL w="9525" cap="flat" cmpd="sng" algn="ctr">
-                      <a:solidFill>
-                        <a:srgbClr val="E2E2E2"/>
-                      </a:solidFill>
-                      <a:prstDash val="solid"/>
-                      <a:round/>
-                      <a:headEnd type="none" w="med" len="med"/>
-                      <a:tailEnd type="none" w="med" len="med"/>
-                    </a:lnL>
-                    <a:lnR w="9525" cap="flat" cmpd="sng" algn="ctr">
-                      <a:solidFill>
-                        <a:srgbClr val="E2E2E2"/>
-                      </a:solidFill>
-                      <a:prstDash val="solid"/>
-                      <a:round/>
-                      <a:headEnd type="none" w="med" len="med"/>
-                      <a:tailEnd type="none" w="med" len="med"/>
-                    </a:lnR>
-                    <a:lnT w="9525" cap="flat" cmpd="sng" algn="ctr">
-                      <a:solidFill>
-                        <a:srgbClr val="E2E2E2"/>
-                      </a:solidFill>
-                      <a:prstDash val="solid"/>
-                      <a:round/>
-                      <a:headEnd type="none" w="med" len="med"/>
-                      <a:tailEnd type="none" w="med" len="med"/>
-                    </a:lnT>
-                    <a:lnB w="9525" cap="flat" cmpd="sng" algn="ctr">
-                      <a:solidFill>
-                        <a:srgbClr val="E2E2E2"/>
-                      </a:solidFill>
-                      <a:prstDash val="solid"/>
-                      <a:round/>
-                      <a:headEnd type="none" w="med" len="med"/>
-                      <a:tailEnd type="none" w="med" len="med"/>
-                    </a:lnB>
-                    <a:solidFill>
-                      <a:srgbClr val="7A0E22"/>
-                    </a:solidFill>
-                  </a:tcPr>
-                </a:tc>
-              </a:tr>
-              <a:tr h="658368">
-                <a:tc>
-                  <a:txBody>
-                    <a:bodyPr/>
-                    <a:lstStyle/>
-                    <a:p>
-                      <a:pPr algn="ctr" indent="0" marL="0">
-                        <a:buNone/>
-                      </a:pPr>
-                      <a:r>
-                        <a:rPr lang="en-US" sz="1400" dirty="0">
+                        <a:rPr lang="en-US" sz="1500" dirty="0">
                           <a:solidFill>
                             <a:srgbClr val="23272E"/>
                           </a:solidFill>
@@ -12522,9 +15811,9 @@
                           <a:ea typeface="Microsoft YaHei" pitchFamily="34" charset="-122"/>
                           <a:cs typeface="Microsoft YaHei" pitchFamily="34" charset="-120"/>
                         </a:rPr>
-                        <a:t>金色·标准</a:t>
+                        <a:t>3分钟 · 妆前 · 清爽 · 细腻 · 哑光</a:t>
                       </a:r>
-                      <a:endParaRPr lang="en-US" sz="1400" dirty="0">
+                      <a:endParaRPr lang="en-US" sz="1500" dirty="0">
                         <a:latin typeface="Microsoft YaHei" charset="0"/>
                         <a:ea typeface="Microsoft YaHei" charset="0"/>
                         <a:cs typeface="Microsoft YaHei" charset="0"/>
@@ -12582,7 +15871,7 @@
                         <a:buNone/>
                       </a:pPr>
                       <a:r>
-                        <a:rPr lang="en-US" sz="1400" dirty="0">
+                        <a:rPr lang="en-US" sz="1500" dirty="0">
                           <a:solidFill>
                             <a:srgbClr val="23272E"/>
                           </a:solidFill>
@@ -12590,9 +15879,51 @@
                           <a:ea typeface="Microsoft YaHei" pitchFamily="34" charset="-122"/>
                           <a:cs typeface="Microsoft YaHei" pitchFamily="34" charset="-120"/>
                         </a:rPr>
-                        <a:t>高浓度VC精华面膜</a:t>
+                        <a:t>提亮 · 细致毛孔(替收缩)</a:t>
                       </a:r>
-                      <a:endParaRPr lang="en-US" sz="1400" dirty="0">
+                      <a:endParaRPr lang="en-US" sz="1500" dirty="0">
+                        <a:latin typeface="Microsoft YaHei" charset="0"/>
+                        <a:ea typeface="Microsoft YaHei" charset="0"/>
+                        <a:cs typeface="Microsoft YaHei" charset="0"/>
+                      </a:endParaRPr>
+                    </a:p>
+                    <a:p>
+                      <a:pPr algn="l" indent="0" marL="0">
+                        <a:buNone/>
+                      </a:pPr>
+                      <a:r>
+                        <a:rPr lang="en-US" sz="1500" dirty="0">
+                          <a:solidFill>
+                            <a:srgbClr val="23272E"/>
+                          </a:solidFill>
+                          <a:latin typeface="Microsoft YaHei" pitchFamily="34" charset="0"/>
+                          <a:ea typeface="Microsoft YaHei" pitchFamily="34" charset="-122"/>
+                          <a:cs typeface="Microsoft YaHei" pitchFamily="34" charset="-120"/>
+                        </a:rPr>
+                        <a:t>改善暗沉感 · 控油</a:t>
+                      </a:r>
+                      <a:endParaRPr lang="en-US" sz="1500" dirty="0">
+                        <a:latin typeface="Microsoft YaHei" charset="0"/>
+                        <a:ea typeface="Microsoft YaHei" charset="0"/>
+                        <a:cs typeface="Microsoft YaHei" charset="0"/>
+                      </a:endParaRPr>
+                    </a:p>
+                    <a:p>
+                      <a:pPr algn="l" indent="0" marL="0">
+                        <a:buNone/>
+                      </a:pPr>
+                      <a:r>
+                        <a:rPr lang="en-US" sz="1500" dirty="0">
+                          <a:solidFill>
+                            <a:srgbClr val="23272E"/>
+                          </a:solidFill>
+                          <a:latin typeface="Microsoft YaHei" pitchFamily="34" charset="0"/>
+                          <a:ea typeface="Microsoft YaHei" pitchFamily="34" charset="-122"/>
+                          <a:cs typeface="Microsoft YaHei" pitchFamily="34" charset="-120"/>
+                        </a:rPr>
+                        <a:t>透亮 · 匀净肤色感</a:t>
+                      </a:r>
+                      <a:endParaRPr lang="en-US" sz="1500" dirty="0">
                         <a:latin typeface="Microsoft YaHei" charset="0"/>
                         <a:ea typeface="Microsoft YaHei" charset="0"/>
                         <a:cs typeface="Microsoft YaHei" charset="0"/>
@@ -12650,7 +15981,7 @@
                         <a:buNone/>
                       </a:pPr>
                       <a:r>
-                        <a:rPr lang="en-US" sz="1400" dirty="0">
+                        <a:rPr lang="en-US" sz="1500" dirty="0">
                           <a:solidFill>
                             <a:srgbClr val="23272E"/>
                           </a:solidFill>
@@ -12658,67 +15989,20 @@
                           <a:ea typeface="Microsoft YaHei" pitchFamily="34" charset="-122"/>
                           <a:cs typeface="Microsoft YaHei" pitchFamily="34" charset="-120"/>
                         </a:rPr>
-                        <a:t>69</a:t>
+                        <a:t>美白 · 焕白 · 去黄 · 淡斑 · 淡痘印</a:t>
                       </a:r>
-                      <a:endParaRPr lang="en-US" sz="1400" dirty="0">
+                      <a:endParaRPr lang="en-US" sz="1500" dirty="0">
                         <a:latin typeface="Microsoft YaHei" charset="0"/>
                         <a:ea typeface="Microsoft YaHei" charset="0"/>
                         <a:cs typeface="Microsoft YaHei" charset="0"/>
                       </a:endParaRPr>
                     </a:p>
-                  </a:txBody>
-                  <a:tcPr marL="63500" marR="63500" marT="38100" marB="38100" anchor="ctr">
-                    <a:lnL w="9525" cap="flat" cmpd="sng" algn="ctr">
-                      <a:solidFill>
-                        <a:srgbClr val="E2E2E2"/>
-                      </a:solidFill>
-                      <a:prstDash val="solid"/>
-                      <a:round/>
-                      <a:headEnd type="none" w="med" len="med"/>
-                      <a:tailEnd type="none" w="med" len="med"/>
-                    </a:lnL>
-                    <a:lnR w="9525" cap="flat" cmpd="sng" algn="ctr">
-                      <a:solidFill>
-                        <a:srgbClr val="E2E2E2"/>
-                      </a:solidFill>
-                      <a:prstDash val="solid"/>
-                      <a:round/>
-                      <a:headEnd type="none" w="med" len="med"/>
-                      <a:tailEnd type="none" w="med" len="med"/>
-                    </a:lnR>
-                    <a:lnT w="9525" cap="flat" cmpd="sng" algn="ctr">
-                      <a:solidFill>
-                        <a:srgbClr val="E2E2E2"/>
-                      </a:solidFill>
-                      <a:prstDash val="solid"/>
-                      <a:round/>
-                      <a:headEnd type="none" w="med" len="med"/>
-                      <a:tailEnd type="none" w="med" len="med"/>
-                    </a:lnT>
-                    <a:lnB w="9525" cap="flat" cmpd="sng" algn="ctr">
-                      <a:solidFill>
-                        <a:srgbClr val="E2E2E2"/>
-                      </a:solidFill>
-                      <a:prstDash val="solid"/>
-                      <a:round/>
-                      <a:headEnd type="none" w="med" len="med"/>
-                      <a:tailEnd type="none" w="med" len="med"/>
-                    </a:lnB>
-                    <a:solidFill>
-                      <a:srgbClr val="FFFFFF"/>
-                    </a:solidFill>
-                  </a:tcPr>
-                </a:tc>
-                <a:tc>
-                  <a:txBody>
-                    <a:bodyPr/>
-                    <a:lstStyle/>
                     <a:p>
                       <a:pPr algn="l" indent="0" marL="0">
                         <a:buNone/>
                       </a:pPr>
                       <a:r>
-                        <a:rPr lang="en-US" sz="1400" dirty="0">
+                        <a:rPr lang="en-US" sz="1500" dirty="0">
                           <a:solidFill>
                             <a:srgbClr val="23272E"/>
                           </a:solidFill>
@@ -12726,67 +16010,20 @@
                           <a:ea typeface="Microsoft YaHei" pitchFamily="34" charset="-122"/>
                           <a:cs typeface="Microsoft YaHei" pitchFamily="34" charset="-120"/>
                         </a:rPr>
-                        <a:t>45 / 40</a:t>
+                        <a:t>抑黑 · 祛痘 · 修复受损 · 修护屏障</a:t>
                       </a:r>
-                      <a:endParaRPr lang="en-US" sz="1400" dirty="0">
+                      <a:endParaRPr lang="en-US" sz="1500" dirty="0">
                         <a:latin typeface="Microsoft YaHei" charset="0"/>
                         <a:ea typeface="Microsoft YaHei" charset="0"/>
                         <a:cs typeface="Microsoft YaHei" charset="0"/>
                       </a:endParaRPr>
                     </a:p>
-                  </a:txBody>
-                  <a:tcPr marL="63500" marR="63500" marT="38100" marB="38100" anchor="ctr">
-                    <a:lnL w="9525" cap="flat" cmpd="sng" algn="ctr">
-                      <a:solidFill>
-                        <a:srgbClr val="E2E2E2"/>
-                      </a:solidFill>
-                      <a:prstDash val="solid"/>
-                      <a:round/>
-                      <a:headEnd type="none" w="med" len="med"/>
-                      <a:tailEnd type="none" w="med" len="med"/>
-                    </a:lnL>
-                    <a:lnR w="9525" cap="flat" cmpd="sng" algn="ctr">
-                      <a:solidFill>
-                        <a:srgbClr val="E2E2E2"/>
-                      </a:solidFill>
-                      <a:prstDash val="solid"/>
-                      <a:round/>
-                      <a:headEnd type="none" w="med" len="med"/>
-                      <a:tailEnd type="none" w="med" len="med"/>
-                    </a:lnR>
-                    <a:lnT w="9525" cap="flat" cmpd="sng" algn="ctr">
-                      <a:solidFill>
-                        <a:srgbClr val="E2E2E2"/>
-                      </a:solidFill>
-                      <a:prstDash val="solid"/>
-                      <a:round/>
-                      <a:headEnd type="none" w="med" len="med"/>
-                      <a:tailEnd type="none" w="med" len="med"/>
-                    </a:lnT>
-                    <a:lnB w="9525" cap="flat" cmpd="sng" algn="ctr">
-                      <a:solidFill>
-                        <a:srgbClr val="E2E2E2"/>
-                      </a:solidFill>
-                      <a:prstDash val="solid"/>
-                      <a:round/>
-                      <a:headEnd type="none" w="med" len="med"/>
-                      <a:tailEnd type="none" w="med" len="med"/>
-                    </a:lnB>
-                    <a:solidFill>
-                      <a:srgbClr val="FFFFFF"/>
-                    </a:solidFill>
-                  </a:tcPr>
-                </a:tc>
-                <a:tc>
-                  <a:txBody>
-                    <a:bodyPr/>
-                    <a:lstStyle/>
                     <a:p>
                       <a:pPr algn="l" indent="0" marL="0">
                         <a:buNone/>
                       </a:pPr>
                       <a:r>
-                        <a:rPr lang="en-US" sz="1400" dirty="0">
+                        <a:rPr lang="en-US" sz="1500" dirty="0">
                           <a:solidFill>
                             <a:srgbClr val="23272E"/>
                           </a:solidFill>
@@ -12794,1717 +16031,9 @@
                           <a:ea typeface="Microsoft YaHei" pitchFamily="34" charset="-122"/>
                           <a:cs typeface="Microsoft YaHei" pitchFamily="34" charset="-120"/>
                         </a:rPr>
-                        <a:t>300</a:t>
+                        <a:t>促胶原 · 抗老 · 院线级 · 断货王 · NO.1</a:t>
                       </a:r>
-                      <a:endParaRPr lang="en-US" sz="1400" dirty="0">
-                        <a:latin typeface="Microsoft YaHei" charset="0"/>
-                        <a:ea typeface="Microsoft YaHei" charset="0"/>
-                        <a:cs typeface="Microsoft YaHei" charset="0"/>
-                      </a:endParaRPr>
-                    </a:p>
-                  </a:txBody>
-                  <a:tcPr marL="63500" marR="63500" marT="38100" marB="38100" anchor="ctr">
-                    <a:lnL w="9525" cap="flat" cmpd="sng" algn="ctr">
-                      <a:solidFill>
-                        <a:srgbClr val="E2E2E2"/>
-                      </a:solidFill>
-                      <a:prstDash val="solid"/>
-                      <a:round/>
-                      <a:headEnd type="none" w="med" len="med"/>
-                      <a:tailEnd type="none" w="med" len="med"/>
-                    </a:lnL>
-                    <a:lnR w="9525" cap="flat" cmpd="sng" algn="ctr">
-                      <a:solidFill>
-                        <a:srgbClr val="E2E2E2"/>
-                      </a:solidFill>
-                      <a:prstDash val="solid"/>
-                      <a:round/>
-                      <a:headEnd type="none" w="med" len="med"/>
-                      <a:tailEnd type="none" w="med" len="med"/>
-                    </a:lnR>
-                    <a:lnT w="9525" cap="flat" cmpd="sng" algn="ctr">
-                      <a:solidFill>
-                        <a:srgbClr val="E2E2E2"/>
-                      </a:solidFill>
-                      <a:prstDash val="solid"/>
-                      <a:round/>
-                      <a:headEnd type="none" w="med" len="med"/>
-                      <a:tailEnd type="none" w="med" len="med"/>
-                    </a:lnT>
-                    <a:lnB w="9525" cap="flat" cmpd="sng" algn="ctr">
-                      <a:solidFill>
-                        <a:srgbClr val="E2E2E2"/>
-                      </a:solidFill>
-                      <a:prstDash val="solid"/>
-                      <a:round/>
-                      <a:headEnd type="none" w="med" len="med"/>
-                      <a:tailEnd type="none" w="med" len="med"/>
-                    </a:lnB>
-                    <a:solidFill>
-                      <a:srgbClr val="FFFFFF"/>
-                    </a:solidFill>
-                  </a:tcPr>
-                </a:tc>
-                <a:tc>
-                  <a:txBody>
-                    <a:bodyPr/>
-                    <a:lstStyle/>
-                    <a:p>
-                      <a:pPr algn="l" indent="0" marL="0">
-                        <a:buNone/>
-                      </a:pPr>
-                      <a:r>
-                        <a:rPr lang="en-US" sz="1400" dirty="0">
-                          <a:solidFill>
-                            <a:srgbClr val="23272E"/>
-                          </a:solidFill>
-                          <a:latin typeface="Microsoft YaHei" pitchFamily="34" charset="0"/>
-                          <a:ea typeface="Microsoft YaHei" pitchFamily="34" charset="-122"/>
-                          <a:cs typeface="Microsoft YaHei" pitchFamily="34" charset="-120"/>
-                        </a:rPr>
-                        <a:t>提亮补水·走量爆款</a:t>
-                      </a:r>
-                      <a:endParaRPr lang="en-US" sz="1400" dirty="0">
-                        <a:latin typeface="Microsoft YaHei" charset="0"/>
-                        <a:ea typeface="Microsoft YaHei" charset="0"/>
-                        <a:cs typeface="Microsoft YaHei" charset="0"/>
-                      </a:endParaRPr>
-                    </a:p>
-                  </a:txBody>
-                  <a:tcPr marL="63500" marR="63500" marT="38100" marB="38100" anchor="ctr">
-                    <a:lnL w="9525" cap="flat" cmpd="sng" algn="ctr">
-                      <a:solidFill>
-                        <a:srgbClr val="E2E2E2"/>
-                      </a:solidFill>
-                      <a:prstDash val="solid"/>
-                      <a:round/>
-                      <a:headEnd type="none" w="med" len="med"/>
-                      <a:tailEnd type="none" w="med" len="med"/>
-                    </a:lnL>
-                    <a:lnR w="9525" cap="flat" cmpd="sng" algn="ctr">
-                      <a:solidFill>
-                        <a:srgbClr val="E2E2E2"/>
-                      </a:solidFill>
-                      <a:prstDash val="solid"/>
-                      <a:round/>
-                      <a:headEnd type="none" w="med" len="med"/>
-                      <a:tailEnd type="none" w="med" len="med"/>
-                    </a:lnR>
-                    <a:lnT w="9525" cap="flat" cmpd="sng" algn="ctr">
-                      <a:solidFill>
-                        <a:srgbClr val="E2E2E2"/>
-                      </a:solidFill>
-                      <a:prstDash val="solid"/>
-                      <a:round/>
-                      <a:headEnd type="none" w="med" len="med"/>
-                      <a:tailEnd type="none" w="med" len="med"/>
-                    </a:lnT>
-                    <a:lnB w="9525" cap="flat" cmpd="sng" algn="ctr">
-                      <a:solidFill>
-                        <a:srgbClr val="E2E2E2"/>
-                      </a:solidFill>
-                      <a:prstDash val="solid"/>
-                      <a:round/>
-                      <a:headEnd type="none" w="med" len="med"/>
-                      <a:tailEnd type="none" w="med" len="med"/>
-                    </a:lnB>
-                    <a:solidFill>
-                      <a:srgbClr val="FFFFFF"/>
-                    </a:solidFill>
-                  </a:tcPr>
-                </a:tc>
-              </a:tr>
-              <a:tr h="658368">
-                <a:tc>
-                  <a:txBody>
-                    <a:bodyPr/>
-                    <a:lstStyle/>
-                    <a:p>
-                      <a:pPr algn="ctr" indent="0" marL="0">
-                        <a:buNone/>
-                      </a:pPr>
-                      <a:r>
-                        <a:rPr lang="en-US" sz="1400" dirty="0">
-                          <a:solidFill>
-                            <a:srgbClr val="23272E"/>
-                          </a:solidFill>
-                          <a:latin typeface="Microsoft YaHei" pitchFamily="34" charset="0"/>
-                          <a:ea typeface="Microsoft YaHei" pitchFamily="34" charset="-122"/>
-                          <a:cs typeface="Microsoft YaHei" pitchFamily="34" charset="-120"/>
-                        </a:rPr>
-                        <a:t>黑钻·加强</a:t>
-                      </a:r>
-                      <a:endParaRPr lang="en-US" sz="1400" dirty="0">
-                        <a:latin typeface="Microsoft YaHei" charset="0"/>
-                        <a:ea typeface="Microsoft YaHei" charset="0"/>
-                        <a:cs typeface="Microsoft YaHei" charset="0"/>
-                      </a:endParaRPr>
-                    </a:p>
-                  </a:txBody>
-                  <a:tcPr marL="63500" marR="63500" marT="38100" marB="38100" anchor="ctr">
-                    <a:lnL w="9525" cap="flat" cmpd="sng" algn="ctr">
-                      <a:solidFill>
-                        <a:srgbClr val="E2E2E2"/>
-                      </a:solidFill>
-                      <a:prstDash val="solid"/>
-                      <a:round/>
-                      <a:headEnd type="none" w="med" len="med"/>
-                      <a:tailEnd type="none" w="med" len="med"/>
-                    </a:lnL>
-                    <a:lnR w="9525" cap="flat" cmpd="sng" algn="ctr">
-                      <a:solidFill>
-                        <a:srgbClr val="E2E2E2"/>
-                      </a:solidFill>
-                      <a:prstDash val="solid"/>
-                      <a:round/>
-                      <a:headEnd type="none" w="med" len="med"/>
-                      <a:tailEnd type="none" w="med" len="med"/>
-                    </a:lnR>
-                    <a:lnT w="9525" cap="flat" cmpd="sng" algn="ctr">
-                      <a:solidFill>
-                        <a:srgbClr val="E2E2E2"/>
-                      </a:solidFill>
-                      <a:prstDash val="solid"/>
-                      <a:round/>
-                      <a:headEnd type="none" w="med" len="med"/>
-                      <a:tailEnd type="none" w="med" len="med"/>
-                    </a:lnT>
-                    <a:lnB w="9525" cap="flat" cmpd="sng" algn="ctr">
-                      <a:solidFill>
-                        <a:srgbClr val="E2E2E2"/>
-                      </a:solidFill>
-                      <a:prstDash val="solid"/>
-                      <a:round/>
-                      <a:headEnd type="none" w="med" len="med"/>
-                      <a:tailEnd type="none" w="med" len="med"/>
-                    </a:lnB>
-                    <a:solidFill>
-                      <a:srgbClr val="F7F3F4"/>
-                    </a:solidFill>
-                  </a:tcPr>
-                </a:tc>
-                <a:tc>
-                  <a:txBody>
-                    <a:bodyPr/>
-                    <a:lstStyle/>
-                    <a:p>
-                      <a:pPr algn="l" indent="0" marL="0">
-                        <a:buNone/>
-                      </a:pPr>
-                      <a:r>
-                        <a:rPr lang="en-US" sz="1400" dirty="0">
-                          <a:solidFill>
-                            <a:srgbClr val="23272E"/>
-                          </a:solidFill>
-                          <a:latin typeface="Microsoft YaHei" pitchFamily="34" charset="0"/>
-                          <a:ea typeface="Microsoft YaHei" pitchFamily="34" charset="-122"/>
-                          <a:cs typeface="Microsoft YaHei" pitchFamily="34" charset="-120"/>
-                        </a:rPr>
-                        <a:t>黑钻VC100细毛孔面膜</a:t>
-                      </a:r>
-                      <a:endParaRPr lang="en-US" sz="1400" dirty="0">
-                        <a:latin typeface="Microsoft YaHei" charset="0"/>
-                        <a:ea typeface="Microsoft YaHei" charset="0"/>
-                        <a:cs typeface="Microsoft YaHei" charset="0"/>
-                      </a:endParaRPr>
-                    </a:p>
-                  </a:txBody>
-                  <a:tcPr marL="63500" marR="63500" marT="38100" marB="38100" anchor="ctr">
-                    <a:lnL w="9525" cap="flat" cmpd="sng" algn="ctr">
-                      <a:solidFill>
-                        <a:srgbClr val="E2E2E2"/>
-                      </a:solidFill>
-                      <a:prstDash val="solid"/>
-                      <a:round/>
-                      <a:headEnd type="none" w="med" len="med"/>
-                      <a:tailEnd type="none" w="med" len="med"/>
-                    </a:lnL>
-                    <a:lnR w="9525" cap="flat" cmpd="sng" algn="ctr">
-                      <a:solidFill>
-                        <a:srgbClr val="E2E2E2"/>
-                      </a:solidFill>
-                      <a:prstDash val="solid"/>
-                      <a:round/>
-                      <a:headEnd type="none" w="med" len="med"/>
-                      <a:tailEnd type="none" w="med" len="med"/>
-                    </a:lnR>
-                    <a:lnT w="9525" cap="flat" cmpd="sng" algn="ctr">
-                      <a:solidFill>
-                        <a:srgbClr val="E2E2E2"/>
-                      </a:solidFill>
-                      <a:prstDash val="solid"/>
-                      <a:round/>
-                      <a:headEnd type="none" w="med" len="med"/>
-                      <a:tailEnd type="none" w="med" len="med"/>
-                    </a:lnT>
-                    <a:lnB w="9525" cap="flat" cmpd="sng" algn="ctr">
-                      <a:solidFill>
-                        <a:srgbClr val="E2E2E2"/>
-                      </a:solidFill>
-                      <a:prstDash val="solid"/>
-                      <a:round/>
-                      <a:headEnd type="none" w="med" len="med"/>
-                      <a:tailEnd type="none" w="med" len="med"/>
-                    </a:lnB>
-                    <a:solidFill>
-                      <a:srgbClr val="F7F3F4"/>
-                    </a:solidFill>
-                  </a:tcPr>
-                </a:tc>
-                <a:tc>
-                  <a:txBody>
-                    <a:bodyPr/>
-                    <a:lstStyle/>
-                    <a:p>
-                      <a:pPr algn="l" indent="0" marL="0">
-                        <a:buNone/>
-                      </a:pPr>
-                      <a:r>
-                        <a:rPr lang="en-US" sz="1400" dirty="0">
-                          <a:solidFill>
-                            <a:srgbClr val="23272E"/>
-                          </a:solidFill>
-                          <a:latin typeface="Microsoft YaHei" pitchFamily="34" charset="0"/>
-                          <a:ea typeface="Microsoft YaHei" pitchFamily="34" charset="-122"/>
-                          <a:cs typeface="Microsoft YaHei" pitchFamily="34" charset="-120"/>
-                        </a:rPr>
-                        <a:t>89</a:t>
-                      </a:r>
-                      <a:endParaRPr lang="en-US" sz="1400" dirty="0">
-                        <a:latin typeface="Microsoft YaHei" charset="0"/>
-                        <a:ea typeface="Microsoft YaHei" charset="0"/>
-                        <a:cs typeface="Microsoft YaHei" charset="0"/>
-                      </a:endParaRPr>
-                    </a:p>
-                  </a:txBody>
-                  <a:tcPr marL="63500" marR="63500" marT="38100" marB="38100" anchor="ctr">
-                    <a:lnL w="9525" cap="flat" cmpd="sng" algn="ctr">
-                      <a:solidFill>
-                        <a:srgbClr val="E2E2E2"/>
-                      </a:solidFill>
-                      <a:prstDash val="solid"/>
-                      <a:round/>
-                      <a:headEnd type="none" w="med" len="med"/>
-                      <a:tailEnd type="none" w="med" len="med"/>
-                    </a:lnL>
-                    <a:lnR w="9525" cap="flat" cmpd="sng" algn="ctr">
-                      <a:solidFill>
-                        <a:srgbClr val="E2E2E2"/>
-                      </a:solidFill>
-                      <a:prstDash val="solid"/>
-                      <a:round/>
-                      <a:headEnd type="none" w="med" len="med"/>
-                      <a:tailEnd type="none" w="med" len="med"/>
-                    </a:lnR>
-                    <a:lnT w="9525" cap="flat" cmpd="sng" algn="ctr">
-                      <a:solidFill>
-                        <a:srgbClr val="E2E2E2"/>
-                      </a:solidFill>
-                      <a:prstDash val="solid"/>
-                      <a:round/>
-                      <a:headEnd type="none" w="med" len="med"/>
-                      <a:tailEnd type="none" w="med" len="med"/>
-                    </a:lnT>
-                    <a:lnB w="9525" cap="flat" cmpd="sng" algn="ctr">
-                      <a:solidFill>
-                        <a:srgbClr val="E2E2E2"/>
-                      </a:solidFill>
-                      <a:prstDash val="solid"/>
-                      <a:round/>
-                      <a:headEnd type="none" w="med" len="med"/>
-                      <a:tailEnd type="none" w="med" len="med"/>
-                    </a:lnB>
-                    <a:solidFill>
-                      <a:srgbClr val="F7F3F4"/>
-                    </a:solidFill>
-                  </a:tcPr>
-                </a:tc>
-                <a:tc>
-                  <a:txBody>
-                    <a:bodyPr/>
-                    <a:lstStyle/>
-                    <a:p>
-                      <a:pPr algn="l" indent="0" marL="0">
-                        <a:buNone/>
-                      </a:pPr>
-                      <a:r>
-                        <a:rPr lang="en-US" sz="1400" dirty="0">
-                          <a:solidFill>
-                            <a:srgbClr val="23272E"/>
-                          </a:solidFill>
-                          <a:latin typeface="Microsoft YaHei" pitchFamily="34" charset="0"/>
-                          <a:ea typeface="Microsoft YaHei" pitchFamily="34" charset="-122"/>
-                          <a:cs typeface="Microsoft YaHei" pitchFamily="34" charset="-120"/>
-                        </a:rPr>
-                        <a:t>60 / 55</a:t>
-                      </a:r>
-                      <a:endParaRPr lang="en-US" sz="1400" dirty="0">
-                        <a:latin typeface="Microsoft YaHei" charset="0"/>
-                        <a:ea typeface="Microsoft YaHei" charset="0"/>
-                        <a:cs typeface="Microsoft YaHei" charset="0"/>
-                      </a:endParaRPr>
-                    </a:p>
-                  </a:txBody>
-                  <a:tcPr marL="63500" marR="63500" marT="38100" marB="38100" anchor="ctr">
-                    <a:lnL w="9525" cap="flat" cmpd="sng" algn="ctr">
-                      <a:solidFill>
-                        <a:srgbClr val="E2E2E2"/>
-                      </a:solidFill>
-                      <a:prstDash val="solid"/>
-                      <a:round/>
-                      <a:headEnd type="none" w="med" len="med"/>
-                      <a:tailEnd type="none" w="med" len="med"/>
-                    </a:lnL>
-                    <a:lnR w="9525" cap="flat" cmpd="sng" algn="ctr">
-                      <a:solidFill>
-                        <a:srgbClr val="E2E2E2"/>
-                      </a:solidFill>
-                      <a:prstDash val="solid"/>
-                      <a:round/>
-                      <a:headEnd type="none" w="med" len="med"/>
-                      <a:tailEnd type="none" w="med" len="med"/>
-                    </a:lnR>
-                    <a:lnT w="9525" cap="flat" cmpd="sng" algn="ctr">
-                      <a:solidFill>
-                        <a:srgbClr val="E2E2E2"/>
-                      </a:solidFill>
-                      <a:prstDash val="solid"/>
-                      <a:round/>
-                      <a:headEnd type="none" w="med" len="med"/>
-                      <a:tailEnd type="none" w="med" len="med"/>
-                    </a:lnT>
-                    <a:lnB w="9525" cap="flat" cmpd="sng" algn="ctr">
-                      <a:solidFill>
-                        <a:srgbClr val="E2E2E2"/>
-                      </a:solidFill>
-                      <a:prstDash val="solid"/>
-                      <a:round/>
-                      <a:headEnd type="none" w="med" len="med"/>
-                      <a:tailEnd type="none" w="med" len="med"/>
-                    </a:lnB>
-                    <a:solidFill>
-                      <a:srgbClr val="F7F3F4"/>
-                    </a:solidFill>
-                  </a:tcPr>
-                </a:tc>
-                <a:tc>
-                  <a:txBody>
-                    <a:bodyPr/>
-                    <a:lstStyle/>
-                    <a:p>
-                      <a:pPr algn="l" indent="0" marL="0">
-                        <a:buNone/>
-                      </a:pPr>
-                      <a:r>
-                        <a:rPr lang="en-US" sz="1400" dirty="0">
-                          <a:solidFill>
-                            <a:srgbClr val="23272E"/>
-                          </a:solidFill>
-                          <a:latin typeface="Microsoft YaHei" pitchFamily="34" charset="0"/>
-                          <a:ea typeface="Microsoft YaHei" pitchFamily="34" charset="-122"/>
-                          <a:cs typeface="Microsoft YaHei" pitchFamily="34" charset="-120"/>
-                        </a:rPr>
-                        <a:t>100</a:t>
-                      </a:r>
-                      <a:endParaRPr lang="en-US" sz="1400" dirty="0">
-                        <a:latin typeface="Microsoft YaHei" charset="0"/>
-                        <a:ea typeface="Microsoft YaHei" charset="0"/>
-                        <a:cs typeface="Microsoft YaHei" charset="0"/>
-                      </a:endParaRPr>
-                    </a:p>
-                  </a:txBody>
-                  <a:tcPr marL="63500" marR="63500" marT="38100" marB="38100" anchor="ctr">
-                    <a:lnL w="9525" cap="flat" cmpd="sng" algn="ctr">
-                      <a:solidFill>
-                        <a:srgbClr val="E2E2E2"/>
-                      </a:solidFill>
-                      <a:prstDash val="solid"/>
-                      <a:round/>
-                      <a:headEnd type="none" w="med" len="med"/>
-                      <a:tailEnd type="none" w="med" len="med"/>
-                    </a:lnL>
-                    <a:lnR w="9525" cap="flat" cmpd="sng" algn="ctr">
-                      <a:solidFill>
-                        <a:srgbClr val="E2E2E2"/>
-                      </a:solidFill>
-                      <a:prstDash val="solid"/>
-                      <a:round/>
-                      <a:headEnd type="none" w="med" len="med"/>
-                      <a:tailEnd type="none" w="med" len="med"/>
-                    </a:lnR>
-                    <a:lnT w="9525" cap="flat" cmpd="sng" algn="ctr">
-                      <a:solidFill>
-                        <a:srgbClr val="E2E2E2"/>
-                      </a:solidFill>
-                      <a:prstDash val="solid"/>
-                      <a:round/>
-                      <a:headEnd type="none" w="med" len="med"/>
-                      <a:tailEnd type="none" w="med" len="med"/>
-                    </a:lnT>
-                    <a:lnB w="9525" cap="flat" cmpd="sng" algn="ctr">
-                      <a:solidFill>
-                        <a:srgbClr val="E2E2E2"/>
-                      </a:solidFill>
-                      <a:prstDash val="solid"/>
-                      <a:round/>
-                      <a:headEnd type="none" w="med" len="med"/>
-                      <a:tailEnd type="none" w="med" len="med"/>
-                    </a:lnB>
-                    <a:solidFill>
-                      <a:srgbClr val="F7F3F4"/>
-                    </a:solidFill>
-                  </a:tcPr>
-                </a:tc>
-                <a:tc>
-                  <a:txBody>
-                    <a:bodyPr/>
-                    <a:lstStyle/>
-                    <a:p>
-                      <a:pPr algn="l" indent="0" marL="0">
-                        <a:buNone/>
-                      </a:pPr>
-                      <a:r>
-                        <a:rPr lang="en-US" sz="1400" dirty="0">
-                          <a:solidFill>
-                            <a:srgbClr val="23272E"/>
-                          </a:solidFill>
-                          <a:latin typeface="Microsoft YaHei" pitchFamily="34" charset="0"/>
-                          <a:ea typeface="Microsoft YaHei" pitchFamily="34" charset="-122"/>
-                          <a:cs typeface="Microsoft YaHei" pitchFamily="34" charset="-120"/>
-                        </a:rPr>
-                        <a:t>黑头净孔·差异化旗舰</a:t>
-                      </a:r>
-                      <a:endParaRPr lang="en-US" sz="1400" dirty="0">
-                        <a:latin typeface="Microsoft YaHei" charset="0"/>
-                        <a:ea typeface="Microsoft YaHei" charset="0"/>
-                        <a:cs typeface="Microsoft YaHei" charset="0"/>
-                      </a:endParaRPr>
-                    </a:p>
-                  </a:txBody>
-                  <a:tcPr marL="63500" marR="63500" marT="38100" marB="38100" anchor="ctr">
-                    <a:lnL w="9525" cap="flat" cmpd="sng" algn="ctr">
-                      <a:solidFill>
-                        <a:srgbClr val="E2E2E2"/>
-                      </a:solidFill>
-                      <a:prstDash val="solid"/>
-                      <a:round/>
-                      <a:headEnd type="none" w="med" len="med"/>
-                      <a:tailEnd type="none" w="med" len="med"/>
-                    </a:lnL>
-                    <a:lnR w="9525" cap="flat" cmpd="sng" algn="ctr">
-                      <a:solidFill>
-                        <a:srgbClr val="E2E2E2"/>
-                      </a:solidFill>
-                      <a:prstDash val="solid"/>
-                      <a:round/>
-                      <a:headEnd type="none" w="med" len="med"/>
-                      <a:tailEnd type="none" w="med" len="med"/>
-                    </a:lnR>
-                    <a:lnT w="9525" cap="flat" cmpd="sng" algn="ctr">
-                      <a:solidFill>
-                        <a:srgbClr val="E2E2E2"/>
-                      </a:solidFill>
-                      <a:prstDash val="solid"/>
-                      <a:round/>
-                      <a:headEnd type="none" w="med" len="med"/>
-                      <a:tailEnd type="none" w="med" len="med"/>
-                    </a:lnT>
-                    <a:lnB w="9525" cap="flat" cmpd="sng" algn="ctr">
-                      <a:solidFill>
-                        <a:srgbClr val="E2E2E2"/>
-                      </a:solidFill>
-                      <a:prstDash val="solid"/>
-                      <a:round/>
-                      <a:headEnd type="none" w="med" len="med"/>
-                      <a:tailEnd type="none" w="med" len="med"/>
-                    </a:lnB>
-                    <a:solidFill>
-                      <a:srgbClr val="F7F3F4"/>
-                    </a:solidFill>
-                  </a:tcPr>
-                </a:tc>
-              </a:tr>
-              <a:tr h="658368">
-                <a:tc>
-                  <a:txBody>
-                    <a:bodyPr/>
-                    <a:lstStyle/>
-                    <a:p>
-                      <a:pPr algn="ctr" indent="0" marL="0">
-                        <a:buNone/>
-                      </a:pPr>
-                      <a:r>
-                        <a:rPr lang="en-US" sz="1400" dirty="0">
-                          <a:solidFill>
-                            <a:srgbClr val="23272E"/>
-                          </a:solidFill>
-                          <a:latin typeface="Microsoft YaHei" pitchFamily="34" charset="0"/>
-                          <a:ea typeface="Microsoft YaHei" pitchFamily="34" charset="-122"/>
-                          <a:cs typeface="Microsoft YaHei" pitchFamily="34" charset="-120"/>
-                        </a:rPr>
-                        <a:t>黑银·加强</a:t>
-                      </a:r>
-                      <a:endParaRPr lang="en-US" sz="1400" dirty="0">
-                        <a:latin typeface="Microsoft YaHei" charset="0"/>
-                        <a:ea typeface="Microsoft YaHei" charset="0"/>
-                        <a:cs typeface="Microsoft YaHei" charset="0"/>
-                      </a:endParaRPr>
-                    </a:p>
-                  </a:txBody>
-                  <a:tcPr marL="63500" marR="63500" marT="38100" marB="38100" anchor="ctr">
-                    <a:lnL w="9525" cap="flat" cmpd="sng" algn="ctr">
-                      <a:solidFill>
-                        <a:srgbClr val="E2E2E2"/>
-                      </a:solidFill>
-                      <a:prstDash val="solid"/>
-                      <a:round/>
-                      <a:headEnd type="none" w="med" len="med"/>
-                      <a:tailEnd type="none" w="med" len="med"/>
-                    </a:lnL>
-                    <a:lnR w="9525" cap="flat" cmpd="sng" algn="ctr">
-                      <a:solidFill>
-                        <a:srgbClr val="E2E2E2"/>
-                      </a:solidFill>
-                      <a:prstDash val="solid"/>
-                      <a:round/>
-                      <a:headEnd type="none" w="med" len="med"/>
-                      <a:tailEnd type="none" w="med" len="med"/>
-                    </a:lnR>
-                    <a:lnT w="9525" cap="flat" cmpd="sng" algn="ctr">
-                      <a:solidFill>
-                        <a:srgbClr val="E2E2E2"/>
-                      </a:solidFill>
-                      <a:prstDash val="solid"/>
-                      <a:round/>
-                      <a:headEnd type="none" w="med" len="med"/>
-                      <a:tailEnd type="none" w="med" len="med"/>
-                    </a:lnT>
-                    <a:lnB w="9525" cap="flat" cmpd="sng" algn="ctr">
-                      <a:solidFill>
-                        <a:srgbClr val="E2E2E2"/>
-                      </a:solidFill>
-                      <a:prstDash val="solid"/>
-                      <a:round/>
-                      <a:headEnd type="none" w="med" len="med"/>
-                      <a:tailEnd type="none" w="med" len="med"/>
-                    </a:lnB>
-                    <a:solidFill>
-                      <a:srgbClr val="FFFFFF"/>
-                    </a:solidFill>
-                  </a:tcPr>
-                </a:tc>
-                <a:tc>
-                  <a:txBody>
-                    <a:bodyPr/>
-                    <a:lstStyle/>
-                    <a:p>
-                      <a:pPr algn="l" indent="0" marL="0">
-                        <a:buNone/>
-                      </a:pPr>
-                      <a:r>
-                        <a:rPr lang="en-US" sz="1400" dirty="0">
-                          <a:solidFill>
-                            <a:srgbClr val="23272E"/>
-                          </a:solidFill>
-                          <a:latin typeface="Microsoft YaHei" pitchFamily="34" charset="0"/>
-                          <a:ea typeface="Microsoft YaHei" pitchFamily="34" charset="-122"/>
-                          <a:cs typeface="Microsoft YaHei" pitchFamily="34" charset="-120"/>
-                        </a:rPr>
-                        <a:t>淡纹收毛孔水光肌面膜</a:t>
-                      </a:r>
-                      <a:endParaRPr lang="en-US" sz="1400" dirty="0">
-                        <a:latin typeface="Microsoft YaHei" charset="0"/>
-                        <a:ea typeface="Microsoft YaHei" charset="0"/>
-                        <a:cs typeface="Microsoft YaHei" charset="0"/>
-                      </a:endParaRPr>
-                    </a:p>
-                  </a:txBody>
-                  <a:tcPr marL="63500" marR="63500" marT="38100" marB="38100" anchor="ctr">
-                    <a:lnL w="9525" cap="flat" cmpd="sng" algn="ctr">
-                      <a:solidFill>
-                        <a:srgbClr val="E2E2E2"/>
-                      </a:solidFill>
-                      <a:prstDash val="solid"/>
-                      <a:round/>
-                      <a:headEnd type="none" w="med" len="med"/>
-                      <a:tailEnd type="none" w="med" len="med"/>
-                    </a:lnL>
-                    <a:lnR w="9525" cap="flat" cmpd="sng" algn="ctr">
-                      <a:solidFill>
-                        <a:srgbClr val="E2E2E2"/>
-                      </a:solidFill>
-                      <a:prstDash val="solid"/>
-                      <a:round/>
-                      <a:headEnd type="none" w="med" len="med"/>
-                      <a:tailEnd type="none" w="med" len="med"/>
-                    </a:lnR>
-                    <a:lnT w="9525" cap="flat" cmpd="sng" algn="ctr">
-                      <a:solidFill>
-                        <a:srgbClr val="E2E2E2"/>
-                      </a:solidFill>
-                      <a:prstDash val="solid"/>
-                      <a:round/>
-                      <a:headEnd type="none" w="med" len="med"/>
-                      <a:tailEnd type="none" w="med" len="med"/>
-                    </a:lnT>
-                    <a:lnB w="9525" cap="flat" cmpd="sng" algn="ctr">
-                      <a:solidFill>
-                        <a:srgbClr val="E2E2E2"/>
-                      </a:solidFill>
-                      <a:prstDash val="solid"/>
-                      <a:round/>
-                      <a:headEnd type="none" w="med" len="med"/>
-                      <a:tailEnd type="none" w="med" len="med"/>
-                    </a:lnB>
-                    <a:solidFill>
-                      <a:srgbClr val="FFFFFF"/>
-                    </a:solidFill>
-                  </a:tcPr>
-                </a:tc>
-                <a:tc>
-                  <a:txBody>
-                    <a:bodyPr/>
-                    <a:lstStyle/>
-                    <a:p>
-                      <a:pPr algn="l" indent="0" marL="0">
-                        <a:buNone/>
-                      </a:pPr>
-                      <a:r>
-                        <a:rPr lang="en-US" sz="1400" dirty="0">
-                          <a:solidFill>
-                            <a:srgbClr val="23272E"/>
-                          </a:solidFill>
-                          <a:latin typeface="Microsoft YaHei" pitchFamily="34" charset="0"/>
-                          <a:ea typeface="Microsoft YaHei" pitchFamily="34" charset="-122"/>
-                          <a:cs typeface="Microsoft YaHei" pitchFamily="34" charset="-120"/>
-                        </a:rPr>
-                        <a:t>89</a:t>
-                      </a:r>
-                      <a:endParaRPr lang="en-US" sz="1400" dirty="0">
-                        <a:latin typeface="Microsoft YaHei" charset="0"/>
-                        <a:ea typeface="Microsoft YaHei" charset="0"/>
-                        <a:cs typeface="Microsoft YaHei" charset="0"/>
-                      </a:endParaRPr>
-                    </a:p>
-                  </a:txBody>
-                  <a:tcPr marL="63500" marR="63500" marT="38100" marB="38100" anchor="ctr">
-                    <a:lnL w="9525" cap="flat" cmpd="sng" algn="ctr">
-                      <a:solidFill>
-                        <a:srgbClr val="E2E2E2"/>
-                      </a:solidFill>
-                      <a:prstDash val="solid"/>
-                      <a:round/>
-                      <a:headEnd type="none" w="med" len="med"/>
-                      <a:tailEnd type="none" w="med" len="med"/>
-                    </a:lnL>
-                    <a:lnR w="9525" cap="flat" cmpd="sng" algn="ctr">
-                      <a:solidFill>
-                        <a:srgbClr val="E2E2E2"/>
-                      </a:solidFill>
-                      <a:prstDash val="solid"/>
-                      <a:round/>
-                      <a:headEnd type="none" w="med" len="med"/>
-                      <a:tailEnd type="none" w="med" len="med"/>
-                    </a:lnR>
-                    <a:lnT w="9525" cap="flat" cmpd="sng" algn="ctr">
-                      <a:solidFill>
-                        <a:srgbClr val="E2E2E2"/>
-                      </a:solidFill>
-                      <a:prstDash val="solid"/>
-                      <a:round/>
-                      <a:headEnd type="none" w="med" len="med"/>
-                      <a:tailEnd type="none" w="med" len="med"/>
-                    </a:lnT>
-                    <a:lnB w="9525" cap="flat" cmpd="sng" algn="ctr">
-                      <a:solidFill>
-                        <a:srgbClr val="E2E2E2"/>
-                      </a:solidFill>
-                      <a:prstDash val="solid"/>
-                      <a:round/>
-                      <a:headEnd type="none" w="med" len="med"/>
-                      <a:tailEnd type="none" w="med" len="med"/>
-                    </a:lnB>
-                    <a:solidFill>
-                      <a:srgbClr val="FFFFFF"/>
-                    </a:solidFill>
-                  </a:tcPr>
-                </a:tc>
-                <a:tc>
-                  <a:txBody>
-                    <a:bodyPr/>
-                    <a:lstStyle/>
-                    <a:p>
-                      <a:pPr algn="l" indent="0" marL="0">
-                        <a:buNone/>
-                      </a:pPr>
-                      <a:r>
-                        <a:rPr lang="en-US" sz="1400" dirty="0">
-                          <a:solidFill>
-                            <a:srgbClr val="23272E"/>
-                          </a:solidFill>
-                          <a:latin typeface="Microsoft YaHei" pitchFamily="34" charset="0"/>
-                          <a:ea typeface="Microsoft YaHei" pitchFamily="34" charset="-122"/>
-                          <a:cs typeface="Microsoft YaHei" pitchFamily="34" charset="-120"/>
-                        </a:rPr>
-                        <a:t>60 / 55</a:t>
-                      </a:r>
-                      <a:endParaRPr lang="en-US" sz="1400" dirty="0">
-                        <a:latin typeface="Microsoft YaHei" charset="0"/>
-                        <a:ea typeface="Microsoft YaHei" charset="0"/>
-                        <a:cs typeface="Microsoft YaHei" charset="0"/>
-                      </a:endParaRPr>
-                    </a:p>
-                  </a:txBody>
-                  <a:tcPr marL="63500" marR="63500" marT="38100" marB="38100" anchor="ctr">
-                    <a:lnL w="9525" cap="flat" cmpd="sng" algn="ctr">
-                      <a:solidFill>
-                        <a:srgbClr val="E2E2E2"/>
-                      </a:solidFill>
-                      <a:prstDash val="solid"/>
-                      <a:round/>
-                      <a:headEnd type="none" w="med" len="med"/>
-                      <a:tailEnd type="none" w="med" len="med"/>
-                    </a:lnL>
-                    <a:lnR w="9525" cap="flat" cmpd="sng" algn="ctr">
-                      <a:solidFill>
-                        <a:srgbClr val="E2E2E2"/>
-                      </a:solidFill>
-                      <a:prstDash val="solid"/>
-                      <a:round/>
-                      <a:headEnd type="none" w="med" len="med"/>
-                      <a:tailEnd type="none" w="med" len="med"/>
-                    </a:lnR>
-                    <a:lnT w="9525" cap="flat" cmpd="sng" algn="ctr">
-                      <a:solidFill>
-                        <a:srgbClr val="E2E2E2"/>
-                      </a:solidFill>
-                      <a:prstDash val="solid"/>
-                      <a:round/>
-                      <a:headEnd type="none" w="med" len="med"/>
-                      <a:tailEnd type="none" w="med" len="med"/>
-                    </a:lnT>
-                    <a:lnB w="9525" cap="flat" cmpd="sng" algn="ctr">
-                      <a:solidFill>
-                        <a:srgbClr val="E2E2E2"/>
-                      </a:solidFill>
-                      <a:prstDash val="solid"/>
-                      <a:round/>
-                      <a:headEnd type="none" w="med" len="med"/>
-                      <a:tailEnd type="none" w="med" len="med"/>
-                    </a:lnB>
-                    <a:solidFill>
-                      <a:srgbClr val="FFFFFF"/>
-                    </a:solidFill>
-                  </a:tcPr>
-                </a:tc>
-                <a:tc>
-                  <a:txBody>
-                    <a:bodyPr/>
-                    <a:lstStyle/>
-                    <a:p>
-                      <a:pPr algn="l" indent="0" marL="0">
-                        <a:buNone/>
-                      </a:pPr>
-                      <a:r>
-                        <a:rPr lang="en-US" sz="1400" dirty="0">
-                          <a:solidFill>
-                            <a:srgbClr val="23272E"/>
-                          </a:solidFill>
-                          <a:latin typeface="Microsoft YaHei" pitchFamily="34" charset="0"/>
-                          <a:ea typeface="Microsoft YaHei" pitchFamily="34" charset="-122"/>
-                          <a:cs typeface="Microsoft YaHei" pitchFamily="34" charset="-120"/>
-                        </a:rPr>
-                        <a:t>200</a:t>
-                      </a:r>
-                      <a:endParaRPr lang="en-US" sz="1400" dirty="0">
-                        <a:latin typeface="Microsoft YaHei" charset="0"/>
-                        <a:ea typeface="Microsoft YaHei" charset="0"/>
-                        <a:cs typeface="Microsoft YaHei" charset="0"/>
-                      </a:endParaRPr>
-                    </a:p>
-                  </a:txBody>
-                  <a:tcPr marL="63500" marR="63500" marT="38100" marB="38100" anchor="ctr">
-                    <a:lnL w="9525" cap="flat" cmpd="sng" algn="ctr">
-                      <a:solidFill>
-                        <a:srgbClr val="E2E2E2"/>
-                      </a:solidFill>
-                      <a:prstDash val="solid"/>
-                      <a:round/>
-                      <a:headEnd type="none" w="med" len="med"/>
-                      <a:tailEnd type="none" w="med" len="med"/>
-                    </a:lnL>
-                    <a:lnR w="9525" cap="flat" cmpd="sng" algn="ctr">
-                      <a:solidFill>
-                        <a:srgbClr val="E2E2E2"/>
-                      </a:solidFill>
-                      <a:prstDash val="solid"/>
-                      <a:round/>
-                      <a:headEnd type="none" w="med" len="med"/>
-                      <a:tailEnd type="none" w="med" len="med"/>
-                    </a:lnR>
-                    <a:lnT w="9525" cap="flat" cmpd="sng" algn="ctr">
-                      <a:solidFill>
-                        <a:srgbClr val="E2E2E2"/>
-                      </a:solidFill>
-                      <a:prstDash val="solid"/>
-                      <a:round/>
-                      <a:headEnd type="none" w="med" len="med"/>
-                      <a:tailEnd type="none" w="med" len="med"/>
-                    </a:lnT>
-                    <a:lnB w="9525" cap="flat" cmpd="sng" algn="ctr">
-                      <a:solidFill>
-                        <a:srgbClr val="E2E2E2"/>
-                      </a:solidFill>
-                      <a:prstDash val="solid"/>
-                      <a:round/>
-                      <a:headEnd type="none" w="med" len="med"/>
-                      <a:tailEnd type="none" w="med" len="med"/>
-                    </a:lnB>
-                    <a:solidFill>
-                      <a:srgbClr val="FFFFFF"/>
-                    </a:solidFill>
-                  </a:tcPr>
-                </a:tc>
-                <a:tc>
-                  <a:txBody>
-                    <a:bodyPr/>
-                    <a:lstStyle/>
-                    <a:p>
-                      <a:pPr algn="l" indent="0" marL="0">
-                        <a:buNone/>
-                      </a:pPr>
-                      <a:r>
-                        <a:rPr lang="en-US" sz="1400" dirty="0">
-                          <a:solidFill>
-                            <a:srgbClr val="23272E"/>
-                          </a:solidFill>
-                          <a:latin typeface="Microsoft YaHei" pitchFamily="34" charset="0"/>
-                          <a:ea typeface="Microsoft YaHei" pitchFamily="34" charset="-122"/>
-                          <a:cs typeface="Microsoft YaHei" pitchFamily="34" charset="-120"/>
-                        </a:rPr>
-                        <a:t>水光·细毛孔</a:t>
-                      </a:r>
-                      <a:endParaRPr lang="en-US" sz="1400" dirty="0">
-                        <a:latin typeface="Microsoft YaHei" charset="0"/>
-                        <a:ea typeface="Microsoft YaHei" charset="0"/>
-                        <a:cs typeface="Microsoft YaHei" charset="0"/>
-                      </a:endParaRPr>
-                    </a:p>
-                  </a:txBody>
-                  <a:tcPr marL="63500" marR="63500" marT="38100" marB="38100" anchor="ctr">
-                    <a:lnL w="9525" cap="flat" cmpd="sng" algn="ctr">
-                      <a:solidFill>
-                        <a:srgbClr val="E2E2E2"/>
-                      </a:solidFill>
-                      <a:prstDash val="solid"/>
-                      <a:round/>
-                      <a:headEnd type="none" w="med" len="med"/>
-                      <a:tailEnd type="none" w="med" len="med"/>
-                    </a:lnL>
-                    <a:lnR w="9525" cap="flat" cmpd="sng" algn="ctr">
-                      <a:solidFill>
-                        <a:srgbClr val="E2E2E2"/>
-                      </a:solidFill>
-                      <a:prstDash val="solid"/>
-                      <a:round/>
-                      <a:headEnd type="none" w="med" len="med"/>
-                      <a:tailEnd type="none" w="med" len="med"/>
-                    </a:lnR>
-                    <a:lnT w="9525" cap="flat" cmpd="sng" algn="ctr">
-                      <a:solidFill>
-                        <a:srgbClr val="E2E2E2"/>
-                      </a:solidFill>
-                      <a:prstDash val="solid"/>
-                      <a:round/>
-                      <a:headEnd type="none" w="med" len="med"/>
-                      <a:tailEnd type="none" w="med" len="med"/>
-                    </a:lnT>
-                    <a:lnB w="9525" cap="flat" cmpd="sng" algn="ctr">
-                      <a:solidFill>
-                        <a:srgbClr val="E2E2E2"/>
-                      </a:solidFill>
-                      <a:prstDash val="solid"/>
-                      <a:round/>
-                      <a:headEnd type="none" w="med" len="med"/>
-                      <a:tailEnd type="none" w="med" len="med"/>
-                    </a:lnB>
-                    <a:solidFill>
-                      <a:srgbClr val="FFFFFF"/>
-                    </a:solidFill>
-                  </a:tcPr>
-                </a:tc>
-              </a:tr>
-              <a:tr h="658368">
-                <a:tc>
-                  <a:txBody>
-                    <a:bodyPr/>
-                    <a:lstStyle/>
-                    <a:p>
-                      <a:pPr algn="ctr" indent="0" marL="0">
-                        <a:buNone/>
-                      </a:pPr>
-                      <a:r>
-                        <a:rPr lang="en-US" sz="1400" dirty="0">
-                          <a:solidFill>
-                            <a:srgbClr val="23272E"/>
-                          </a:solidFill>
-                          <a:latin typeface="Microsoft YaHei" pitchFamily="34" charset="0"/>
-                          <a:ea typeface="Microsoft YaHei" pitchFamily="34" charset="-122"/>
-                          <a:cs typeface="Microsoft YaHei" pitchFamily="34" charset="-120"/>
-                        </a:rPr>
-                        <a:t>深蓝·标准</a:t>
-                      </a:r>
-                      <a:endParaRPr lang="en-US" sz="1400" dirty="0">
-                        <a:latin typeface="Microsoft YaHei" charset="0"/>
-                        <a:ea typeface="Microsoft YaHei" charset="0"/>
-                        <a:cs typeface="Microsoft YaHei" charset="0"/>
-                      </a:endParaRPr>
-                    </a:p>
-                  </a:txBody>
-                  <a:tcPr marL="63500" marR="63500" marT="38100" marB="38100" anchor="ctr">
-                    <a:lnL w="9525" cap="flat" cmpd="sng" algn="ctr">
-                      <a:solidFill>
-                        <a:srgbClr val="E2E2E2"/>
-                      </a:solidFill>
-                      <a:prstDash val="solid"/>
-                      <a:round/>
-                      <a:headEnd type="none" w="med" len="med"/>
-                      <a:tailEnd type="none" w="med" len="med"/>
-                    </a:lnL>
-                    <a:lnR w="9525" cap="flat" cmpd="sng" algn="ctr">
-                      <a:solidFill>
-                        <a:srgbClr val="E2E2E2"/>
-                      </a:solidFill>
-                      <a:prstDash val="solid"/>
-                      <a:round/>
-                      <a:headEnd type="none" w="med" len="med"/>
-                      <a:tailEnd type="none" w="med" len="med"/>
-                    </a:lnR>
-                    <a:lnT w="9525" cap="flat" cmpd="sng" algn="ctr">
-                      <a:solidFill>
-                        <a:srgbClr val="E2E2E2"/>
-                      </a:solidFill>
-                      <a:prstDash val="solid"/>
-                      <a:round/>
-                      <a:headEnd type="none" w="med" len="med"/>
-                      <a:tailEnd type="none" w="med" len="med"/>
-                    </a:lnT>
-                    <a:lnB w="9525" cap="flat" cmpd="sng" algn="ctr">
-                      <a:solidFill>
-                        <a:srgbClr val="E2E2E2"/>
-                      </a:solidFill>
-                      <a:prstDash val="solid"/>
-                      <a:round/>
-                      <a:headEnd type="none" w="med" len="med"/>
-                      <a:tailEnd type="none" w="med" len="med"/>
-                    </a:lnB>
-                    <a:solidFill>
-                      <a:srgbClr val="F7F3F4"/>
-                    </a:solidFill>
-                  </a:tcPr>
-                </a:tc>
-                <a:tc>
-                  <a:txBody>
-                    <a:bodyPr/>
-                    <a:lstStyle/>
-                    <a:p>
-                      <a:pPr algn="l" indent="0" marL="0">
-                        <a:buNone/>
-                      </a:pPr>
-                      <a:r>
-                        <a:rPr lang="en-US" sz="1400" dirty="0">
-                          <a:solidFill>
-                            <a:srgbClr val="23272E"/>
-                          </a:solidFill>
-                          <a:latin typeface="Microsoft YaHei" pitchFamily="34" charset="0"/>
-                          <a:ea typeface="Microsoft YaHei" pitchFamily="34" charset="-122"/>
-                          <a:cs typeface="Microsoft YaHei" pitchFamily="34" charset="-120"/>
-                        </a:rPr>
-                        <a:t>神经酰胺修护保湿面膜</a:t>
-                      </a:r>
-                      <a:endParaRPr lang="en-US" sz="1400" dirty="0">
-                        <a:latin typeface="Microsoft YaHei" charset="0"/>
-                        <a:ea typeface="Microsoft YaHei" charset="0"/>
-                        <a:cs typeface="Microsoft YaHei" charset="0"/>
-                      </a:endParaRPr>
-                    </a:p>
-                  </a:txBody>
-                  <a:tcPr marL="63500" marR="63500" marT="38100" marB="38100" anchor="ctr">
-                    <a:lnL w="9525" cap="flat" cmpd="sng" algn="ctr">
-                      <a:solidFill>
-                        <a:srgbClr val="E2E2E2"/>
-                      </a:solidFill>
-                      <a:prstDash val="solid"/>
-                      <a:round/>
-                      <a:headEnd type="none" w="med" len="med"/>
-                      <a:tailEnd type="none" w="med" len="med"/>
-                    </a:lnL>
-                    <a:lnR w="9525" cap="flat" cmpd="sng" algn="ctr">
-                      <a:solidFill>
-                        <a:srgbClr val="E2E2E2"/>
-                      </a:solidFill>
-                      <a:prstDash val="solid"/>
-                      <a:round/>
-                      <a:headEnd type="none" w="med" len="med"/>
-                      <a:tailEnd type="none" w="med" len="med"/>
-                    </a:lnR>
-                    <a:lnT w="9525" cap="flat" cmpd="sng" algn="ctr">
-                      <a:solidFill>
-                        <a:srgbClr val="E2E2E2"/>
-                      </a:solidFill>
-                      <a:prstDash val="solid"/>
-                      <a:round/>
-                      <a:headEnd type="none" w="med" len="med"/>
-                      <a:tailEnd type="none" w="med" len="med"/>
-                    </a:lnT>
-                    <a:lnB w="9525" cap="flat" cmpd="sng" algn="ctr">
-                      <a:solidFill>
-                        <a:srgbClr val="E2E2E2"/>
-                      </a:solidFill>
-                      <a:prstDash val="solid"/>
-                      <a:round/>
-                      <a:headEnd type="none" w="med" len="med"/>
-                      <a:tailEnd type="none" w="med" len="med"/>
-                    </a:lnB>
-                    <a:solidFill>
-                      <a:srgbClr val="F7F3F4"/>
-                    </a:solidFill>
-                  </a:tcPr>
-                </a:tc>
-                <a:tc>
-                  <a:txBody>
-                    <a:bodyPr/>
-                    <a:lstStyle/>
-                    <a:p>
-                      <a:pPr algn="l" indent="0" marL="0">
-                        <a:buNone/>
-                      </a:pPr>
-                      <a:r>
-                        <a:rPr lang="en-US" sz="1400" dirty="0">
-                          <a:solidFill>
-                            <a:srgbClr val="23272E"/>
-                          </a:solidFill>
-                          <a:latin typeface="Microsoft YaHei" pitchFamily="34" charset="0"/>
-                          <a:ea typeface="Microsoft YaHei" pitchFamily="34" charset="-122"/>
-                          <a:cs typeface="Microsoft YaHei" pitchFamily="34" charset="-120"/>
-                        </a:rPr>
-                        <a:t>69</a:t>
-                      </a:r>
-                      <a:endParaRPr lang="en-US" sz="1400" dirty="0">
-                        <a:latin typeface="Microsoft YaHei" charset="0"/>
-                        <a:ea typeface="Microsoft YaHei" charset="0"/>
-                        <a:cs typeface="Microsoft YaHei" charset="0"/>
-                      </a:endParaRPr>
-                    </a:p>
-                  </a:txBody>
-                  <a:tcPr marL="63500" marR="63500" marT="38100" marB="38100" anchor="ctr">
-                    <a:lnL w="9525" cap="flat" cmpd="sng" algn="ctr">
-                      <a:solidFill>
-                        <a:srgbClr val="E2E2E2"/>
-                      </a:solidFill>
-                      <a:prstDash val="solid"/>
-                      <a:round/>
-                      <a:headEnd type="none" w="med" len="med"/>
-                      <a:tailEnd type="none" w="med" len="med"/>
-                    </a:lnL>
-                    <a:lnR w="9525" cap="flat" cmpd="sng" algn="ctr">
-                      <a:solidFill>
-                        <a:srgbClr val="E2E2E2"/>
-                      </a:solidFill>
-                      <a:prstDash val="solid"/>
-                      <a:round/>
-                      <a:headEnd type="none" w="med" len="med"/>
-                      <a:tailEnd type="none" w="med" len="med"/>
-                    </a:lnR>
-                    <a:lnT w="9525" cap="flat" cmpd="sng" algn="ctr">
-                      <a:solidFill>
-                        <a:srgbClr val="E2E2E2"/>
-                      </a:solidFill>
-                      <a:prstDash val="solid"/>
-                      <a:round/>
-                      <a:headEnd type="none" w="med" len="med"/>
-                      <a:tailEnd type="none" w="med" len="med"/>
-                    </a:lnT>
-                    <a:lnB w="9525" cap="flat" cmpd="sng" algn="ctr">
-                      <a:solidFill>
-                        <a:srgbClr val="E2E2E2"/>
-                      </a:solidFill>
-                      <a:prstDash val="solid"/>
-                      <a:round/>
-                      <a:headEnd type="none" w="med" len="med"/>
-                      <a:tailEnd type="none" w="med" len="med"/>
-                    </a:lnB>
-                    <a:solidFill>
-                      <a:srgbClr val="F7F3F4"/>
-                    </a:solidFill>
-                  </a:tcPr>
-                </a:tc>
-                <a:tc>
-                  <a:txBody>
-                    <a:bodyPr/>
-                    <a:lstStyle/>
-                    <a:p>
-                      <a:pPr algn="l" indent="0" marL="0">
-                        <a:buNone/>
-                      </a:pPr>
-                      <a:r>
-                        <a:rPr lang="en-US" sz="1400" dirty="0">
-                          <a:solidFill>
-                            <a:srgbClr val="23272E"/>
-                          </a:solidFill>
-                          <a:latin typeface="Microsoft YaHei" pitchFamily="34" charset="0"/>
-                          <a:ea typeface="Microsoft YaHei" pitchFamily="34" charset="-122"/>
-                          <a:cs typeface="Microsoft YaHei" pitchFamily="34" charset="-120"/>
-                        </a:rPr>
-                        <a:t>45 / 40</a:t>
-                      </a:r>
-                      <a:endParaRPr lang="en-US" sz="1400" dirty="0">
-                        <a:latin typeface="Microsoft YaHei" charset="0"/>
-                        <a:ea typeface="Microsoft YaHei" charset="0"/>
-                        <a:cs typeface="Microsoft YaHei" charset="0"/>
-                      </a:endParaRPr>
-                    </a:p>
-                  </a:txBody>
-                  <a:tcPr marL="63500" marR="63500" marT="38100" marB="38100" anchor="ctr">
-                    <a:lnL w="9525" cap="flat" cmpd="sng" algn="ctr">
-                      <a:solidFill>
-                        <a:srgbClr val="E2E2E2"/>
-                      </a:solidFill>
-                      <a:prstDash val="solid"/>
-                      <a:round/>
-                      <a:headEnd type="none" w="med" len="med"/>
-                      <a:tailEnd type="none" w="med" len="med"/>
-                    </a:lnL>
-                    <a:lnR w="9525" cap="flat" cmpd="sng" algn="ctr">
-                      <a:solidFill>
-                        <a:srgbClr val="E2E2E2"/>
-                      </a:solidFill>
-                      <a:prstDash val="solid"/>
-                      <a:round/>
-                      <a:headEnd type="none" w="med" len="med"/>
-                      <a:tailEnd type="none" w="med" len="med"/>
-                    </a:lnR>
-                    <a:lnT w="9525" cap="flat" cmpd="sng" algn="ctr">
-                      <a:solidFill>
-                        <a:srgbClr val="E2E2E2"/>
-                      </a:solidFill>
-                      <a:prstDash val="solid"/>
-                      <a:round/>
-                      <a:headEnd type="none" w="med" len="med"/>
-                      <a:tailEnd type="none" w="med" len="med"/>
-                    </a:lnT>
-                    <a:lnB w="9525" cap="flat" cmpd="sng" algn="ctr">
-                      <a:solidFill>
-                        <a:srgbClr val="E2E2E2"/>
-                      </a:solidFill>
-                      <a:prstDash val="solid"/>
-                      <a:round/>
-                      <a:headEnd type="none" w="med" len="med"/>
-                      <a:tailEnd type="none" w="med" len="med"/>
-                    </a:lnB>
-                    <a:solidFill>
-                      <a:srgbClr val="F7F3F4"/>
-                    </a:solidFill>
-                  </a:tcPr>
-                </a:tc>
-                <a:tc>
-                  <a:txBody>
-                    <a:bodyPr/>
-                    <a:lstStyle/>
-                    <a:p>
-                      <a:pPr algn="l" indent="0" marL="0">
-                        <a:buNone/>
-                      </a:pPr>
-                      <a:r>
-                        <a:rPr lang="en-US" sz="1400" dirty="0">
-                          <a:solidFill>
-                            <a:srgbClr val="23272E"/>
-                          </a:solidFill>
-                          <a:latin typeface="Microsoft YaHei" pitchFamily="34" charset="0"/>
-                          <a:ea typeface="Microsoft YaHei" pitchFamily="34" charset="-122"/>
-                          <a:cs typeface="Microsoft YaHei" pitchFamily="34" charset="-120"/>
-                        </a:rPr>
-                        <a:t>50*</a:t>
-                      </a:r>
-                      <a:endParaRPr lang="en-US" sz="1400" dirty="0">
-                        <a:latin typeface="Microsoft YaHei" charset="0"/>
-                        <a:ea typeface="Microsoft YaHei" charset="0"/>
-                        <a:cs typeface="Microsoft YaHei" charset="0"/>
-                      </a:endParaRPr>
-                    </a:p>
-                  </a:txBody>
-                  <a:tcPr marL="63500" marR="63500" marT="38100" marB="38100" anchor="ctr">
-                    <a:lnL w="9525" cap="flat" cmpd="sng" algn="ctr">
-                      <a:solidFill>
-                        <a:srgbClr val="E2E2E2"/>
-                      </a:solidFill>
-                      <a:prstDash val="solid"/>
-                      <a:round/>
-                      <a:headEnd type="none" w="med" len="med"/>
-                      <a:tailEnd type="none" w="med" len="med"/>
-                    </a:lnL>
-                    <a:lnR w="9525" cap="flat" cmpd="sng" algn="ctr">
-                      <a:solidFill>
-                        <a:srgbClr val="E2E2E2"/>
-                      </a:solidFill>
-                      <a:prstDash val="solid"/>
-                      <a:round/>
-                      <a:headEnd type="none" w="med" len="med"/>
-                      <a:tailEnd type="none" w="med" len="med"/>
-                    </a:lnR>
-                    <a:lnT w="9525" cap="flat" cmpd="sng" algn="ctr">
-                      <a:solidFill>
-                        <a:srgbClr val="E2E2E2"/>
-                      </a:solidFill>
-                      <a:prstDash val="solid"/>
-                      <a:round/>
-                      <a:headEnd type="none" w="med" len="med"/>
-                      <a:tailEnd type="none" w="med" len="med"/>
-                    </a:lnT>
-                    <a:lnB w="9525" cap="flat" cmpd="sng" algn="ctr">
-                      <a:solidFill>
-                        <a:srgbClr val="E2E2E2"/>
-                      </a:solidFill>
-                      <a:prstDash val="solid"/>
-                      <a:round/>
-                      <a:headEnd type="none" w="med" len="med"/>
-                      <a:tailEnd type="none" w="med" len="med"/>
-                    </a:lnB>
-                    <a:solidFill>
-                      <a:srgbClr val="F7F3F4"/>
-                    </a:solidFill>
-                  </a:tcPr>
-                </a:tc>
-                <a:tc>
-                  <a:txBody>
-                    <a:bodyPr/>
-                    <a:lstStyle/>
-                    <a:p>
-                      <a:pPr algn="l" indent="0" marL="0">
-                        <a:buNone/>
-                      </a:pPr>
-                      <a:r>
-                        <a:rPr lang="en-US" sz="1400" dirty="0">
-                          <a:solidFill>
-                            <a:srgbClr val="23272E"/>
-                          </a:solidFill>
-                          <a:latin typeface="Microsoft YaHei" pitchFamily="34" charset="0"/>
-                          <a:ea typeface="Microsoft YaHei" pitchFamily="34" charset="-122"/>
-                          <a:cs typeface="Microsoft YaHei" pitchFamily="34" charset="-120"/>
-                        </a:rPr>
-                        <a:t>维稳补水·换季</a:t>
-                      </a:r>
-                      <a:endParaRPr lang="en-US" sz="1400" dirty="0">
-                        <a:latin typeface="Microsoft YaHei" charset="0"/>
-                        <a:ea typeface="Microsoft YaHei" charset="0"/>
-                        <a:cs typeface="Microsoft YaHei" charset="0"/>
-                      </a:endParaRPr>
-                    </a:p>
-                  </a:txBody>
-                  <a:tcPr marL="63500" marR="63500" marT="38100" marB="38100" anchor="ctr">
-                    <a:lnL w="9525" cap="flat" cmpd="sng" algn="ctr">
-                      <a:solidFill>
-                        <a:srgbClr val="E2E2E2"/>
-                      </a:solidFill>
-                      <a:prstDash val="solid"/>
-                      <a:round/>
-                      <a:headEnd type="none" w="med" len="med"/>
-                      <a:tailEnd type="none" w="med" len="med"/>
-                    </a:lnL>
-                    <a:lnR w="9525" cap="flat" cmpd="sng" algn="ctr">
-                      <a:solidFill>
-                        <a:srgbClr val="E2E2E2"/>
-                      </a:solidFill>
-                      <a:prstDash val="solid"/>
-                      <a:round/>
-                      <a:headEnd type="none" w="med" len="med"/>
-                      <a:tailEnd type="none" w="med" len="med"/>
-                    </a:lnR>
-                    <a:lnT w="9525" cap="flat" cmpd="sng" algn="ctr">
-                      <a:solidFill>
-                        <a:srgbClr val="E2E2E2"/>
-                      </a:solidFill>
-                      <a:prstDash val="solid"/>
-                      <a:round/>
-                      <a:headEnd type="none" w="med" len="med"/>
-                      <a:tailEnd type="none" w="med" len="med"/>
-                    </a:lnT>
-                    <a:lnB w="9525" cap="flat" cmpd="sng" algn="ctr">
-                      <a:solidFill>
-                        <a:srgbClr val="E2E2E2"/>
-                      </a:solidFill>
-                      <a:prstDash val="solid"/>
-                      <a:round/>
-                      <a:headEnd type="none" w="med" len="med"/>
-                      <a:tailEnd type="none" w="med" len="med"/>
-                    </a:lnB>
-                    <a:solidFill>
-                      <a:srgbClr val="F7F3F4"/>
-                    </a:solidFill>
-                  </a:tcPr>
-                </a:tc>
-              </a:tr>
-              <a:tr h="658368">
-                <a:tc>
-                  <a:txBody>
-                    <a:bodyPr/>
-                    <a:lstStyle/>
-                    <a:p>
-                      <a:pPr algn="ctr" indent="0" marL="0">
-                        <a:buNone/>
-                      </a:pPr>
-                      <a:r>
-                        <a:rPr lang="en-US" sz="1400" dirty="0">
-                          <a:solidFill>
-                            <a:srgbClr val="23272E"/>
-                          </a:solidFill>
-                          <a:latin typeface="Microsoft YaHei" pitchFamily="34" charset="0"/>
-                          <a:ea typeface="Microsoft YaHei" pitchFamily="34" charset="-122"/>
-                          <a:cs typeface="Microsoft YaHei" pitchFamily="34" charset="-120"/>
-                        </a:rPr>
-                        <a:t>银色·标准</a:t>
-                      </a:r>
-                      <a:endParaRPr lang="en-US" sz="1400" dirty="0">
-                        <a:latin typeface="Microsoft YaHei" charset="0"/>
-                        <a:ea typeface="Microsoft YaHei" charset="0"/>
-                        <a:cs typeface="Microsoft YaHei" charset="0"/>
-                      </a:endParaRPr>
-                    </a:p>
-                  </a:txBody>
-                  <a:tcPr marL="63500" marR="63500" marT="38100" marB="38100" anchor="ctr">
-                    <a:lnL w="9525" cap="flat" cmpd="sng" algn="ctr">
-                      <a:solidFill>
-                        <a:srgbClr val="E2E2E2"/>
-                      </a:solidFill>
-                      <a:prstDash val="solid"/>
-                      <a:round/>
-                      <a:headEnd type="none" w="med" len="med"/>
-                      <a:tailEnd type="none" w="med" len="med"/>
-                    </a:lnL>
-                    <a:lnR w="9525" cap="flat" cmpd="sng" algn="ctr">
-                      <a:solidFill>
-                        <a:srgbClr val="E2E2E2"/>
-                      </a:solidFill>
-                      <a:prstDash val="solid"/>
-                      <a:round/>
-                      <a:headEnd type="none" w="med" len="med"/>
-                      <a:tailEnd type="none" w="med" len="med"/>
-                    </a:lnR>
-                    <a:lnT w="9525" cap="flat" cmpd="sng" algn="ctr">
-                      <a:solidFill>
-                        <a:srgbClr val="E2E2E2"/>
-                      </a:solidFill>
-                      <a:prstDash val="solid"/>
-                      <a:round/>
-                      <a:headEnd type="none" w="med" len="med"/>
-                      <a:tailEnd type="none" w="med" len="med"/>
-                    </a:lnT>
-                    <a:lnB w="9525" cap="flat" cmpd="sng" algn="ctr">
-                      <a:solidFill>
-                        <a:srgbClr val="E2E2E2"/>
-                      </a:solidFill>
-                      <a:prstDash val="solid"/>
-                      <a:round/>
-                      <a:headEnd type="none" w="med" len="med"/>
-                      <a:tailEnd type="none" w="med" len="med"/>
-                    </a:lnB>
-                    <a:solidFill>
-                      <a:srgbClr val="FFFFFF"/>
-                    </a:solidFill>
-                  </a:tcPr>
-                </a:tc>
-                <a:tc>
-                  <a:txBody>
-                    <a:bodyPr/>
-                    <a:lstStyle/>
-                    <a:p>
-                      <a:pPr algn="l" indent="0" marL="0">
-                        <a:buNone/>
-                      </a:pPr>
-                      <a:r>
-                        <a:rPr lang="en-US" sz="1400" dirty="0">
-                          <a:solidFill>
-                            <a:srgbClr val="23272E"/>
-                          </a:solidFill>
-                          <a:latin typeface="Microsoft YaHei" pitchFamily="34" charset="0"/>
-                          <a:ea typeface="Microsoft YaHei" pitchFamily="34" charset="-122"/>
-                          <a:cs typeface="Microsoft YaHei" pitchFamily="34" charset="-120"/>
-                        </a:rPr>
-                        <a:t>高浓度VC速效面膜</a:t>
-                      </a:r>
-                      <a:endParaRPr lang="en-US" sz="1400" dirty="0">
-                        <a:latin typeface="Microsoft YaHei" charset="0"/>
-                        <a:ea typeface="Microsoft YaHei" charset="0"/>
-                        <a:cs typeface="Microsoft YaHei" charset="0"/>
-                      </a:endParaRPr>
-                    </a:p>
-                  </a:txBody>
-                  <a:tcPr marL="63500" marR="63500" marT="38100" marB="38100" anchor="ctr">
-                    <a:lnL w="9525" cap="flat" cmpd="sng" algn="ctr">
-                      <a:solidFill>
-                        <a:srgbClr val="E2E2E2"/>
-                      </a:solidFill>
-                      <a:prstDash val="solid"/>
-                      <a:round/>
-                      <a:headEnd type="none" w="med" len="med"/>
-                      <a:tailEnd type="none" w="med" len="med"/>
-                    </a:lnL>
-                    <a:lnR w="9525" cap="flat" cmpd="sng" algn="ctr">
-                      <a:solidFill>
-                        <a:srgbClr val="E2E2E2"/>
-                      </a:solidFill>
-                      <a:prstDash val="solid"/>
-                      <a:round/>
-                      <a:headEnd type="none" w="med" len="med"/>
-                      <a:tailEnd type="none" w="med" len="med"/>
-                    </a:lnR>
-                    <a:lnT w="9525" cap="flat" cmpd="sng" algn="ctr">
-                      <a:solidFill>
-                        <a:srgbClr val="E2E2E2"/>
-                      </a:solidFill>
-                      <a:prstDash val="solid"/>
-                      <a:round/>
-                      <a:headEnd type="none" w="med" len="med"/>
-                      <a:tailEnd type="none" w="med" len="med"/>
-                    </a:lnT>
-                    <a:lnB w="9525" cap="flat" cmpd="sng" algn="ctr">
-                      <a:solidFill>
-                        <a:srgbClr val="E2E2E2"/>
-                      </a:solidFill>
-                      <a:prstDash val="solid"/>
-                      <a:round/>
-                      <a:headEnd type="none" w="med" len="med"/>
-                      <a:tailEnd type="none" w="med" len="med"/>
-                    </a:lnB>
-                    <a:solidFill>
-                      <a:srgbClr val="FFFFFF"/>
-                    </a:solidFill>
-                  </a:tcPr>
-                </a:tc>
-                <a:tc>
-                  <a:txBody>
-                    <a:bodyPr/>
-                    <a:lstStyle/>
-                    <a:p>
-                      <a:pPr algn="l" indent="0" marL="0">
-                        <a:buNone/>
-                      </a:pPr>
-                      <a:r>
-                        <a:rPr lang="en-US" sz="1400" dirty="0">
-                          <a:solidFill>
-                            <a:srgbClr val="23272E"/>
-                          </a:solidFill>
-                          <a:latin typeface="Microsoft YaHei" pitchFamily="34" charset="0"/>
-                          <a:ea typeface="Microsoft YaHei" pitchFamily="34" charset="-122"/>
-                          <a:cs typeface="Microsoft YaHei" pitchFamily="34" charset="-120"/>
-                        </a:rPr>
-                        <a:t>69</a:t>
-                      </a:r>
-                      <a:endParaRPr lang="en-US" sz="1400" dirty="0">
-                        <a:latin typeface="Microsoft YaHei" charset="0"/>
-                        <a:ea typeface="Microsoft YaHei" charset="0"/>
-                        <a:cs typeface="Microsoft YaHei" charset="0"/>
-                      </a:endParaRPr>
-                    </a:p>
-                  </a:txBody>
-                  <a:tcPr marL="63500" marR="63500" marT="38100" marB="38100" anchor="ctr">
-                    <a:lnL w="9525" cap="flat" cmpd="sng" algn="ctr">
-                      <a:solidFill>
-                        <a:srgbClr val="E2E2E2"/>
-                      </a:solidFill>
-                      <a:prstDash val="solid"/>
-                      <a:round/>
-                      <a:headEnd type="none" w="med" len="med"/>
-                      <a:tailEnd type="none" w="med" len="med"/>
-                    </a:lnL>
-                    <a:lnR w="9525" cap="flat" cmpd="sng" algn="ctr">
-                      <a:solidFill>
-                        <a:srgbClr val="E2E2E2"/>
-                      </a:solidFill>
-                      <a:prstDash val="solid"/>
-                      <a:round/>
-                      <a:headEnd type="none" w="med" len="med"/>
-                      <a:tailEnd type="none" w="med" len="med"/>
-                    </a:lnR>
-                    <a:lnT w="9525" cap="flat" cmpd="sng" algn="ctr">
-                      <a:solidFill>
-                        <a:srgbClr val="E2E2E2"/>
-                      </a:solidFill>
-                      <a:prstDash val="solid"/>
-                      <a:round/>
-                      <a:headEnd type="none" w="med" len="med"/>
-                      <a:tailEnd type="none" w="med" len="med"/>
-                    </a:lnT>
-                    <a:lnB w="9525" cap="flat" cmpd="sng" algn="ctr">
-                      <a:solidFill>
-                        <a:srgbClr val="E2E2E2"/>
-                      </a:solidFill>
-                      <a:prstDash val="solid"/>
-                      <a:round/>
-                      <a:headEnd type="none" w="med" len="med"/>
-                      <a:tailEnd type="none" w="med" len="med"/>
-                    </a:lnB>
-                    <a:solidFill>
-                      <a:srgbClr val="FFFFFF"/>
-                    </a:solidFill>
-                  </a:tcPr>
-                </a:tc>
-                <a:tc>
-                  <a:txBody>
-                    <a:bodyPr/>
-                    <a:lstStyle/>
-                    <a:p>
-                      <a:pPr algn="l" indent="0" marL="0">
-                        <a:buNone/>
-                      </a:pPr>
-                      <a:r>
-                        <a:rPr lang="en-US" sz="1400" dirty="0">
-                          <a:solidFill>
-                            <a:srgbClr val="23272E"/>
-                          </a:solidFill>
-                          <a:latin typeface="Microsoft YaHei" pitchFamily="34" charset="0"/>
-                          <a:ea typeface="Microsoft YaHei" pitchFamily="34" charset="-122"/>
-                          <a:cs typeface="Microsoft YaHei" pitchFamily="34" charset="-120"/>
-                        </a:rPr>
-                        <a:t>45 / 40</a:t>
-                      </a:r>
-                      <a:endParaRPr lang="en-US" sz="1400" dirty="0">
-                        <a:latin typeface="Microsoft YaHei" charset="0"/>
-                        <a:ea typeface="Microsoft YaHei" charset="0"/>
-                        <a:cs typeface="Microsoft YaHei" charset="0"/>
-                      </a:endParaRPr>
-                    </a:p>
-                  </a:txBody>
-                  <a:tcPr marL="63500" marR="63500" marT="38100" marB="38100" anchor="ctr">
-                    <a:lnL w="9525" cap="flat" cmpd="sng" algn="ctr">
-                      <a:solidFill>
-                        <a:srgbClr val="E2E2E2"/>
-                      </a:solidFill>
-                      <a:prstDash val="solid"/>
-                      <a:round/>
-                      <a:headEnd type="none" w="med" len="med"/>
-                      <a:tailEnd type="none" w="med" len="med"/>
-                    </a:lnL>
-                    <a:lnR w="9525" cap="flat" cmpd="sng" algn="ctr">
-                      <a:solidFill>
-                        <a:srgbClr val="E2E2E2"/>
-                      </a:solidFill>
-                      <a:prstDash val="solid"/>
-                      <a:round/>
-                      <a:headEnd type="none" w="med" len="med"/>
-                      <a:tailEnd type="none" w="med" len="med"/>
-                    </a:lnR>
-                    <a:lnT w="9525" cap="flat" cmpd="sng" algn="ctr">
-                      <a:solidFill>
-                        <a:srgbClr val="E2E2E2"/>
-                      </a:solidFill>
-                      <a:prstDash val="solid"/>
-                      <a:round/>
-                      <a:headEnd type="none" w="med" len="med"/>
-                      <a:tailEnd type="none" w="med" len="med"/>
-                    </a:lnT>
-                    <a:lnB w="9525" cap="flat" cmpd="sng" algn="ctr">
-                      <a:solidFill>
-                        <a:srgbClr val="E2E2E2"/>
-                      </a:solidFill>
-                      <a:prstDash val="solid"/>
-                      <a:round/>
-                      <a:headEnd type="none" w="med" len="med"/>
-                      <a:tailEnd type="none" w="med" len="med"/>
-                    </a:lnB>
-                    <a:solidFill>
-                      <a:srgbClr val="FFFFFF"/>
-                    </a:solidFill>
-                  </a:tcPr>
-                </a:tc>
-                <a:tc>
-                  <a:txBody>
-                    <a:bodyPr/>
-                    <a:lstStyle/>
-                    <a:p>
-                      <a:pPr algn="l" indent="0" marL="0">
-                        <a:buNone/>
-                      </a:pPr>
-                      <a:r>
-                        <a:rPr lang="en-US" sz="1400" dirty="0">
-                          <a:solidFill>
-                            <a:srgbClr val="23272E"/>
-                          </a:solidFill>
-                          <a:latin typeface="Microsoft YaHei" pitchFamily="34" charset="0"/>
-                          <a:ea typeface="Microsoft YaHei" pitchFamily="34" charset="-122"/>
-                          <a:cs typeface="Microsoft YaHei" pitchFamily="34" charset="-120"/>
-                        </a:rPr>
-                        <a:t>50*</a:t>
-                      </a:r>
-                      <a:endParaRPr lang="en-US" sz="1400" dirty="0">
-                        <a:latin typeface="Microsoft YaHei" charset="0"/>
-                        <a:ea typeface="Microsoft YaHei" charset="0"/>
-                        <a:cs typeface="Microsoft YaHei" charset="0"/>
-                      </a:endParaRPr>
-                    </a:p>
-                  </a:txBody>
-                  <a:tcPr marL="63500" marR="63500" marT="38100" marB="38100" anchor="ctr">
-                    <a:lnL w="9525" cap="flat" cmpd="sng" algn="ctr">
-                      <a:solidFill>
-                        <a:srgbClr val="E2E2E2"/>
-                      </a:solidFill>
-                      <a:prstDash val="solid"/>
-                      <a:round/>
-                      <a:headEnd type="none" w="med" len="med"/>
-                      <a:tailEnd type="none" w="med" len="med"/>
-                    </a:lnL>
-                    <a:lnR w="9525" cap="flat" cmpd="sng" algn="ctr">
-                      <a:solidFill>
-                        <a:srgbClr val="E2E2E2"/>
-                      </a:solidFill>
-                      <a:prstDash val="solid"/>
-                      <a:round/>
-                      <a:headEnd type="none" w="med" len="med"/>
-                      <a:tailEnd type="none" w="med" len="med"/>
-                    </a:lnR>
-                    <a:lnT w="9525" cap="flat" cmpd="sng" algn="ctr">
-                      <a:solidFill>
-                        <a:srgbClr val="E2E2E2"/>
-                      </a:solidFill>
-                      <a:prstDash val="solid"/>
-                      <a:round/>
-                      <a:headEnd type="none" w="med" len="med"/>
-                      <a:tailEnd type="none" w="med" len="med"/>
-                    </a:lnT>
-                    <a:lnB w="9525" cap="flat" cmpd="sng" algn="ctr">
-                      <a:solidFill>
-                        <a:srgbClr val="E2E2E2"/>
-                      </a:solidFill>
-                      <a:prstDash val="solid"/>
-                      <a:round/>
-                      <a:headEnd type="none" w="med" len="med"/>
-                      <a:tailEnd type="none" w="med" len="med"/>
-                    </a:lnB>
-                    <a:solidFill>
-                      <a:srgbClr val="FFFFFF"/>
-                    </a:solidFill>
-                  </a:tcPr>
-                </a:tc>
-                <a:tc>
-                  <a:txBody>
-                    <a:bodyPr/>
-                    <a:lstStyle/>
-                    <a:p>
-                      <a:pPr algn="l" indent="0" marL="0">
-                        <a:buNone/>
-                      </a:pPr>
-                      <a:r>
-                        <a:rPr lang="en-US" sz="1400" dirty="0">
-                          <a:solidFill>
-                            <a:srgbClr val="23272E"/>
-                          </a:solidFill>
-                          <a:latin typeface="Microsoft YaHei" pitchFamily="34" charset="0"/>
-                          <a:ea typeface="Microsoft YaHei" pitchFamily="34" charset="-122"/>
-                          <a:cs typeface="Microsoft YaHei" pitchFamily="34" charset="-120"/>
-                        </a:rPr>
-                        <a:t>提亮(⚠️美白慎)</a:t>
-                      </a:r>
-                      <a:endParaRPr lang="en-US" sz="1400" dirty="0">
+                      <a:endParaRPr lang="en-US" sz="1500" dirty="0">
                         <a:latin typeface="Microsoft YaHei" charset="0"/>
                         <a:ea typeface="Microsoft YaHei" charset="0"/>
                         <a:cs typeface="Microsoft YaHei" charset="0"/>
@@ -14566,8 +16095,8 @@
         </p:nvSpPr>
         <p:spPr>
           <a:xfrm>
-            <a:off x="457200" y="5532120"/>
-            <a:ext cx="11247120" cy="365760"/>
+            <a:off x="457200" y="5074920"/>
+            <a:ext cx="11247120" cy="1005840"/>
           </a:xfrm>
           <a:prstGeom prst="rect">
             <a:avLst/>
@@ -14580,20 +16109,74 @@
           <a:lstStyle/>
           <a:p>
             <a:pPr indent="0" marL="0">
+              <a:lnSpc>
+                <a:spcPct val="130000"/>
+              </a:lnSpc>
               <a:buNone/>
             </a:pPr>
             <a:r>
-              <a:rPr lang="en-US" sz="1250" dirty="0">
+              <a:rPr lang="en-US" sz="1400" b="1" dirty="0">
                 <a:solidFill>
-                  <a:srgbClr val="8A8F98"/>
+                  <a:srgbClr val="23272E"/>
                 </a:solidFill>
                 <a:latin typeface="Microsoft YaHei" pitchFamily="34" charset="0"/>
                 <a:ea typeface="Microsoft YaHei" pitchFamily="34" charset="-122"/>
                 <a:cs typeface="Microsoft YaHei" pitchFamily="34" charset="-120"/>
               </a:rPr>
-              <a:t>主推：金色+黑银走量 · 黑钻VC100内容旗舰 · 深蓝细分 · 银色克制   |   * 库存会补货+陆续进新品</a:t>
+              <a:t>品牌词：</a:t>
             </a:r>
-            <a:endParaRPr lang="en-US" sz="1250" dirty="0"/>
+            <a:pPr indent="0" marL="0">
+              <a:lnSpc>
+                <a:spcPct val="130000"/>
+              </a:lnSpc>
+              <a:buNone/>
+            </a:pPr>
+            <a:r>
+              <a:rPr lang="en-US" sz="1400" dirty="0">
+                <a:solidFill>
+                  <a:srgbClr val="23272E"/>
+                </a:solidFill>
+                <a:latin typeface="Microsoft YaHei" pitchFamily="34" charset="0"/>
+                <a:ea typeface="Microsoft YaHei" pitchFamily="34" charset="-122"/>
+                <a:cs typeface="Microsoft YaHei" pitchFamily="34" charset="-120"/>
+              </a:rPr>
+              <a:t>皇后的秘密·Quality 1st·黑钻VC100    </a:t>
+            </a:r>
+            <a:pPr indent="0" marL="0">
+              <a:lnSpc>
+                <a:spcPct val="130000"/>
+              </a:lnSpc>
+              <a:buNone/>
+            </a:pPr>
+            <a:r>
+              <a:rPr lang="en-US" sz="1400" b="1" dirty="0">
+                <a:solidFill>
+                  <a:srgbClr val="B0122C"/>
+                </a:solidFill>
+                <a:latin typeface="Microsoft YaHei" pitchFamily="34" charset="0"/>
+                <a:ea typeface="Microsoft YaHei" pitchFamily="34" charset="-122"/>
+                <a:cs typeface="Microsoft YaHei" pitchFamily="34" charset="-120"/>
+              </a:rPr>
+              <a:t>长尾金矿：</a:t>
+            </a:r>
+            <a:pPr indent="0" marL="0">
+              <a:lnSpc>
+                <a:spcPct val="130000"/>
+              </a:lnSpc>
+              <a:buNone/>
+            </a:pPr>
+            <a:r>
+              <a:rPr lang="en-US" sz="1400" dirty="0">
+                <a:solidFill>
+                  <a:srgbClr val="23272E"/>
+                </a:solidFill>
+                <a:latin typeface="Microsoft YaHei" pitchFamily="34" charset="0"/>
+                <a:ea typeface="Microsoft YaHei" pitchFamily="34" charset="-122"/>
+                <a:cs typeface="Microsoft YaHei" pitchFamily="34" charset="-120"/>
+              </a:rPr>
+              <a:t>日本面膜怎么选·面膜不踩雷·VC面膜怎么选·油皮/敏感肌面膜推荐·神经酰胺面膜</a:t>
+            </a:r>
+            <a:endParaRPr lang="en-US" sz="1400" dirty="0"/>
           </a:p>
         </p:txBody>
       </p:sp>
